--- a/3-Master_Plan/re_entry/HEROs_and_PASSes/slides/CHAR_PD17_HAND.pptx
+++ b/3-Master_Plan/re_entry/HEROs_and_PASSes/slides/CHAR_PD17_HAND.pptx
@@ -7497,181 +7497,16 @@
           <a:chExt cx="0" cy="0"/>
         </a:xfrm>
       </p:grpSpPr>
-      <p:pic>
-        <p:nvPicPr>
-          <p:cNvPr id="7" name="Picture 6">
-            <a:extLst>
-              <a:ext uri="{FF2B5EF4-FFF2-40B4-BE49-F238E27FC236}">
-                <a16:creationId xmlns:a16="http://schemas.microsoft.com/office/drawing/2014/main" id="{A3214CB9-8ABF-657F-41D2-2BE51FF9499F}"/>
-              </a:ext>
-            </a:extLst>
-          </p:cNvPr>
-          <p:cNvPicPr>
-            <a:picLocks noChangeAspect="1"/>
-          </p:cNvPicPr>
-          <p:nvPr/>
-        </p:nvPicPr>
-        <p:blipFill>
-          <a:blip r:embed="rId2"/>
-          <a:srcRect/>
-          <a:stretch/>
-        </p:blipFill>
-        <p:spPr>
-          <a:xfrm>
-            <a:off x="4551567" y="925973"/>
-            <a:ext cx="7077307" cy="5404488"/>
-          </a:xfrm>
-          <a:prstGeom prst="rect">
-            <a:avLst/>
-          </a:prstGeom>
-        </p:spPr>
-      </p:pic>
-      <mc:AlternateContent xmlns:mc="http://schemas.openxmlformats.org/markup-compatibility/2006" xmlns:a14="http://schemas.microsoft.com/office/drawing/2010/main">
-        <mc:Choice Requires="a14">
-          <p:sp>
-            <p:nvSpPr>
-              <p:cNvPr id="2" name="TextBox 1"/>
-              <p:cNvSpPr txBox="1"/>
-              <p:nvPr/>
-            </p:nvSpPr>
-            <p:spPr>
-              <a:xfrm>
-                <a:off x="384048" y="219456"/>
-                <a:ext cx="6222473" cy="418191"/>
-              </a:xfrm>
-              <a:prstGeom prst="rect">
-                <a:avLst/>
-              </a:prstGeom>
-              <a:noFill/>
-            </p:spPr>
-            <p:txBody>
-              <a:bodyPr wrap="none">
-                <a:spAutoFit/>
-              </a:bodyPr>
-              <a:lstStyle/>
-              <a:p>
-                <a:r>
-                  <a:rPr sz="2000" b="1" i="0" baseline="0" dirty="0">
-                    <a:latin typeface="Calibri"/>
-                  </a:rPr>
-                  <a:t>PD17 — Empirical team </a:t>
-                </a:r>
-                <a14:m>
-                  <m:oMath xmlns:m="http://schemas.openxmlformats.org/officeDocument/2006/math">
-                    <m:sSub>
-                      <m:sSubPr>
-                        <m:ctrlPr>
-                          <a:rPr lang="en-US" sz="2000" b="1" i="1" baseline="0" dirty="0" smtClean="0">
-                            <a:latin typeface="Cambria Math" panose="02040503050406030204" pitchFamily="18" charset="0"/>
-                          </a:rPr>
-                        </m:ctrlPr>
-                      </m:sSubPr>
-                      <m:e>
-                        <m:acc>
-                          <m:accPr>
-                            <m:chr m:val="ˆ"/>
-                            <m:ctrlPr>
-                              <a:rPr lang="en-US" sz="2000" b="1" i="1" baseline="0" dirty="0">
-                                <a:latin typeface="Cambria Math" panose="02040503050406030204" pitchFamily="18" charset="0"/>
-                              </a:rPr>
-                            </m:ctrlPr>
-                          </m:accPr>
-                          <m:e>
-                            <m:r>
-                              <a:rPr lang="en-US" sz="2000" b="1" i="0" baseline="0" dirty="0">
-                                <a:latin typeface="Cambria Math" panose="02040503050406030204" pitchFamily="18" charset="0"/>
-                              </a:rPr>
-                              <m:t>𝐴</m:t>
-                            </m:r>
-                          </m:e>
-                        </m:acc>
-                      </m:e>
-                      <m:sub>
-                        <m:r>
-                          <a:rPr lang="en-US" sz="2000" b="1" i="0" baseline="0" dirty="0">
-                            <a:latin typeface="Cambria Math" panose="02040503050406030204" pitchFamily="18" charset="0"/>
-                          </a:rPr>
-                          <m:t>𝑖</m:t>
-                        </m:r>
-                      </m:sub>
-                    </m:sSub>
-                  </m:oMath>
-                </a14:m>
-                <a:r>
-                  <a:rPr sz="2000" b="1" i="0" baseline="0" dirty="0">
-                    <a:latin typeface="Calibri"/>
-                  </a:rPr>
-                  <a:t> interval overlap (</a:t>
-                </a:r>
-                <a14:m>
-                  <m:oMath xmlns:m="http://schemas.openxmlformats.org/officeDocument/2006/math">
-                    <m:r>
-                      <a:rPr lang="en-US" sz="2000" b="1" i="0" baseline="0" dirty="0" smtClean="0">
-                        <a:latin typeface="Cambria Math" panose="02040503050406030204" pitchFamily="18" charset="0"/>
-                      </a:rPr>
-                      <m:t>𝜌</m:t>
-                    </m:r>
-                  </m:oMath>
-                </a14:m>
-                <a:r>
-                  <a:rPr sz="2000" b="1" i="0" baseline="0" dirty="0">
-                    <a:latin typeface="Calibri"/>
-                  </a:rPr>
-                  <a:t> diagnostic)</a:t>
-                </a:r>
-              </a:p>
-            </p:txBody>
-          </p:sp>
-        </mc:Choice>
-        <mc:Fallback xmlns="">
-          <p:sp>
-            <p:nvSpPr>
-              <p:cNvPr id="2" name="TextBox 1"/>
-              <p:cNvSpPr txBox="1">
-                <a:spLocks noRot="1" noChangeAspect="1" noMove="1" noResize="1" noEditPoints="1" noAdjustHandles="1" noChangeArrowheads="1" noChangeShapeType="1" noTextEdit="1"/>
-              </p:cNvSpPr>
-              <p:nvPr/>
-            </p:nvSpPr>
-            <p:spPr>
-              <a:xfrm>
-                <a:off x="384048" y="219456"/>
-                <a:ext cx="6222473" cy="418191"/>
-              </a:xfrm>
-              <a:prstGeom prst="rect">
-                <a:avLst/>
-              </a:prstGeom>
-              <a:blipFill>
-                <a:blip r:embed="rId3"/>
-                <a:stretch>
-                  <a:fillRect l="-1018" t="-14706" b="-23529"/>
-                </a:stretch>
-              </a:blipFill>
-            </p:spPr>
-            <p:txBody>
-              <a:bodyPr/>
-              <a:lstStyle/>
-              <a:p>
-                <a:r>
-                  <a:rPr lang="en-US">
-                    <a:noFill/>
-                  </a:rPr>
-                  <a:t> </a:t>
-                </a:r>
-              </a:p>
-            </p:txBody>
-          </p:sp>
-        </mc:Fallback>
-      </mc:AlternateContent>
       <p:sp>
         <p:nvSpPr>
-          <p:cNvPr id="3" name="TextBox 2"/>
+          <p:cNvPr id="2" name="TextBox 1"/>
           <p:cNvSpPr txBox="1"/>
           <p:nvPr/>
         </p:nvSpPr>
         <p:spPr>
           <a:xfrm>
-            <a:off x="384048" y="713232"/>
-            <a:ext cx="11423599" cy="246888"/>
+            <a:off x="384048" y="219456"/>
+            <a:ext cx="11423599" cy="418063680000"/>
           </a:xfrm>
           <a:prstGeom prst="rect">
             <a:avLst/>
@@ -7685,465 +7520,264 @@
           <a:lstStyle/>
           <a:p>
             <a:r>
+              <a:rPr sz="2000" b="1" i="0" baseline="0">
+                <a:latin typeface="Calibri"/>
+              </a:rPr>
+              <a:t>PD17 — Empirical team \hat{A}_{i} interval overlap (\rho diagnostic)</a:t>
+            </a:r>
+          </a:p>
+        </p:txBody>
+      </p:sp>
+      <p:sp>
+        <p:nvSpPr>
+          <p:cNvPr id="3" name="TextBox 2"/>
+          <p:cNvSpPr txBox="1"/>
+          <p:nvPr/>
+        </p:nvSpPr>
+        <p:spPr>
+          <a:xfrm>
+            <a:off x="384048" y="713232"/>
+            <a:ext cx="11423599" cy="225754387200"/>
+          </a:xfrm>
+          <a:prstGeom prst="rect">
+            <a:avLst/>
+          </a:prstGeom>
+          <a:noFill/>
+        </p:spPr>
+        <p:txBody>
+          <a:bodyPr wrap="none">
+            <a:spAutoFit/>
+          </a:bodyPr>
+          <a:lstStyle/>
+          <a:p>
+            <a:r>
               <a:rPr sz="1000" b="0" i="0" baseline="0">
                 <a:latin typeface="Calibri"/>
               </a:rPr>
-              <a:t>MBB 2011-2021 · PPM z within season · min 20 min · poolq winsor 0.01–0.99 · 6,492 team-seasons (530 CELL 8 port)</a:t>
+              <a:t>MBB 2011–2021 · PPM z · 6,492 team-seasons · H_{sort}=0.105</a:t>
             </a:r>
           </a:p>
         </p:txBody>
       </p:sp>
-      <mc:AlternateContent xmlns:mc="http://schemas.openxmlformats.org/markup-compatibility/2006" xmlns:a14="http://schemas.microsoft.com/office/drawing/2010/main">
-        <mc:Choice Requires="a14">
-          <p:sp>
-            <p:nvSpPr>
-              <p:cNvPr id="5" name="TextBox 4"/>
-              <p:cNvSpPr txBox="1"/>
-              <p:nvPr/>
-            </p:nvSpPr>
-            <p:spPr>
-              <a:xfrm>
-                <a:off x="185744" y="1280160"/>
-                <a:ext cx="4221664" cy="1697516"/>
-              </a:xfrm>
-              <a:prstGeom prst="rect">
-                <a:avLst/>
-              </a:prstGeom>
-              <a:noFill/>
-            </p:spPr>
-            <p:txBody>
-              <a:bodyPr wrap="square">
-                <a:spAutoFit/>
-              </a:bodyPr>
-              <a:lstStyle/>
-              <a:p>
-                <a:pPr>
-                  <a:lnSpc>
-                    <a:spcPct val="150000"/>
-                  </a:lnSpc>
-                  <a:buChar char="•"/>
-                </a:pPr>
-                <a:r>
-                  <a:rPr sz="1000" b="0" i="0" baseline="0" dirty="0">
-                    <a:latin typeface="Calibri"/>
-                  </a:rPr>
-                  <a:t>  Each team-season: talent window [</a:t>
-                </a:r>
-                <a14:m>
-                  <m:oMath xmlns:m="http://schemas.openxmlformats.org/officeDocument/2006/math">
-                    <m:func>
-                      <m:funcPr>
-                        <m:ctrlPr>
-                          <a:rPr lang="en-US" sz="1000" b="0" i="1" baseline="0" dirty="0" smtClean="0">
-                            <a:latin typeface="Cambria Math" panose="02040503050406030204" pitchFamily="18" charset="0"/>
-                          </a:rPr>
-                        </m:ctrlPr>
-                      </m:funcPr>
-                      <m:fName>
-                        <m:r>
-                          <m:rPr>
-                            <m:sty m:val="p"/>
-                          </m:rPr>
-                          <a:rPr lang="en-US" sz="1000" b="0" i="0" baseline="0" dirty="0">
-                            <a:latin typeface="Cambria Math" panose="02040503050406030204" pitchFamily="18" charset="0"/>
-                          </a:rPr>
-                          <m:t>min</m:t>
-                        </m:r>
-                      </m:fName>
-                      <m:e>
-                        <m:sSub>
-                          <m:sSubPr>
-                            <m:ctrlPr>
-                              <a:rPr lang="en-US" sz="1000" b="0" i="1" baseline="0" dirty="0">
-                                <a:latin typeface="Cambria Math" panose="02040503050406030204" pitchFamily="18" charset="0"/>
-                              </a:rPr>
-                            </m:ctrlPr>
-                          </m:sSubPr>
-                          <m:e>
-                            <m:acc>
-                              <m:accPr>
-                                <m:chr m:val="ˆ"/>
-                                <m:ctrlPr>
-                                  <a:rPr lang="en-US" sz="1000" b="0" i="1" baseline="0" dirty="0">
-                                    <a:latin typeface="Cambria Math" panose="02040503050406030204" pitchFamily="18" charset="0"/>
-                                  </a:rPr>
-                                </m:ctrlPr>
-                              </m:accPr>
-                              <m:e>
-                                <m:r>
-                                  <a:rPr lang="en-US" sz="1000" b="0" i="0" baseline="0" dirty="0">
-                                    <a:latin typeface="Cambria Math" panose="02040503050406030204" pitchFamily="18" charset="0"/>
-                                  </a:rPr>
-                                  <m:t>𝐴</m:t>
-                                </m:r>
-                              </m:e>
-                            </m:acc>
-                          </m:e>
-                          <m:sub>
-                            <m:r>
-                              <a:rPr lang="en-US" sz="1000" b="0" i="0" baseline="0" dirty="0">
-                                <a:latin typeface="Cambria Math" panose="02040503050406030204" pitchFamily="18" charset="0"/>
-                              </a:rPr>
-                              <m:t>𝑖</m:t>
-                            </m:r>
-                          </m:sub>
-                        </m:sSub>
-                      </m:e>
-                    </m:func>
-                    <m:r>
-                      <a:rPr lang="en-US" sz="1000" b="0" i="0" baseline="0" dirty="0">
-                        <a:latin typeface="Cambria Math" panose="02040503050406030204" pitchFamily="18" charset="0"/>
-                      </a:rPr>
-                      <m:t>,</m:t>
-                    </m:r>
-                    <m:func>
-                      <m:funcPr>
-                        <m:ctrlPr>
-                          <a:rPr lang="en-US" sz="1000" b="0" i="1" baseline="0" dirty="0">
-                            <a:latin typeface="Cambria Math" panose="02040503050406030204" pitchFamily="18" charset="0"/>
-                          </a:rPr>
-                        </m:ctrlPr>
-                      </m:funcPr>
-                      <m:fName>
-                        <m:r>
-                          <m:rPr>
-                            <m:sty m:val="p"/>
-                          </m:rPr>
-                          <a:rPr lang="en-US" sz="1000" b="0" i="0" baseline="0" dirty="0">
-                            <a:latin typeface="Cambria Math" panose="02040503050406030204" pitchFamily="18" charset="0"/>
-                          </a:rPr>
-                          <m:t>max</m:t>
-                        </m:r>
-                      </m:fName>
-                      <m:e>
-                        <m:sSub>
-                          <m:sSubPr>
-                            <m:ctrlPr>
-                              <a:rPr lang="en-US" sz="1000" b="0" i="1" baseline="0" dirty="0">
-                                <a:latin typeface="Cambria Math" panose="02040503050406030204" pitchFamily="18" charset="0"/>
-                              </a:rPr>
-                            </m:ctrlPr>
-                          </m:sSubPr>
-                          <m:e>
-                            <m:acc>
-                              <m:accPr>
-                                <m:chr m:val="ˆ"/>
-                                <m:ctrlPr>
-                                  <a:rPr lang="en-US" sz="1000" b="0" i="1" baseline="0" dirty="0">
-                                    <a:latin typeface="Cambria Math" panose="02040503050406030204" pitchFamily="18" charset="0"/>
-                                  </a:rPr>
-                                </m:ctrlPr>
-                              </m:accPr>
-                              <m:e>
-                                <m:r>
-                                  <a:rPr lang="en-US" sz="1000" b="0" i="0" baseline="0" dirty="0">
-                                    <a:latin typeface="Cambria Math" panose="02040503050406030204" pitchFamily="18" charset="0"/>
-                                  </a:rPr>
-                                  <m:t>𝐴</m:t>
-                                </m:r>
-                              </m:e>
-                            </m:acc>
-                          </m:e>
-                          <m:sub>
-                            <m:r>
-                              <a:rPr lang="en-US" sz="1000" b="0" i="0" baseline="0" dirty="0">
-                                <a:latin typeface="Cambria Math" panose="02040503050406030204" pitchFamily="18" charset="0"/>
-                              </a:rPr>
-                              <m:t>𝑖</m:t>
-                            </m:r>
-                          </m:sub>
-                        </m:sSub>
-                      </m:e>
-                    </m:func>
-                  </m:oMath>
-                </a14:m>
-                <a:r>
-                  <a:rPr sz="1000" b="0" i="0" baseline="0" dirty="0">
-                    <a:latin typeface="Calibri"/>
-                  </a:rPr>
-                  <a:t>] on PPM z.</a:t>
-                </a:r>
-              </a:p>
-              <a:p>
-                <a:pPr>
-                  <a:lnSpc>
-                    <a:spcPct val="150000"/>
-                  </a:lnSpc>
-                  <a:buChar char="•"/>
-                </a:pPr>
-                <a:r>
-                  <a:rPr sz="1000" b="0" i="0" baseline="0" dirty="0">
-                    <a:latin typeface="Calibri"/>
-                  </a:rPr>
-                  <a:t>  Coverage = how many windows cover a point on the spectrum (530 CELL 8).</a:t>
-                </a:r>
-              </a:p>
-              <a:p>
-                <a:pPr>
-                  <a:lnSpc>
-                    <a:spcPct val="150000"/>
-                  </a:lnSpc>
-                  <a:buChar char="•"/>
-                </a:pPr>
-                <a:r>
-                  <a:rPr sz="1000" b="0" i="0" baseline="0" dirty="0">
-                    <a:latin typeface="Calibri"/>
-                  </a:rPr>
-                  <a:t>  Red dashed: disjoint sort-and-chop on same player-seasons (537 B analog).</a:t>
-                </a:r>
-              </a:p>
-              <a:p>
-                <a:pPr>
-                  <a:lnSpc>
-                    <a:spcPct val="150000"/>
-                  </a:lnSpc>
-                  <a:buChar char="•"/>
-                </a:pPr>
-                <a:r>
-                  <a:rPr sz="1000" b="0" i="0" baseline="0" dirty="0">
-                    <a:latin typeface="Calibri"/>
-                  </a:rPr>
-                  <a:t>  Actual max coverage=6,305; sort-and-chop max=7.</a:t>
-                </a:r>
-              </a:p>
-              <a:p>
-                <a:pPr>
-                  <a:lnSpc>
-                    <a:spcPct val="150000"/>
-                  </a:lnSpc>
-                  <a:buChar char="•"/>
-                </a:pPr>
-                <a:r>
-                  <a:rPr sz="1000" b="0" i="0" baseline="0" dirty="0">
-                    <a:latin typeface="Calibri"/>
-                  </a:rPr>
-                  <a:t>  </a:t>
-                </a:r>
-                <a14:m>
-                  <m:oMath xmlns:m="http://schemas.openxmlformats.org/officeDocument/2006/math">
-                    <m:r>
-                      <a:rPr lang="en-US" sz="1000" b="0" i="0" baseline="0" dirty="0" smtClean="0">
-                        <a:latin typeface="Cambria Math" panose="02040503050406030204" pitchFamily="18" charset="0"/>
-                      </a:rPr>
-                      <m:t>86%</m:t>
-                    </m:r>
-                  </m:oMath>
-                </a14:m>
-                <a:r>
-                  <a:rPr sz="1000" b="0" i="0" baseline="0" dirty="0">
-                    <a:latin typeface="Calibri"/>
-                  </a:rPr>
-                  <a:t> of grid points have </a:t>
-                </a:r>
-                <a14:m>
-                  <m:oMath xmlns:m="http://schemas.openxmlformats.org/officeDocument/2006/math">
-                    <m:r>
-                      <a:rPr lang="en-US" sz="1000" b="0" i="0" baseline="0" dirty="0" smtClean="0">
-                        <a:latin typeface="Cambria Math" panose="02040503050406030204" pitchFamily="18" charset="0"/>
-                      </a:rPr>
-                      <m:t>&gt;1</m:t>
-                    </m:r>
-                  </m:oMath>
-                </a14:m>
-                <a:r>
-                  <a:rPr sz="1000" b="0" i="0" baseline="0" dirty="0">
-                    <a:latin typeface="Calibri"/>
-                  </a:rPr>
-                  <a:t> team covering.</a:t>
-                </a:r>
-              </a:p>
-              <a:p>
-                <a:pPr>
-                  <a:lnSpc>
-                    <a:spcPct val="150000"/>
-                  </a:lnSpc>
-                  <a:buChar char="•"/>
-                </a:pPr>
-                <a:r>
-                  <a:rPr sz="1000" b="0" i="0" baseline="0" dirty="0">
-                    <a:latin typeface="Calibri"/>
-                  </a:rPr>
-                  <a:t>  Roster span: mean=2.98 z, median=2.87 z (6,492 team-seasons).</a:t>
-                </a:r>
-              </a:p>
-              <a:p>
-                <a:pPr>
-                  <a:lnSpc>
-                    <a:spcPct val="150000"/>
-                  </a:lnSpc>
-                  <a:buChar char="•"/>
-                </a:pPr>
-                <a:r>
-                  <a:rPr sz="1000" b="0" i="0" baseline="0" dirty="0">
-                    <a:latin typeface="Calibri"/>
-                  </a:rPr>
-                  <a:t>  Pairs with Phase B </a:t>
-                </a:r>
-                <a14:m>
-                  <m:oMath xmlns:m="http://schemas.openxmlformats.org/officeDocument/2006/math">
-                    <m:r>
-                      <a:rPr lang="en-US" sz="1000" b="0" i="0" baseline="0" dirty="0" smtClean="0">
-                        <a:latin typeface="Cambria Math" panose="02040503050406030204" pitchFamily="18" charset="0"/>
-                      </a:rPr>
-                      <m:t>𝜌</m:t>
-                    </m:r>
-                  </m:oMath>
-                </a14:m>
-                <a:r>
-                  <a:rPr sz="1000" b="0" i="0" baseline="0" dirty="0">
-                    <a:latin typeface="Calibri"/>
-                  </a:rPr>
-                  <a:t> slide — sim </a:t>
-                </a:r>
-                <a14:m>
-                  <m:oMath xmlns:m="http://schemas.openxmlformats.org/officeDocument/2006/math">
-                    <m:r>
-                      <a:rPr lang="en-US" sz="1000" b="0" i="0" baseline="0" dirty="0" smtClean="0">
-                        <a:latin typeface="Cambria Math" panose="02040503050406030204" pitchFamily="18" charset="0"/>
-                      </a:rPr>
-                      <m:t>𝜌</m:t>
-                    </m:r>
-                  </m:oMath>
-                </a14:m>
-                <a:r>
-                  <a:rPr sz="1000" b="0" i="0" baseline="0" dirty="0">
-                    <a:latin typeface="Calibri"/>
-                  </a:rPr>
-                  <a:t> dials overlap between these curves.</a:t>
-                </a:r>
-              </a:p>
-            </p:txBody>
-          </p:sp>
-        </mc:Choice>
-        <mc:Fallback xmlns="">
-          <p:sp>
-            <p:nvSpPr>
-              <p:cNvPr id="5" name="TextBox 4"/>
-              <p:cNvSpPr txBox="1">
-                <a:spLocks noRot="1" noChangeAspect="1" noMove="1" noResize="1" noEditPoints="1" noAdjustHandles="1" noChangeArrowheads="1" noChangeShapeType="1" noTextEdit="1"/>
-              </p:cNvSpPr>
-              <p:nvPr/>
-            </p:nvSpPr>
-            <p:spPr>
-              <a:xfrm>
-                <a:off x="185744" y="1280160"/>
-                <a:ext cx="4221664" cy="1697516"/>
-              </a:xfrm>
-              <a:prstGeom prst="rect">
-                <a:avLst/>
-              </a:prstGeom>
-              <a:blipFill>
-                <a:blip r:embed="rId4"/>
-                <a:stretch>
-                  <a:fillRect b="-1481"/>
-                </a:stretch>
-              </a:blipFill>
-            </p:spPr>
-            <p:txBody>
-              <a:bodyPr/>
-              <a:lstStyle/>
-              <a:p>
-                <a:r>
-                  <a:rPr lang="en-US">
-                    <a:noFill/>
-                  </a:rPr>
-                  <a:t> </a:t>
-                </a:r>
-              </a:p>
-            </p:txBody>
-          </p:sp>
-        </mc:Fallback>
-      </mc:AlternateContent>
-      <mc:AlternateContent xmlns:mc="http://schemas.openxmlformats.org/markup-compatibility/2006" xmlns:a14="http://schemas.microsoft.com/office/drawing/2010/main">
-        <mc:Choice Requires="a14">
-          <p:sp>
-            <p:nvSpPr>
-              <p:cNvPr id="6" name="TextBox 5"/>
-              <p:cNvSpPr txBox="1"/>
-              <p:nvPr/>
-            </p:nvSpPr>
-            <p:spPr>
-              <a:xfrm>
-                <a:off x="384048" y="6494005"/>
-                <a:ext cx="11423599" cy="261610"/>
-              </a:xfrm>
-              <a:prstGeom prst="rect">
-                <a:avLst/>
-              </a:prstGeom>
-              <a:noFill/>
-            </p:spPr>
-            <p:txBody>
-              <a:bodyPr wrap="square">
-                <a:spAutoFit/>
-              </a:bodyPr>
-              <a:lstStyle/>
-              <a:p>
-                <a:pPr algn="l"/>
-                <a:r>
-                  <a:rPr sz="1100" b="1" i="0" baseline="0" dirty="0">
-                    <a:latin typeface="Calibri"/>
-                  </a:rPr>
-                  <a:t>Claim (PD17): Real NCAA rosters leave massively overlapping team talent windows — the empirical target </a:t>
-                </a:r>
-                <a14:m>
-                  <m:oMath xmlns:m="http://schemas.openxmlformats.org/officeDocument/2006/math">
-                    <m:r>
-                      <a:rPr lang="en-US" sz="1100" b="1" i="0" baseline="0" dirty="0" smtClean="0">
-                        <a:latin typeface="Cambria Math" panose="02040503050406030204" pitchFamily="18" charset="0"/>
-                      </a:rPr>
-                      <m:t>𝜌</m:t>
-                    </m:r>
-                  </m:oMath>
-                </a14:m>
-                <a:r>
-                  <a:rPr sz="1100" b="1" i="0" baseline="0" dirty="0">
-                    <a:latin typeface="Calibri"/>
-                  </a:rPr>
-                  <a:t> was meant to match in sim (530 CELL 8 / 538 Plot A).</a:t>
-                </a:r>
-              </a:p>
-            </p:txBody>
-          </p:sp>
-        </mc:Choice>
-        <mc:Fallback xmlns="">
-          <p:sp>
-            <p:nvSpPr>
-              <p:cNvPr id="6" name="TextBox 5"/>
-              <p:cNvSpPr txBox="1">
-                <a:spLocks noRot="1" noChangeAspect="1" noMove="1" noResize="1" noEditPoints="1" noAdjustHandles="1" noChangeArrowheads="1" noChangeShapeType="1" noTextEdit="1"/>
-              </p:cNvSpPr>
-              <p:nvPr/>
-            </p:nvSpPr>
-            <p:spPr>
-              <a:xfrm>
-                <a:off x="384048" y="6494005"/>
-                <a:ext cx="11423599" cy="261610"/>
-              </a:xfrm>
-              <a:prstGeom prst="rect">
-                <a:avLst/>
-              </a:prstGeom>
-              <a:blipFill>
-                <a:blip r:embed="rId5"/>
-                <a:stretch>
-                  <a:fillRect b="-14286"/>
-                </a:stretch>
-              </a:blipFill>
-            </p:spPr>
-            <p:txBody>
-              <a:bodyPr/>
-              <a:lstStyle/>
-              <a:p>
-                <a:r>
-                  <a:rPr lang="en-US">
-                    <a:noFill/>
-                  </a:rPr>
-                  <a:t> </a:t>
-                </a:r>
-              </a:p>
-            </p:txBody>
-          </p:sp>
-        </mc:Fallback>
-      </mc:AlternateContent>
+      <p:pic>
+        <p:nvPicPr>
+          <p:cNvPr id="4" name="Picture 3" descr="image.png"/>
+          <p:cNvPicPr>
+            <a:picLocks noChangeAspect="1"/>
+          </p:cNvPicPr>
+          <p:nvPr/>
+        </p:nvPicPr>
+        <p:blipFill>
+          <a:blip r:embed="rId6"/>
+          <a:stretch>
+            <a:fillRect/>
+          </a:stretch>
+        </p:blipFill>
+        <p:spPr>
+          <a:xfrm>
+            <a:off x="4834069" y="1033272"/>
+            <a:ext cx="6519484" cy="4983480"/>
+          </a:xfrm>
+          <a:prstGeom prst="rect">
+            <a:avLst/>
+          </a:prstGeom>
+        </p:spPr>
+      </p:pic>
+      <p:sp>
+        <p:nvSpPr>
+          <p:cNvPr id="5" name="TextBox 4"/>
+          <p:cNvSpPr txBox="1"/>
+          <p:nvPr/>
+        </p:nvSpPr>
+        <p:spPr>
+          <a:xfrm>
+            <a:off x="384048" y="3849624"/>
+            <a:ext cx="3794760" cy="2148840"/>
+          </a:xfrm>
+          <a:prstGeom prst="rect">
+            <a:avLst/>
+          </a:prstGeom>
+          <a:noFill/>
+        </p:spPr>
+        <p:txBody>
+          <a:bodyPr wrap="square">
+            <a:spAutoFit/>
+          </a:bodyPr>
+          <a:lstStyle/>
+          <a:p>
+            <a:pPr>
+              <a:buChar char="•"/>
+              <a:lnSpc>
+                <a:spcPct val="150000"/>
+              </a:lnSpc>
+              <a:spcBef>
+                <a:spcPts val="0"/>
+              </a:spcBef>
+              <a:spcAft>
+                <a:spcPts val="0"/>
+              </a:spcAft>
+            </a:pPr>
+            <a:r>
+              <a:rPr sz="1000" b="0" i="0" baseline="0">
+                <a:latin typeface="Calibri"/>
+              </a:rPr>
+              <a:t>  Each team-season: talent window [\min \hat{A}_{i}, \max \hat{A}_{i}] on PPM z.</a:t>
+            </a:r>
+          </a:p>
+          <a:p>
+            <a:pPr>
+              <a:buChar char="•"/>
+              <a:lnSpc>
+                <a:spcPct val="150000"/>
+              </a:lnSpc>
+              <a:spcBef>
+                <a:spcPts val="0"/>
+              </a:spcBef>
+              <a:spcAft>
+                <a:spcPts val="0"/>
+              </a:spcAft>
+            </a:pPr>
+            <a:r>
+              <a:rPr sz="1000" b="0" i="0" baseline="0">
+                <a:latin typeface="Calibri"/>
+              </a:rPr>
+              <a:t>  Coverage = how many windows cover a point on the spectrum (530 CELL 8).</a:t>
+            </a:r>
+          </a:p>
+          <a:p>
+            <a:pPr>
+              <a:buChar char="•"/>
+              <a:lnSpc>
+                <a:spcPct val="150000"/>
+              </a:lnSpc>
+              <a:spcBef>
+                <a:spcPts val="0"/>
+              </a:spcBef>
+              <a:spcAft>
+                <a:spcPts val="0"/>
+              </a:spcAft>
+            </a:pPr>
+            <a:r>
+              <a:rPr sz="1000" b="0" i="0" baseline="0">
+                <a:latin typeface="Calibri"/>
+              </a:rPr>
+              <a:t>  H_{sort} = 1 - \sum_i(\hat{A}_i - \hat{\mu}_{g(i)})^2 / \sum_i(\hat{A}_i - \bar{A})^2 — realized sorting on a fixed partition.</a:t>
+            </a:r>
+          </a:p>
+          <a:p>
+            <a:pPr>
+              <a:buChar char="•"/>
+              <a:lnSpc>
+                <a:spcPct val="150000"/>
+              </a:lnSpc>
+              <a:spcBef>
+                <a:spcPts val="0"/>
+              </a:spcBef>
+              <a:spcAft>
+                <a:spcPts val="0"/>
+              </a:spcAft>
+            </a:pPr>
+            <a:r>
+              <a:rPr sz="1000" b="0" i="0" baseline="0">
+                <a:latin typeface="Calibri"/>
+              </a:rPr>
+              <a:t>  Empirical partition: H_{sort} = 0.105 (0 = none, 1 = full team sorting).</a:t>
+            </a:r>
+          </a:p>
+          <a:p>
+            <a:pPr>
+              <a:buChar char="•"/>
+              <a:lnSpc>
+                <a:spcPct val="150000"/>
+              </a:lnSpc>
+              <a:spcBef>
+                <a:spcPts val="0"/>
+              </a:spcBef>
+              <a:spcAft>
+                <a:spcPts val="0"/>
+              </a:spcAft>
+            </a:pPr>
+            <a:r>
+              <a:rPr sz="1000" b="0" i="0" baseline="0">
+                <a:latin typeface="Calibri"/>
+              </a:rPr>
+              <a:t>  Max coverage=6,305; sort-and-chop max=7.</a:t>
+            </a:r>
+          </a:p>
+          <a:p>
+            <a:pPr>
+              <a:buChar char="•"/>
+              <a:lnSpc>
+                <a:spcPct val="150000"/>
+              </a:lnSpc>
+              <a:spcBef>
+                <a:spcPts val="0"/>
+              </a:spcBef>
+              <a:spcAft>
+                <a:spcPts val="0"/>
+              </a:spcAft>
+            </a:pPr>
+            <a:r>
+              <a:rPr sz="1000" b="0" i="0" baseline="0">
+                <a:latin typeface="Calibri"/>
+              </a:rPr>
+              <a:t>  Roster span: mean=2.98 z (6,492 team-seasons).</a:t>
+            </a:r>
+          </a:p>
+          <a:p>
+            <a:pPr>
+              <a:buChar char="•"/>
+              <a:lnSpc>
+                <a:spcPct val="150000"/>
+              </a:lnSpc>
+              <a:spcBef>
+                <a:spcPts val="0"/>
+              </a:spcBef>
+              <a:spcAft>
+                <a:spcPts val="0"/>
+              </a:spcAft>
+            </a:pPr>
+            <a:r>
+              <a:rPr sz="1000" b="0" i="0" baseline="0">
+                <a:latin typeface="Calibri"/>
+              </a:rPr>
+              <a:t>  VECTOR lock: H_{sort} is realized sorting — not the generative homophily knob \rho.</a:t>
+            </a:r>
+          </a:p>
+        </p:txBody>
+      </p:sp>
+      <p:sp>
+        <p:nvSpPr>
+          <p:cNvPr id="6" name="TextBox 5"/>
+          <p:cNvSpPr txBox="1"/>
+          <p:nvPr/>
+        </p:nvSpPr>
+        <p:spPr>
+          <a:xfrm>
+            <a:off x="384048" y="6053328"/>
+            <a:ext cx="11423599" cy="420624"/>
+          </a:xfrm>
+          <a:prstGeom prst="rect">
+            <a:avLst/>
+          </a:prstGeom>
+          <a:noFill/>
+        </p:spPr>
+        <p:txBody>
+          <a:bodyPr wrap="square">
+            <a:spAutoFit/>
+          </a:bodyPr>
+          <a:lstStyle/>
+          <a:p>
+            <a:pPr algn="l"/>
+            <a:r>
+              <a:rPr sz="1100" b="1" i="0" baseline="0">
+                <a:latin typeface="Calibri"/>
+              </a:rPr>
+              <a:t>Claim (PD17): Real NCAA rosters leave massively overlapping team talent windows — compare H_{sort} on this partition to Grandchild sim (slide 4).</a:t>
+            </a:r>
+          </a:p>
+        </p:txBody>
+      </p:sp>
     </p:spTree>
   </p:cSld>
   <p:clrMapOvr>
@@ -8169,1170 +7803,287 @@
           <a:chExt cx="0" cy="0"/>
         </a:xfrm>
       </p:grpSpPr>
-      <mc:AlternateContent xmlns:mc="http://schemas.openxmlformats.org/markup-compatibility/2006" xmlns:a14="http://schemas.microsoft.com/office/drawing/2010/main">
-        <mc:Choice Requires="a14">
-          <p:sp>
-            <p:nvSpPr>
-              <p:cNvPr id="2" name="TextBox 1"/>
-              <p:cNvSpPr txBox="1"/>
-              <p:nvPr/>
-            </p:nvSpPr>
-            <p:spPr>
-              <a:xfrm>
-                <a:off x="384048" y="219456"/>
-                <a:ext cx="10208757" cy="677108"/>
-              </a:xfrm>
-              <a:prstGeom prst="rect">
-                <a:avLst/>
-              </a:prstGeom>
-              <a:noFill/>
-            </p:spPr>
-            <p:txBody>
-              <a:bodyPr wrap="none">
-                <a:spAutoFit/>
-              </a:bodyPr>
-              <a:lstStyle/>
-              <a:p>
-                <a:r>
-                  <a:rPr sz="2000" b="1" i="0" baseline="0" dirty="0">
-                    <a:latin typeface="Calibri"/>
-                  </a:rPr>
-                  <a:t>PD17 — Empirical team </a:t>
-                </a:r>
-                <a14:m>
-                  <m:oMath xmlns:m="http://schemas.openxmlformats.org/officeDocument/2006/math">
-                    <m:sSub>
-                      <m:sSubPr>
-                        <m:ctrlPr>
-                          <a:rPr lang="en-US" sz="2000" b="1" i="1" baseline="0" dirty="0" smtClean="0">
-                            <a:latin typeface="Cambria Math" panose="02040503050406030204" pitchFamily="18" charset="0"/>
-                          </a:rPr>
-                        </m:ctrlPr>
-                      </m:sSubPr>
-                      <m:e>
-                        <m:r>
-                          <a:rPr lang="en-US" sz="2000" b="1" i="0" baseline="0" dirty="0">
-                            <a:latin typeface="Cambria Math" panose="02040503050406030204" pitchFamily="18" charset="0"/>
-                          </a:rPr>
-                          <m:t>𝐿</m:t>
-                        </m:r>
-                      </m:e>
-                      <m:sub>
-                        <m:r>
-                          <a:rPr lang="en-US" sz="2000" b="1" i="0" baseline="0" dirty="0">
-                            <a:latin typeface="Cambria Math" panose="02040503050406030204" pitchFamily="18" charset="0"/>
-                          </a:rPr>
-                          <m:t>𝐶</m:t>
-                        </m:r>
-                      </m:sub>
-                    </m:sSub>
-                  </m:oMath>
-                </a14:m>
-                <a:r>
-                  <a:rPr sz="2000" b="1" i="0" baseline="0" dirty="0">
-                    <a:latin typeface="Calibri"/>
-                  </a:rPr>
-                  <a:t> distribution</a:t>
-                </a:r>
-                <a:endParaRPr lang="en-US" sz="2000" b="1" i="0" baseline="0" dirty="0">
-                  <a:latin typeface="Calibri"/>
-                </a:endParaRPr>
-              </a:p>
-              <a:p>
-                <a:r>
-                  <a:rPr lang="en-US" i="1" dirty="0">
-                    <a:latin typeface="Avenir Next Medium" panose="020B0503020202020204" pitchFamily="34" charset="0"/>
-                  </a:rPr>
-                  <a:t>Given overlapping talent windows (prior slide), team </a:t>
-                </a:r>
-                <a14:m>
-                  <m:oMath xmlns:m="http://schemas.openxmlformats.org/officeDocument/2006/math">
-                    <m:sSub>
-                      <m:sSubPr>
-                        <m:ctrlPr>
-                          <a:rPr lang="en-US" i="1" dirty="0" smtClean="0">
-                            <a:latin typeface="Cambria Math" panose="02040503050406030204" pitchFamily="18" charset="0"/>
-                          </a:rPr>
-                        </m:ctrlPr>
-                      </m:sSubPr>
-                      <m:e>
-                        <m:r>
-                          <a:rPr lang="en-US" b="0" i="1" dirty="0">
-                            <a:latin typeface="Cambria Math" panose="02040503050406030204" pitchFamily="18" charset="0"/>
-                          </a:rPr>
-                          <m:t>𝐿</m:t>
-                        </m:r>
-                      </m:e>
-                      <m:sub>
-                        <m:r>
-                          <a:rPr lang="en-US" b="0" i="1" dirty="0">
-                            <a:latin typeface="Cambria Math" panose="02040503050406030204" pitchFamily="18" charset="0"/>
-                          </a:rPr>
-                          <m:t>𝐶</m:t>
-                        </m:r>
-                      </m:sub>
-                    </m:sSub>
-                  </m:oMath>
-                </a14:m>
-                <a:r>
-                  <a:rPr lang="en-US" i="1" dirty="0">
-                    <a:latin typeface="Avenir Next Medium" panose="020B0503020202020204" pitchFamily="34" charset="0"/>
-                  </a:rPr>
-                  <a:t> summarizes peer viability on each roster.</a:t>
-                </a:r>
-                <a:endParaRPr sz="2000" i="1" baseline="0" dirty="0">
-                  <a:latin typeface="Avenir Next Medium" panose="020B0503020202020204" pitchFamily="34" charset="0"/>
-                </a:endParaRPr>
-              </a:p>
-            </p:txBody>
-          </p:sp>
-        </mc:Choice>
-        <mc:Fallback xmlns="">
-          <p:sp>
-            <p:nvSpPr>
-              <p:cNvPr id="2" name="TextBox 1"/>
-              <p:cNvSpPr txBox="1">
-                <a:spLocks noRot="1" noChangeAspect="1" noMove="1" noResize="1" noEditPoints="1" noAdjustHandles="1" noChangeArrowheads="1" noChangeShapeType="1" noTextEdit="1"/>
-              </p:cNvSpPr>
-              <p:nvPr/>
-            </p:nvSpPr>
-            <p:spPr>
-              <a:xfrm>
-                <a:off x="384048" y="219456"/>
-                <a:ext cx="10208757" cy="677108"/>
-              </a:xfrm>
-              <a:prstGeom prst="rect">
-                <a:avLst/>
-              </a:prstGeom>
-              <a:blipFill>
-                <a:blip r:embed="rId2"/>
-                <a:stretch>
-                  <a:fillRect l="-621" t="-5556" r="-124" b="-14815"/>
-                </a:stretch>
-              </a:blipFill>
-            </p:spPr>
-            <p:txBody>
-              <a:bodyPr/>
-              <a:lstStyle/>
-              <a:p>
-                <a:r>
-                  <a:rPr lang="en-US">
-                    <a:noFill/>
-                  </a:rPr>
-                  <a:t> </a:t>
-                </a:r>
-              </a:p>
-            </p:txBody>
-          </p:sp>
-        </mc:Fallback>
-      </mc:AlternateContent>
-      <mc:AlternateContent xmlns:mc="http://schemas.openxmlformats.org/markup-compatibility/2006" xmlns:a14="http://schemas.microsoft.com/office/drawing/2010/main">
-        <mc:Choice Requires="a14">
-          <p:sp>
-            <p:nvSpPr>
-              <p:cNvPr id="3" name="TextBox 2"/>
-              <p:cNvSpPr txBox="1"/>
-              <p:nvPr/>
-            </p:nvSpPr>
-            <p:spPr>
-              <a:xfrm>
-                <a:off x="384048" y="1158719"/>
-                <a:ext cx="7688708" cy="270139"/>
-              </a:xfrm>
-              <a:prstGeom prst="rect">
-                <a:avLst/>
-              </a:prstGeom>
-              <a:noFill/>
-            </p:spPr>
-            <p:txBody>
-              <a:bodyPr wrap="none">
-                <a:spAutoFit/>
-              </a:bodyPr>
-              <a:lstStyle/>
-              <a:p>
-                <a:r>
-                  <a:rPr sz="1000" b="0" i="0" baseline="0" dirty="0">
-                    <a:latin typeface="Calibri"/>
-                  </a:rPr>
-                  <a:t>MBB 2011-2021 · team smooth </a:t>
-                </a:r>
-                <a14:m>
-                  <m:oMath xmlns:m="http://schemas.openxmlformats.org/officeDocument/2006/math">
-                    <m:sSub>
-                      <m:sSubPr>
-                        <m:ctrlPr>
-                          <a:rPr lang="en-US" sz="1000" b="0" i="1" baseline="0" dirty="0" smtClean="0">
-                            <a:latin typeface="Cambria Math" panose="02040503050406030204" pitchFamily="18" charset="0"/>
-                          </a:rPr>
-                        </m:ctrlPr>
-                      </m:sSubPr>
-                      <m:e>
-                        <m:r>
-                          <a:rPr lang="en-US" sz="1000" b="0" i="0" baseline="0" dirty="0">
-                            <a:latin typeface="Cambria Math" panose="02040503050406030204" pitchFamily="18" charset="0"/>
-                          </a:rPr>
-                          <m:t>𝐿</m:t>
-                        </m:r>
-                      </m:e>
-                      <m:sub>
-                        <m:r>
-                          <a:rPr lang="en-US" sz="1000" b="0" i="0" baseline="0" dirty="0">
-                            <a:latin typeface="Cambria Math" panose="02040503050406030204" pitchFamily="18" charset="0"/>
-                          </a:rPr>
-                          <m:t>𝐶</m:t>
-                        </m:r>
-                      </m:sub>
-                    </m:sSub>
-                  </m:oMath>
-                </a14:m>
-                <a:r>
-                  <a:rPr sz="1000" b="0" i="0" baseline="0" dirty="0">
-                    <a:latin typeface="Calibri"/>
-                  </a:rPr>
-                  <a:t> · PPM z within season · min 20 min · </a:t>
-                </a:r>
-                <a14:m>
-                  <m:oMath xmlns:m="http://schemas.openxmlformats.org/officeDocument/2006/math">
-                    <m:r>
-                      <a:rPr lang="en-US" sz="1000" b="0" i="0" baseline="0" dirty="0" smtClean="0">
-                        <a:latin typeface="Cambria Math" panose="02040503050406030204" pitchFamily="18" charset="0"/>
-                      </a:rPr>
-                      <m:t>𝜃</m:t>
-                    </m:r>
-                    <m:r>
-                      <a:rPr lang="en-US" sz="1000" b="0" i="0" baseline="0" dirty="0" smtClean="0">
-                        <a:latin typeface="Cambria Math" panose="02040503050406030204" pitchFamily="18" charset="0"/>
-                      </a:rPr>
-                      <m:t>=</m:t>
-                    </m:r>
-                    <m:sSubSup>
-                      <m:sSubSupPr>
-                        <m:ctrlPr>
-                          <a:rPr lang="en-US" sz="1000" b="0" i="1" baseline="0" dirty="0">
-                            <a:latin typeface="Cambria Math" panose="02040503050406030204" pitchFamily="18" charset="0"/>
-                          </a:rPr>
-                        </m:ctrlPr>
-                      </m:sSubSupPr>
-                      <m:e>
-                        <m:r>
-                          <a:rPr lang="en-US" sz="1000" b="0" i="0" baseline="0" dirty="0">
-                            <a:latin typeface="Cambria Math" panose="02040503050406030204" pitchFamily="18" charset="0"/>
-                          </a:rPr>
-                          <m:t>𝐹</m:t>
-                        </m:r>
-                      </m:e>
-                      <m:sub>
-                        <m:acc>
-                          <m:accPr>
-                            <m:chr m:val="ˆ"/>
-                            <m:ctrlPr>
-                              <a:rPr lang="en-US" sz="1000" b="0" i="1" baseline="0" dirty="0">
-                                <a:latin typeface="Cambria Math" panose="02040503050406030204" pitchFamily="18" charset="0"/>
-                              </a:rPr>
-                            </m:ctrlPr>
-                          </m:accPr>
-                          <m:e>
-                            <m:r>
-                              <a:rPr lang="en-US" sz="1000" b="0" i="0" baseline="0" dirty="0">
-                                <a:latin typeface="Cambria Math" panose="02040503050406030204" pitchFamily="18" charset="0"/>
-                              </a:rPr>
-                              <m:t>𝐴</m:t>
-                            </m:r>
-                          </m:e>
-                        </m:acc>
-                      </m:sub>
-                      <m:sup>
-                        <m:r>
-                          <a:rPr lang="en-US" sz="1000" b="0" i="0" baseline="0" dirty="0">
-                            <a:latin typeface="Cambria Math" panose="02040503050406030204" pitchFamily="18" charset="0"/>
-                          </a:rPr>
-                          <m:t>−1</m:t>
-                        </m:r>
-                      </m:sup>
-                    </m:sSubSup>
-                    <m:d>
-                      <m:dPr>
-                        <m:ctrlPr>
-                          <a:rPr lang="en-US" sz="1000" b="0" i="1" baseline="0" dirty="0">
-                            <a:latin typeface="Cambria Math" panose="02040503050406030204" pitchFamily="18" charset="0"/>
-                          </a:rPr>
-                        </m:ctrlPr>
-                      </m:dPr>
-                      <m:e>
-                        <m:r>
-                          <a:rPr lang="en-US" sz="1000" b="0" i="0" baseline="0" dirty="0">
-                            <a:latin typeface="Cambria Math" panose="02040503050406030204" pitchFamily="18" charset="0"/>
-                          </a:rPr>
-                          <m:t>1−</m:t>
-                        </m:r>
-                        <m:r>
-                          <a:rPr lang="en-US" sz="1000" b="0" i="0" baseline="0" dirty="0">
-                            <a:latin typeface="Cambria Math" panose="02040503050406030204" pitchFamily="18" charset="0"/>
-                          </a:rPr>
-                          <m:t>𝐾</m:t>
-                        </m:r>
-                        <m:r>
-                          <a:rPr lang="en-US" sz="1000" b="0" i="0" baseline="0" dirty="0">
-                            <a:latin typeface="Cambria Math" panose="02040503050406030204" pitchFamily="18" charset="0"/>
-                          </a:rPr>
-                          <m:t>/</m:t>
-                        </m:r>
-                        <m:r>
-                          <a:rPr lang="en-US" sz="1000" b="0" i="0" baseline="0" dirty="0">
-                            <a:latin typeface="Cambria Math" panose="02040503050406030204" pitchFamily="18" charset="0"/>
-                          </a:rPr>
-                          <m:t>𝑁</m:t>
-                        </m:r>
-                      </m:e>
-                    </m:d>
-                    <m:r>
-                      <a:rPr lang="en-US" sz="1000" b="0" i="0" baseline="0" dirty="0">
-                        <a:latin typeface="Cambria Math" panose="02040503050406030204" pitchFamily="18" charset="0"/>
-                      </a:rPr>
-                      <m:t>=2.295</m:t>
-                    </m:r>
-                    <m:r>
-                      <a:rPr lang="en-US" sz="1000" b="0" i="0" baseline="0" dirty="0" smtClean="0">
-                        <a:latin typeface="Cambria Math" panose="02040503050406030204" pitchFamily="18" charset="0"/>
-                      </a:rPr>
-                      <m:t> </m:t>
-                    </m:r>
-                    <m:d>
-                      <m:dPr>
-                        <m:ctrlPr>
-                          <a:rPr lang="en-US" sz="1000" b="0" i="1" baseline="0" dirty="0">
-                            <a:latin typeface="Cambria Math" panose="02040503050406030204" pitchFamily="18" charset="0"/>
-                          </a:rPr>
-                        </m:ctrlPr>
-                      </m:dPr>
-                      <m:e>
-                        <m:r>
-                          <a:rPr lang="en-US" sz="1000" b="0" i="0" baseline="0" dirty="0">
-                            <a:latin typeface="Cambria Math" panose="02040503050406030204" pitchFamily="18" charset="0"/>
-                          </a:rPr>
-                          <m:t>𝐾</m:t>
-                        </m:r>
-                        <m:r>
-                          <a:rPr lang="en-US" sz="1000" b="0" i="0" baseline="0" dirty="0">
-                            <a:latin typeface="Cambria Math" panose="02040503050406030204" pitchFamily="18" charset="0"/>
-                          </a:rPr>
-                          <m:t>/</m:t>
-                        </m:r>
-                        <m:r>
-                          <a:rPr lang="en-US" sz="1000" b="0" i="0" baseline="0" dirty="0">
-                            <a:latin typeface="Cambria Math" panose="02040503050406030204" pitchFamily="18" charset="0"/>
-                          </a:rPr>
-                          <m:t>𝑁</m:t>
-                        </m:r>
-                        <m:r>
-                          <a:rPr lang="en-US" sz="1000" b="0" i="0" baseline="0" dirty="0">
-                            <a:latin typeface="Cambria Math" panose="02040503050406030204" pitchFamily="18" charset="0"/>
-                          </a:rPr>
-                          <m:t>=0.0182</m:t>
-                        </m:r>
-                      </m:e>
-                    </m:d>
-                  </m:oMath>
-                </a14:m>
-                <a:r>
-                  <a:rPr sz="1000" b="0" i="0" baseline="0" dirty="0">
-                    <a:latin typeface="Calibri"/>
-                  </a:rPr>
-                  <a:t>· </a:t>
-                </a:r>
-                <a14:m>
-                  <m:oMath xmlns:m="http://schemas.openxmlformats.org/officeDocument/2006/math">
-                    <m:r>
-                      <a:rPr lang="en-US" sz="1000" b="0" i="0" baseline="0" dirty="0" smtClean="0">
-                        <a:latin typeface="Cambria Math" panose="02040503050406030204" pitchFamily="18" charset="0"/>
-                      </a:rPr>
-                      <m:t>𝛾</m:t>
-                    </m:r>
-                    <m:r>
-                      <a:rPr lang="en-US" sz="1000" b="0" i="0" baseline="0" dirty="0" smtClean="0">
-                        <a:latin typeface="Cambria Math" panose="02040503050406030204" pitchFamily="18" charset="0"/>
-                      </a:rPr>
-                      <m:t>=0.5</m:t>
-                    </m:r>
-                  </m:oMath>
-                </a14:m>
-                <a:r>
-                  <a:rPr sz="1000" b="0" i="0" baseline="0" dirty="0">
-                    <a:latin typeface="Calibri"/>
-                  </a:rPr>
-                  <a:t> placeholder</a:t>
-                </a:r>
-              </a:p>
-            </p:txBody>
-          </p:sp>
-        </mc:Choice>
-        <mc:Fallback xmlns="">
-          <p:sp>
-            <p:nvSpPr>
-              <p:cNvPr id="3" name="TextBox 2"/>
-              <p:cNvSpPr txBox="1">
-                <a:spLocks noRot="1" noChangeAspect="1" noMove="1" noResize="1" noEditPoints="1" noAdjustHandles="1" noChangeArrowheads="1" noChangeShapeType="1" noTextEdit="1"/>
-              </p:cNvSpPr>
-              <p:nvPr/>
-            </p:nvSpPr>
-            <p:spPr>
-              <a:xfrm>
-                <a:off x="384048" y="1158719"/>
-                <a:ext cx="7688708" cy="270139"/>
-              </a:xfrm>
-              <a:prstGeom prst="rect">
-                <a:avLst/>
-              </a:prstGeom>
-              <a:blipFill>
-                <a:blip r:embed="rId3"/>
-                <a:stretch>
-                  <a:fillRect b="-9091"/>
-                </a:stretch>
-              </a:blipFill>
-            </p:spPr>
-            <p:txBody>
-              <a:bodyPr/>
-              <a:lstStyle/>
-              <a:p>
-                <a:r>
-                  <a:rPr lang="en-US">
-                    <a:noFill/>
-                  </a:rPr>
-                  <a:t> </a:t>
-                </a:r>
-              </a:p>
-            </p:txBody>
-          </p:sp>
-        </mc:Fallback>
-      </mc:AlternateContent>
-      <mc:AlternateContent xmlns:mc="http://schemas.openxmlformats.org/markup-compatibility/2006">
-        <mc:Choice xmlns:a14="http://schemas.microsoft.com/office/drawing/2010/main" Requires="a14">
-          <p:sp>
-            <p:nvSpPr>
-              <p:cNvPr id="4" name="TextBox 3"/>
-              <p:cNvSpPr txBox="1"/>
-              <p:nvPr/>
-            </p:nvSpPr>
-            <p:spPr>
-              <a:xfrm>
-                <a:off x="278989" y="1851773"/>
-                <a:ext cx="3949413" cy="1577227"/>
-              </a:xfrm>
-              <a:prstGeom prst="rect">
-                <a:avLst/>
-              </a:prstGeom>
-              <a:noFill/>
-            </p:spPr>
-            <p:txBody>
-              <a:bodyPr wrap="square">
-                <a:spAutoFit/>
-              </a:bodyPr>
-              <a:lstStyle/>
-              <a:p>
-                <a:pPr>
-                  <a:lnSpc>
-                    <a:spcPct val="150000"/>
-                  </a:lnSpc>
-                  <a:buChar char="•"/>
-                </a:pPr>
-                <a:r>
-                  <a:rPr sz="1000" b="0" i="0" baseline="0" dirty="0">
-                    <a:latin typeface="Calibri"/>
-                  </a:rPr>
-                  <a:t>  Team </a:t>
-                </a:r>
-                <a14:m>
-                  <m:oMath xmlns:m="http://schemas.openxmlformats.org/officeDocument/2006/math">
-                    <m:sSub>
-                      <m:sSubPr>
-                        <m:ctrlPr>
-                          <a:rPr lang="en-US" sz="1000" b="0" i="1" baseline="0" dirty="0" smtClean="0">
-                            <a:latin typeface="Cambria Math" panose="02040503050406030204" pitchFamily="18" charset="0"/>
-                          </a:rPr>
-                        </m:ctrlPr>
-                      </m:sSubPr>
-                      <m:e>
-                        <m:r>
-                          <a:rPr lang="en-US" sz="1000" b="0" i="0" baseline="0" dirty="0" smtClean="0">
-                            <a:latin typeface="Cambria Math" panose="02040503050406030204" pitchFamily="18" charset="0"/>
-                          </a:rPr>
-                          <m:t>𝐿</m:t>
-                        </m:r>
-                      </m:e>
-                      <m:sub>
-                        <m:r>
-                          <a:rPr lang="en-US" sz="1000" b="0" i="0" baseline="0" dirty="0" smtClean="0">
-                            <a:latin typeface="Cambria Math" panose="02040503050406030204" pitchFamily="18" charset="0"/>
-                          </a:rPr>
-                          <m:t>𝐶</m:t>
-                        </m:r>
-                      </m:sub>
-                    </m:sSub>
-                    <m:r>
-                      <a:rPr lang="en-US" sz="1000" b="0" i="0" baseline="0" dirty="0" smtClean="0">
-                        <a:latin typeface="Cambria Math" panose="02040503050406030204" pitchFamily="18" charset="0"/>
-                      </a:rPr>
-                      <m:t>=</m:t>
-                    </m:r>
-                    <m:r>
-                      <a:rPr lang="en-US" sz="1000" b="0" i="0" baseline="0" dirty="0" smtClean="0">
-                        <a:latin typeface="Cambria Math" panose="02040503050406030204" pitchFamily="18" charset="0"/>
-                      </a:rPr>
-                      <m:t>𝑚𝑒𝑎</m:t>
-                    </m:r>
-                    <m:sSub>
-                      <m:sSubPr>
-                        <m:ctrlPr>
-                          <a:rPr lang="en-US" sz="1000" b="0" i="1" baseline="0" dirty="0" smtClean="0">
-                            <a:latin typeface="Cambria Math" panose="02040503050406030204" pitchFamily="18" charset="0"/>
-                          </a:rPr>
-                        </m:ctrlPr>
-                      </m:sSubPr>
-                      <m:e>
-                        <m:r>
-                          <a:rPr lang="en-US" sz="1000" b="0" i="0" baseline="0" dirty="0" smtClean="0">
-                            <a:latin typeface="Cambria Math" panose="02040503050406030204" pitchFamily="18" charset="0"/>
-                          </a:rPr>
-                          <m:t>𝑛</m:t>
-                        </m:r>
-                      </m:e>
-                      <m:sub>
-                        <m:r>
-                          <a:rPr lang="en-US" sz="1000" b="0" i="0" baseline="0" dirty="0" smtClean="0">
-                            <a:latin typeface="Cambria Math" panose="02040503050406030204" pitchFamily="18" charset="0"/>
-                          </a:rPr>
-                          <m:t>𝑗</m:t>
-                        </m:r>
-                      </m:sub>
-                    </m:sSub>
-                    <m:r>
-                      <a:rPr lang="en-US" sz="1000" b="0" i="0" baseline="0" dirty="0" smtClean="0">
-                        <a:latin typeface="Cambria Math" panose="02040503050406030204" pitchFamily="18" charset="0"/>
-                      </a:rPr>
-                      <m:t> </m:t>
-                    </m:r>
-                    <m:r>
-                      <a:rPr lang="en-US" sz="1000" b="0" i="0" baseline="0" dirty="0" smtClean="0">
-                        <a:latin typeface="Cambria Math" panose="02040503050406030204" pitchFamily="18" charset="0"/>
-                      </a:rPr>
-                      <m:t>𝜎</m:t>
-                    </m:r>
-                    <m:d>
-                      <m:dPr>
-                        <m:ctrlPr>
-                          <a:rPr lang="en-US" sz="1000" b="0" i="1" baseline="0" dirty="0" smtClean="0">
-                            <a:latin typeface="Cambria Math" panose="02040503050406030204" pitchFamily="18" charset="0"/>
-                          </a:rPr>
-                        </m:ctrlPr>
-                      </m:dPr>
-                      <m:e>
-                        <m:r>
-                          <a:rPr lang="en-US" sz="1000" b="0" i="0" baseline="0" dirty="0" smtClean="0">
-                            <a:latin typeface="Cambria Math" panose="02040503050406030204" pitchFamily="18" charset="0"/>
-                          </a:rPr>
-                          <m:t>𝛾</m:t>
-                        </m:r>
-                        <m:d>
-                          <m:dPr>
-                            <m:ctrlPr>
-                              <a:rPr lang="en-US" sz="1000" b="0" i="1" baseline="0" dirty="0" smtClean="0">
-                                <a:latin typeface="Cambria Math" panose="02040503050406030204" pitchFamily="18" charset="0"/>
-                              </a:rPr>
-                            </m:ctrlPr>
-                          </m:dPr>
-                          <m:e>
-                            <m:sSub>
-                              <m:sSubPr>
-                                <m:ctrlPr>
-                                  <a:rPr lang="en-US" sz="1000" b="0" i="1" baseline="0" dirty="0" smtClean="0">
-                                    <a:latin typeface="Cambria Math" panose="02040503050406030204" pitchFamily="18" charset="0"/>
-                                  </a:rPr>
-                                </m:ctrlPr>
-                              </m:sSubPr>
-                              <m:e>
-                                <m:acc>
-                                  <m:accPr>
-                                    <m:chr m:val="ˆ"/>
-                                    <m:ctrlPr>
-                                      <a:rPr lang="en-US" sz="1000" b="0" i="1" baseline="0" dirty="0" smtClean="0">
-                                        <a:latin typeface="Cambria Math" panose="02040503050406030204" pitchFamily="18" charset="0"/>
-                                      </a:rPr>
-                                    </m:ctrlPr>
-                                  </m:accPr>
-                                  <m:e>
-                                    <m:r>
-                                      <a:rPr lang="en-US" sz="1000" b="0" i="0" baseline="0" dirty="0" smtClean="0">
-                                        <a:latin typeface="Cambria Math" panose="02040503050406030204" pitchFamily="18" charset="0"/>
-                                      </a:rPr>
-                                      <m:t>𝐴</m:t>
-                                    </m:r>
-                                  </m:e>
-                                </m:acc>
-                              </m:e>
-                              <m:sub>
-                                <m:r>
-                                  <a:rPr lang="en-US" sz="1000" b="0" i="0" baseline="0" dirty="0" smtClean="0">
-                                    <a:latin typeface="Cambria Math" panose="02040503050406030204" pitchFamily="18" charset="0"/>
-                                  </a:rPr>
-                                  <m:t>𝑗</m:t>
-                                </m:r>
-                              </m:sub>
-                            </m:sSub>
-                            <m:r>
-                              <a:rPr lang="en-US" sz="1000" b="0" i="0" baseline="0" dirty="0" smtClean="0">
-                                <a:latin typeface="Cambria Math" panose="02040503050406030204" pitchFamily="18" charset="0"/>
-                              </a:rPr>
-                              <m:t>−</m:t>
-                            </m:r>
-                            <m:r>
-                              <a:rPr lang="en-US" sz="1000" b="0" i="0" baseline="0" dirty="0" smtClean="0">
-                                <a:latin typeface="Cambria Math" panose="02040503050406030204" pitchFamily="18" charset="0"/>
-                              </a:rPr>
-                              <m:t>𝜃</m:t>
-                            </m:r>
-                          </m:e>
-                        </m:d>
-                      </m:e>
-                    </m:d>
-                  </m:oMath>
-                </a14:m>
-                <a:r>
-                  <a:rPr sz="1000" b="0" i="0" baseline="0" dirty="0">
-                    <a:latin typeface="Calibri"/>
-                  </a:rPr>
-                  <a:t> on each roster.</a:t>
-                </a:r>
-              </a:p>
-              <a:p>
-                <a:pPr>
-                  <a:lnSpc>
-                    <a:spcPct val="150000"/>
-                  </a:lnSpc>
-                  <a:buChar char="•"/>
-                </a:pPr>
-                <a:r>
-                  <a:rPr sz="1000" b="0" i="0" baseline="0" dirty="0">
-                    <a:latin typeface="Calibri"/>
-                  </a:rPr>
-                  <a:t>  Same PD16 team-smooth definition — one value per team-season.</a:t>
-                </a:r>
-              </a:p>
-              <a:p>
-                <a:pPr>
-                  <a:lnSpc>
-                    <a:spcPct val="150000"/>
-                  </a:lnSpc>
-                  <a:buChar char="•"/>
-                </a:pPr>
-                <a:r>
-                  <a:rPr sz="1000" b="0" i="0" baseline="0" dirty="0">
-                    <a:latin typeface="Calibri"/>
-                  </a:rPr>
-                  <a:t>  Not LOO; includes every roster member in the mean.</a:t>
-                </a:r>
-              </a:p>
-              <a:p>
-                <a:pPr>
-                  <a:lnSpc>
-                    <a:spcPct val="150000"/>
-                  </a:lnSpc>
-                  <a:buChar char="•"/>
-                </a:pPr>
-                <a:r>
-                  <a:rPr sz="1000" b="0" i="0" baseline="0" dirty="0">
-                    <a:latin typeface="Calibri"/>
-                  </a:rPr>
-                  <a:t>  </a:t>
-                </a:r>
-                <a14:m>
-                  <m:oMath xmlns:m="http://schemas.openxmlformats.org/officeDocument/2006/math">
-                    <m:r>
-                      <a:rPr lang="en-US" sz="1000" b="0" i="0" baseline="0" dirty="0" smtClean="0">
-                        <a:latin typeface="Cambria Math" panose="02040503050406030204" pitchFamily="18" charset="0"/>
-                      </a:rPr>
-                      <m:t>𝛾</m:t>
-                    </m:r>
-                    <m:r>
-                      <a:rPr lang="en-US" sz="1000" b="0" i="0" baseline="0" dirty="0" smtClean="0">
-                        <a:latin typeface="Cambria Math" panose="02040503050406030204" pitchFamily="18" charset="0"/>
-                      </a:rPr>
-                      <m:t>=0.5</m:t>
-                    </m:r>
-                  </m:oMath>
-                </a14:m>
-                <a:r>
-                  <a:rPr sz="1000" b="0" i="0" baseline="0" dirty="0">
-                    <a:latin typeface="Calibri"/>
-                  </a:rPr>
-                  <a:t> (539 placeholder until PD17 </a:t>
-                </a:r>
-                <a14:m>
-                  <m:oMath xmlns:m="http://schemas.openxmlformats.org/officeDocument/2006/math">
-                    <m:r>
-                      <a:rPr lang="en-US" sz="1000" b="0" i="0" baseline="0" dirty="0" smtClean="0">
-                        <a:latin typeface="Cambria Math" panose="02040503050406030204" pitchFamily="18" charset="0"/>
-                      </a:rPr>
-                      <m:t>𝛾</m:t>
-                    </m:r>
-                  </m:oMath>
-                </a14:m>
-                <a:r>
-                  <a:rPr sz="1000" b="0" i="0" baseline="0" dirty="0">
-                    <a:latin typeface="Calibri"/>
-                  </a:rPr>
-                  <a:t> / </a:t>
-                </a:r>
-                <a14:m>
-                  <m:oMath xmlns:m="http://schemas.openxmlformats.org/officeDocument/2006/math">
-                    <m:r>
-                      <a:rPr lang="en-US" sz="1000" b="0" i="0" baseline="0" dirty="0" smtClean="0">
-                        <a:latin typeface="Cambria Math" panose="02040503050406030204" pitchFamily="18" charset="0"/>
-                      </a:rPr>
-                      <m:t>𝜆</m:t>
-                    </m:r>
-                  </m:oMath>
-                </a14:m>
-                <a:r>
-                  <a:rPr sz="1000" b="0" i="0" baseline="0" dirty="0">
-                    <a:latin typeface="Calibri"/>
-                  </a:rPr>
-                  <a:t> calibration).</a:t>
-                </a:r>
-              </a:p>
-              <a:p>
-                <a:pPr>
-                  <a:lnSpc>
-                    <a:spcPct val="150000"/>
-                  </a:lnSpc>
-                  <a:buChar char="•"/>
-                </a:pPr>
-                <a:r>
-                  <a:rPr sz="1000" b="0" i="0" baseline="0" dirty="0">
-                    <a:latin typeface="Calibri"/>
-                  </a:rPr>
-                  <a:t>  This run: mean </a:t>
-                </a:r>
-                <a14:m>
-                  <m:oMath xmlns:m="http://schemas.openxmlformats.org/officeDocument/2006/math">
-                    <m:sSub>
-                      <m:sSubPr>
-                        <m:ctrlPr>
-                          <a:rPr lang="en-US" sz="1000" b="0" i="1" baseline="0" dirty="0" smtClean="0">
-                            <a:latin typeface="Cambria Math" panose="02040503050406030204" pitchFamily="18" charset="0"/>
-                          </a:rPr>
-                        </m:ctrlPr>
-                      </m:sSubPr>
-                      <m:e>
-                        <m:r>
-                          <a:rPr lang="en-US" sz="1000" b="0" i="0" baseline="0" dirty="0">
-                            <a:latin typeface="Cambria Math" panose="02040503050406030204" pitchFamily="18" charset="0"/>
-                          </a:rPr>
-                          <m:t>𝐿</m:t>
-                        </m:r>
-                      </m:e>
-                      <m:sub>
-                        <m:r>
-                          <a:rPr lang="en-US" sz="1000" b="0" i="0" baseline="0" dirty="0">
-                            <a:latin typeface="Cambria Math" panose="02040503050406030204" pitchFamily="18" charset="0"/>
-                          </a:rPr>
-                          <m:t>𝐶</m:t>
-                        </m:r>
-                      </m:sub>
-                    </m:sSub>
-                    <m:r>
-                      <a:rPr lang="en-US" sz="1000" b="0" i="0" baseline="0" dirty="0">
-                        <a:latin typeface="Cambria Math" panose="02040503050406030204" pitchFamily="18" charset="0"/>
-                      </a:rPr>
-                      <m:t>=0.254</m:t>
-                    </m:r>
-                  </m:oMath>
-                </a14:m>
-                <a:r>
-                  <a:rPr sz="1000" b="0" i="0" baseline="0" dirty="0">
-                    <a:latin typeface="Calibri"/>
-                  </a:rPr>
-                  <a:t>, sd</a:t>
-                </a:r>
-                <a14:m>
-                  <m:oMath xmlns:m="http://schemas.openxmlformats.org/officeDocument/2006/math">
-                    <m:r>
-                      <a:rPr lang="en-US" sz="1000" b="0" i="0" baseline="0" dirty="0" smtClean="0">
-                        <a:latin typeface="Cambria Math" panose="02040503050406030204" pitchFamily="18" charset="0"/>
-                      </a:rPr>
-                      <m:t> =0.039</m:t>
-                    </m:r>
-                  </m:oMath>
-                </a14:m>
-                <a:r>
-                  <a:rPr sz="1000" b="0" i="0" baseline="0" dirty="0">
-                    <a:latin typeface="Calibri"/>
-                  </a:rPr>
-                  <a:t> (</a:t>
-                </a:r>
-                <a14:m>
-                  <m:oMath xmlns:m="http://schemas.openxmlformats.org/officeDocument/2006/math">
-                    <m:r>
-                      <a:rPr lang="en-US" sz="1000" b="0" i="0" baseline="0" dirty="0" smtClean="0">
-                        <a:latin typeface="Cambria Math" panose="02040503050406030204" pitchFamily="18" charset="0"/>
-                      </a:rPr>
-                      <m:t>6,492</m:t>
-                    </m:r>
-                  </m:oMath>
-                </a14:m>
-                <a:r>
-                  <a:rPr sz="1000" b="0" i="0" baseline="0" dirty="0">
-                    <a:latin typeface="Calibri"/>
-                  </a:rPr>
-                  <a:t> team-seasons).</a:t>
-                </a:r>
-              </a:p>
-              <a:p>
-                <a:pPr>
-                  <a:lnSpc>
-                    <a:spcPct val="150000"/>
-                  </a:lnSpc>
-                  <a:buChar char="•"/>
-                </a:pPr>
-                <a:r>
-                  <a:rPr sz="1000" b="0" i="0" baseline="0" dirty="0">
-                    <a:latin typeface="Calibri"/>
-                  </a:rPr>
-                  <a:t>  </a:t>
-                </a:r>
-                <a14:m>
-                  <m:oMath xmlns:m="http://schemas.openxmlformats.org/officeDocument/2006/math">
-                    <m:r>
-                      <a:rPr lang="en-US" sz="1000" b="0" i="0" baseline="0" dirty="0" smtClean="0">
-                        <a:latin typeface="Cambria Math" panose="02040503050406030204" pitchFamily="18" charset="0"/>
-                      </a:rPr>
-                      <m:t>𝜃</m:t>
-                    </m:r>
-                  </m:oMath>
-                </a14:m>
-                <a:r>
-                  <a:rPr sz="1000" b="0" i="0" baseline="0" dirty="0">
-                    <a:latin typeface="Calibri"/>
-                  </a:rPr>
-                  <a:t> from draft rate: </a:t>
-                </a:r>
-                <a14:m>
-                  <m:oMath xmlns:m="http://schemas.openxmlformats.org/officeDocument/2006/math">
-                    <m:r>
-                      <a:rPr lang="en-US" sz="1000" b="0" i="0" baseline="0" dirty="0" smtClean="0">
-                        <a:latin typeface="Cambria Math" panose="02040503050406030204" pitchFamily="18" charset="0"/>
-                      </a:rPr>
-                      <m:t>𝐾</m:t>
-                    </m:r>
-                    <m:r>
-                      <a:rPr lang="en-US" sz="1000" b="0" i="0" baseline="0" dirty="0" smtClean="0">
-                        <a:latin typeface="Cambria Math" panose="02040503050406030204" pitchFamily="18" charset="0"/>
-                      </a:rPr>
-                      <m:t>/</m:t>
-                    </m:r>
-                    <m:r>
-                      <a:rPr lang="en-US" sz="1000" b="0" i="0" baseline="0" dirty="0" smtClean="0">
-                        <a:latin typeface="Cambria Math" panose="02040503050406030204" pitchFamily="18" charset="0"/>
-                      </a:rPr>
-                      <m:t>𝑁</m:t>
-                    </m:r>
-                    <m:r>
-                      <a:rPr lang="en-US" sz="1000" b="0" i="0" baseline="0" dirty="0" smtClean="0">
-                        <a:latin typeface="Cambria Math" panose="02040503050406030204" pitchFamily="18" charset="0"/>
-                      </a:rPr>
-                      <m:t>=0.0182⇒</m:t>
-                    </m:r>
-                    <m:r>
-                      <a:rPr lang="en-US" sz="1000" b="0" i="0" baseline="0" dirty="0" smtClean="0">
-                        <a:latin typeface="Cambria Math" panose="02040503050406030204" pitchFamily="18" charset="0"/>
-                      </a:rPr>
-                      <m:t>𝜃</m:t>
-                    </m:r>
-                    <m:r>
-                      <a:rPr lang="en-US" sz="1000" b="0" i="0" baseline="0" dirty="0" smtClean="0">
-                        <a:latin typeface="Cambria Math" panose="02040503050406030204" pitchFamily="18" charset="0"/>
-                      </a:rPr>
-                      <m:t>=2.295</m:t>
-                    </m:r>
-                  </m:oMath>
-                </a14:m>
-                <a:r>
-                  <a:rPr sz="1000" b="0" i="0" baseline="0" dirty="0">
-                    <a:latin typeface="Calibri"/>
-                  </a:rPr>
-                  <a:t> on </a:t>
-                </a:r>
-                <a14:m>
-                  <m:oMath xmlns:m="http://schemas.openxmlformats.org/officeDocument/2006/math">
-                    <m:sSub>
-                      <m:sSubPr>
-                        <m:ctrlPr>
-                          <a:rPr lang="en-US" sz="1000" b="0" i="1" baseline="0" dirty="0" smtClean="0">
-                            <a:latin typeface="Cambria Math" panose="02040503050406030204" pitchFamily="18" charset="0"/>
-                          </a:rPr>
-                        </m:ctrlPr>
-                      </m:sSubPr>
-                      <m:e>
-                        <m:acc>
-                          <m:accPr>
-                            <m:chr m:val="ˆ"/>
-                            <m:ctrlPr>
-                              <a:rPr lang="en-US" sz="1000" b="0" i="1" baseline="0" dirty="0">
-                                <a:latin typeface="Cambria Math" panose="02040503050406030204" pitchFamily="18" charset="0"/>
-                              </a:rPr>
-                            </m:ctrlPr>
-                          </m:accPr>
-                          <m:e>
-                            <m:r>
-                              <a:rPr lang="en-US" sz="1000" b="0" i="0" baseline="0" dirty="0">
-                                <a:latin typeface="Cambria Math" panose="02040503050406030204" pitchFamily="18" charset="0"/>
-                              </a:rPr>
-                              <m:t>𝐴</m:t>
-                            </m:r>
-                          </m:e>
-                        </m:acc>
-                      </m:e>
-                      <m:sub>
-                        <m:r>
-                          <a:rPr lang="en-US" sz="1000" b="0" i="0" baseline="0" dirty="0">
-                            <a:latin typeface="Cambria Math" panose="02040503050406030204" pitchFamily="18" charset="0"/>
-                          </a:rPr>
-                          <m:t>𝑖</m:t>
-                        </m:r>
-                      </m:sub>
-                    </m:sSub>
-                  </m:oMath>
-                </a14:m>
-                <a:r>
-                  <a:rPr sz="1000" b="0" i="0" baseline="0" dirty="0">
-                    <a:latin typeface="Calibri"/>
-                  </a:rPr>
-                  <a:t>.</a:t>
-                </a:r>
-              </a:p>
-            </p:txBody>
-          </p:sp>
-        </mc:Choice>
-        <mc:Fallback>
-          <p:sp>
-            <p:nvSpPr>
-              <p:cNvPr id="4" name="TextBox 3"/>
-              <p:cNvSpPr txBox="1">
-                <a:spLocks noRot="1" noChangeAspect="1" noMove="1" noResize="1" noEditPoints="1" noAdjustHandles="1" noChangeArrowheads="1" noChangeShapeType="1" noTextEdit="1"/>
-              </p:cNvSpPr>
-              <p:nvPr/>
-            </p:nvSpPr>
-            <p:spPr>
-              <a:xfrm>
-                <a:off x="278989" y="1851773"/>
-                <a:ext cx="3949413" cy="1577227"/>
-              </a:xfrm>
-              <a:prstGeom prst="rect">
-                <a:avLst/>
-              </a:prstGeom>
-              <a:blipFill>
-                <a:blip r:embed="rId4"/>
-                <a:stretch>
-                  <a:fillRect b="-794"/>
-                </a:stretch>
-              </a:blipFill>
-            </p:spPr>
-            <p:txBody>
-              <a:bodyPr/>
-              <a:lstStyle/>
-              <a:p>
-                <a:r>
-                  <a:rPr lang="en-US">
-                    <a:noFill/>
-                  </a:rPr>
-                  <a:t> </a:t>
-                </a:r>
-              </a:p>
-            </p:txBody>
-          </p:sp>
-        </mc:Fallback>
-      </mc:AlternateContent>
+      <p:sp>
+        <p:nvSpPr>
+          <p:cNvPr id="2" name="TextBox 1"/>
+          <p:cNvSpPr txBox="1"/>
+          <p:nvPr/>
+        </p:nvSpPr>
+        <p:spPr>
+          <a:xfrm>
+            <a:off x="384048" y="219456"/>
+            <a:ext cx="11423599" cy="418063680000"/>
+          </a:xfrm>
+          <a:prstGeom prst="rect">
+            <a:avLst/>
+          </a:prstGeom>
+          <a:noFill/>
+        </p:spPr>
+        <p:txBody>
+          <a:bodyPr wrap="none">
+            <a:spAutoFit/>
+          </a:bodyPr>
+          <a:lstStyle/>
+          <a:p>
+            <a:r>
+              <a:rPr sz="2000" b="1" i="0" baseline="0">
+                <a:latin typeface="Calibri"/>
+              </a:rPr>
+              <a:t>Grandchild sim — team \hat{A}_{i} interval overlap (\rho diagnostic)</a:t>
+            </a:r>
+          </a:p>
+        </p:txBody>
+      </p:sp>
+      <p:sp>
+        <p:nvSpPr>
+          <p:cNvPr id="3" name="TextBox 2"/>
+          <p:cNvSpPr txBox="1"/>
+          <p:nvPr/>
+        </p:nvSpPr>
+        <p:spPr>
+          <a:xfrm>
+            <a:off x="384048" y="713232"/>
+            <a:ext cx="11423599" cy="225754387200"/>
+          </a:xfrm>
+          <a:prstGeom prst="rect">
+            <a:avLst/>
+          </a:prstGeom>
+          <a:noFill/>
+        </p:spPr>
+        <p:txBody>
+          <a:bodyPr wrap="none">
+            <a:spAutoFit/>
+          </a:bodyPr>
+          <a:lstStyle/>
+          <a:p>
+            <a:r>
+              <a:rPr sz="1000" b="0" i="0" baseline="0">
+                <a:latin typeface="Calibri"/>
+              </a:rPr>
+              <a:t>2015 PPM z · Grandchild ASSIGN · \rho=0.5 · H_{sort}=0.157 · 402 teams</a:t>
+            </a:r>
+          </a:p>
+        </p:txBody>
+      </p:sp>
       <p:pic>
         <p:nvPicPr>
-          <p:cNvPr id="5" name="Picture 4"/>
+          <p:cNvPr id="4" name="Picture 3" descr="image.png"/>
           <p:cNvPicPr>
             <a:picLocks noChangeAspect="1"/>
           </p:cNvPicPr>
           <p:nvPr/>
         </p:nvPicPr>
         <p:blipFill>
-          <a:blip r:embed="rId5"/>
-          <a:srcRect/>
-          <a:stretch/>
+          <a:blip r:embed="rId7"/>
+          <a:stretch>
+            <a:fillRect/>
+          </a:stretch>
         </p:blipFill>
         <p:spPr>
           <a:xfrm>
-            <a:off x="3636625" y="1492383"/>
-            <a:ext cx="8164564" cy="4797258"/>
+            <a:off x="4877684" y="1033272"/>
+            <a:ext cx="6432254" cy="4983480"/>
           </a:xfrm>
           <a:prstGeom prst="rect">
             <a:avLst/>
           </a:prstGeom>
         </p:spPr>
       </p:pic>
-      <mc:AlternateContent xmlns:mc="http://schemas.openxmlformats.org/markup-compatibility/2006" xmlns:a14="http://schemas.microsoft.com/office/drawing/2010/main">
-        <mc:Choice Requires="a14">
-          <p:sp>
-            <p:nvSpPr>
-              <p:cNvPr id="6" name="TextBox 5"/>
-              <p:cNvSpPr txBox="1"/>
-              <p:nvPr/>
-            </p:nvSpPr>
-            <p:spPr>
-              <a:xfrm>
-                <a:off x="384048" y="6428472"/>
-                <a:ext cx="11423599" cy="261610"/>
-              </a:xfrm>
-              <a:prstGeom prst="rect">
-                <a:avLst/>
-              </a:prstGeom>
-              <a:noFill/>
-            </p:spPr>
-            <p:txBody>
-              <a:bodyPr wrap="square">
-                <a:spAutoFit/>
-              </a:bodyPr>
-              <a:lstStyle/>
-              <a:p>
-                <a:pPr algn="l"/>
-                <a:r>
-                  <a:rPr sz="1100" b="1" i="0" baseline="0" dirty="0">
-                    <a:latin typeface="Calibri"/>
-                  </a:rPr>
-                  <a:t>Claim (PD17): Real rosters carry a spread of team congestion </a:t>
-                </a:r>
-                <a14:m>
-                  <m:oMath xmlns:m="http://schemas.openxmlformats.org/officeDocument/2006/math">
-                    <m:sSub>
-                      <m:sSubPr>
-                        <m:ctrlPr>
-                          <a:rPr lang="en-US" sz="1100" b="1" i="1" baseline="0" dirty="0" smtClean="0">
-                            <a:latin typeface="Cambria Math" panose="02040503050406030204" pitchFamily="18" charset="0"/>
-                          </a:rPr>
-                        </m:ctrlPr>
-                      </m:sSubPr>
-                      <m:e>
-                        <m:r>
-                          <a:rPr lang="en-US" sz="1100" b="1" i="0" baseline="0" dirty="0">
-                            <a:latin typeface="Cambria Math" panose="02040503050406030204" pitchFamily="18" charset="0"/>
-                          </a:rPr>
-                          <m:t>𝐿</m:t>
-                        </m:r>
-                      </m:e>
-                      <m:sub>
-                        <m:r>
-                          <a:rPr lang="en-US" sz="1100" b="1" i="0" baseline="0" dirty="0">
-                            <a:latin typeface="Cambria Math" panose="02040503050406030204" pitchFamily="18" charset="0"/>
-                          </a:rPr>
-                          <m:t>𝐶</m:t>
-                        </m:r>
-                      </m:sub>
-                    </m:sSub>
-                  </m:oMath>
-                </a14:m>
-                <a:r>
-                  <a:rPr sz="1100" b="1" i="0" baseline="0" dirty="0">
-                    <a:latin typeface="Calibri"/>
-                  </a:rPr>
-                  <a:t> — the descriptive input </a:t>
-                </a:r>
-                <a:r>
-                  <a:rPr lang="en-US" sz="1100" b="1" i="0" baseline="0" dirty="0">
-                    <a:latin typeface="Calibri"/>
-                  </a:rPr>
-                  <a:t>before we pin</a:t>
-                </a:r>
-                <a:r>
-                  <a:rPr lang="en-US" sz="1100" b="1" i="0" dirty="0">
-                    <a:latin typeface="Calibri"/>
-                  </a:rPr>
-                  <a:t> </a:t>
-                </a:r>
-                <a14:m>
-                  <m:oMath xmlns:m="http://schemas.openxmlformats.org/officeDocument/2006/math">
-                    <m:r>
-                      <a:rPr lang="en-US" sz="1100" b="1" i="0" baseline="0" dirty="0" smtClean="0">
-                        <a:latin typeface="Cambria Math" panose="02040503050406030204" pitchFamily="18" charset="0"/>
-                      </a:rPr>
-                      <m:t>𝜌</m:t>
-                    </m:r>
-                  </m:oMath>
-                </a14:m>
-                <a:r>
-                  <a:rPr sz="1100" b="1" i="0" baseline="0" dirty="0">
-                    <a:latin typeface="Calibri"/>
-                  </a:rPr>
-                  <a:t> </a:t>
-                </a:r>
-                <a:r>
-                  <a:rPr lang="en-US" sz="1100" b="1" dirty="0">
-                    <a:latin typeface="Calibri"/>
-                  </a:rPr>
-                  <a:t>and </a:t>
-                </a:r>
-                <a14:m>
-                  <m:oMath xmlns:m="http://schemas.openxmlformats.org/officeDocument/2006/math">
-                    <m:r>
-                      <a:rPr lang="en-US" sz="1100" b="1" i="1" dirty="0" smtClean="0">
-                        <a:latin typeface="Cambria Math" panose="02040503050406030204" pitchFamily="18" charset="0"/>
-                      </a:rPr>
-                      <m:t>𝛾</m:t>
-                    </m:r>
-                  </m:oMath>
-                </a14:m>
-                <a:r>
-                  <a:rPr sz="1100" b="1" i="0" baseline="0" dirty="0">
-                    <a:latin typeface="Calibri"/>
-                  </a:rPr>
-                  <a:t> in sim.</a:t>
-                </a:r>
-              </a:p>
-            </p:txBody>
-          </p:sp>
-        </mc:Choice>
-        <mc:Fallback xmlns="">
-          <p:sp>
-            <p:nvSpPr>
-              <p:cNvPr id="6" name="TextBox 5"/>
-              <p:cNvSpPr txBox="1">
-                <a:spLocks noRot="1" noChangeAspect="1" noMove="1" noResize="1" noEditPoints="1" noAdjustHandles="1" noChangeArrowheads="1" noChangeShapeType="1" noTextEdit="1"/>
-              </p:cNvSpPr>
-              <p:nvPr/>
-            </p:nvSpPr>
-            <p:spPr>
-              <a:xfrm>
-                <a:off x="384048" y="6428472"/>
-                <a:ext cx="11423599" cy="261610"/>
-              </a:xfrm>
-              <a:prstGeom prst="rect">
-                <a:avLst/>
-              </a:prstGeom>
-              <a:blipFill>
-                <a:blip r:embed="rId6"/>
-                <a:stretch>
-                  <a:fillRect b="-14286"/>
-                </a:stretch>
-              </a:blipFill>
-            </p:spPr>
-            <p:txBody>
-              <a:bodyPr/>
-              <a:lstStyle/>
-              <a:p>
-                <a:r>
-                  <a:rPr lang="en-US">
-                    <a:noFill/>
-                  </a:rPr>
-                  <a:t> </a:t>
-                </a:r>
-              </a:p>
-            </p:txBody>
-          </p:sp>
-        </mc:Fallback>
-      </mc:AlternateContent>
+      <p:sp>
+        <p:nvSpPr>
+          <p:cNvPr id="5" name="TextBox 4"/>
+          <p:cNvSpPr txBox="1"/>
+          <p:nvPr/>
+        </p:nvSpPr>
+        <p:spPr>
+          <a:xfrm>
+            <a:off x="384048" y="3849624"/>
+            <a:ext cx="3794760" cy="2148840"/>
+          </a:xfrm>
+          <a:prstGeom prst="rect">
+            <a:avLst/>
+          </a:prstGeom>
+          <a:noFill/>
+        </p:spPr>
+        <p:txBody>
+          <a:bodyPr wrap="square">
+            <a:spAutoFit/>
+          </a:bodyPr>
+          <a:lstStyle/>
+          <a:p>
+            <a:pPr>
+              <a:buChar char="•"/>
+              <a:lnSpc>
+                <a:spcPct val="150000"/>
+              </a:lnSpc>
+              <a:spcBef>
+                <a:spcPts val="0"/>
+              </a:spcBef>
+              <a:spcAft>
+                <a:spcPts val="0"/>
+              </a:spcAft>
+            </a:pPr>
+            <a:r>
+              <a:rPr sz="1000" b="0" i="0" baseline="0">
+                <a:latin typeface="Calibri"/>
+              </a:rPr>
+              <a:t>  Grandchild one-shot league: 2015 PPM z abilities, C=15, J=402.</a:t>
+            </a:r>
+          </a:p>
+          <a:p>
+            <a:pPr>
+              <a:buChar char="•"/>
+              <a:lnSpc>
+                <a:spcPct val="150000"/>
+              </a:lnSpc>
+              <a:spcBef>
+                <a:spcPts val="0"/>
+              </a:spcBef>
+              <a:spcAft>
+                <a:spcPts val="0"/>
+              </a:spcAft>
+            </a:pPr>
+            <a:r>
+              <a:rPr sz="1000" b="0" i="0" baseline="0">
+                <a:latin typeface="Calibri"/>
+              </a:rPr>
+              <a:t>  ASSIGN: \rho=0.5, endogenous \mu_j — no T_{j^*} draw.</a:t>
+            </a:r>
+          </a:p>
+          <a:p>
+            <a:pPr>
+              <a:buChar char="•"/>
+              <a:lnSpc>
+                <a:spcPct val="150000"/>
+              </a:lnSpc>
+              <a:spcBef>
+                <a:spcPts val="0"/>
+              </a:spcBef>
+              <a:spcAft>
+                <a:spcPts val="0"/>
+              </a:spcAft>
+            </a:pPr>
+            <a:r>
+              <a:rPr sz="1000" b="0" i="0" baseline="0">
+                <a:latin typeface="Calibri"/>
+              </a:rPr>
+              <a:t>  H_{sort} = 1 - \sum_i(\hat{A}_i - \hat{\mu}_{g(i)})^2 / \sum_i(\hat{A}_i - \bar{A})^2 — realized sorting on a fixed partition.</a:t>
+            </a:r>
+          </a:p>
+          <a:p>
+            <a:pPr>
+              <a:buChar char="•"/>
+              <a:lnSpc>
+                <a:spcPct val="150000"/>
+              </a:lnSpc>
+              <a:spcBef>
+                <a:spcPts val="0"/>
+              </a:spcBef>
+              <a:spcAft>
+                <a:spcPts val="0"/>
+              </a:spcAft>
+            </a:pPr>
+            <a:r>
+              <a:rPr sz="1000" b="0" i="0" baseline="0">
+                <a:latin typeface="Calibri"/>
+              </a:rPr>
+              <a:t>  Grandchild partition: H_{sort} = 0.157 (0 = none, 1 = full team sorting).</a:t>
+            </a:r>
+          </a:p>
+          <a:p>
+            <a:pPr>
+              <a:buChar char="•"/>
+              <a:lnSpc>
+                <a:spcPct val="150000"/>
+              </a:lnSpc>
+              <a:spcBef>
+                <a:spcPts val="0"/>
+              </a:spcBef>
+              <a:spcAft>
+                <a:spcPts val="0"/>
+              </a:spcAft>
+            </a:pPr>
+            <a:r>
+              <a:rPr sz="1000" b="0" i="0" baseline="0">
+                <a:latin typeface="Calibri"/>
+              </a:rPr>
+              <a:t>  Max coverage=402; sort-and-chop max=8.</a:t>
+            </a:r>
+          </a:p>
+          <a:p>
+            <a:pPr>
+              <a:buChar char="•"/>
+              <a:lnSpc>
+                <a:spcPct val="150000"/>
+              </a:lnSpc>
+              <a:spcBef>
+                <a:spcPts val="0"/>
+              </a:spcBef>
+              <a:spcAft>
+                <a:spcPts val="0"/>
+              </a:spcAft>
+            </a:pPr>
+            <a:r>
+              <a:rPr sz="1000" b="0" i="0" baseline="0">
+                <a:latin typeface="Calibri"/>
+              </a:rPr>
+              <a:t>  Roster span: mean=3.36 z (402 teams).</a:t>
+            </a:r>
+          </a:p>
+          <a:p>
+            <a:pPr>
+              <a:buChar char="•"/>
+              <a:lnSpc>
+                <a:spcPct val="150000"/>
+              </a:lnSpc>
+              <a:spcBef>
+                <a:spcPts val="0"/>
+              </a:spcBef>
+              <a:spcAft>
+                <a:spcPts val="0"/>
+              </a:spcAft>
+            </a:pPr>
+            <a:r>
+              <a:rPr sz="1000" b="0" i="0" baseline="0">
+                <a:latin typeface="Calibri"/>
+              </a:rPr>
+              <a:t>  VECTOR lock: H_{sort} is realized sorting — not the generative homophily knob \rho.</a:t>
+            </a:r>
+          </a:p>
+        </p:txBody>
+      </p:sp>
+      <p:sp>
+        <p:nvSpPr>
+          <p:cNvPr id="6" name="TextBox 5"/>
+          <p:cNvSpPr txBox="1"/>
+          <p:nvPr/>
+        </p:nvSpPr>
+        <p:spPr>
+          <a:xfrm>
+            <a:off x="384048" y="6053328"/>
+            <a:ext cx="11423599" cy="420624"/>
+          </a:xfrm>
+          <a:prstGeom prst="rect">
+            <a:avLst/>
+          </a:prstGeom>
+          <a:noFill/>
+        </p:spPr>
+        <p:txBody>
+          <a:bodyPr wrap="square">
+            <a:spAutoFit/>
+          </a:bodyPr>
+          <a:lstStyle/>
+          <a:p>
+            <a:pPr algn="l"/>
+            <a:r>
+              <a:rPr sz="1100" b="1" i="0" baseline="0">
+                <a:latin typeface="Calibri"/>
+              </a:rPr>
+              <a:t>Claim: Grandchild ASSIGN (_x000D_ho-only, endogenous centroids) on 2015 PPM z — compare interval overlap and H_{sort} to empirical slide 3.</a:t>
+            </a:r>
+          </a:p>
+        </p:txBody>
+      </p:sp>
     </p:spTree>
   </p:cSld>
   <p:clrMapOvr>

--- a/3-Master_Plan/re_entry/HEROs_and_PASSes/slides/CHAR_PD17_HAND.pptx
+++ b/3-Master_Plan/re_entry/HEROs_and_PASSes/slides/CHAR_PD17_HAND.pptx
@@ -5,7 +5,7 @@
     <p:sldMasterId id="2147483648" r:id="rId1"/>
   </p:sldMasterIdLst>
   <p:notesMasterIdLst>
-    <p:notesMasterId r:id="rId24"/>
+    <p:notesMasterId r:id="rId25"/>
   </p:notesMasterIdLst>
   <p:sldIdLst>
     <p:sldId id="265" r:id="rId2"/>
@@ -27,9 +27,10 @@
     <p:sldId id="299" r:id="rId18"/>
     <p:sldId id="298" r:id="rId19"/>
     <p:sldId id="297" r:id="rId20"/>
-    <p:sldId id="257" r:id="rId21"/>
-    <p:sldId id="275" r:id="rId22"/>
-    <p:sldId id="278" r:id="rId23"/>
+    <p:sldId id="301" r:id="rId21"/>
+    <p:sldId id="302" r:id="rId22"/>
+    <p:sldId id="257" r:id="rId23"/>
+    <p:sldId id="275" r:id="rId24"/>
   </p:sldIdLst>
   <p:sldSz cx="12192000" cy="6858000"/>
   <p:notesSz cx="6858000" cy="9144000"/>
@@ -568,7 +569,7 @@
           <a:p>
             <a:fld id="{0AA65AC5-4B69-CD42-A9CA-DA3CB3FA4FFA}" type="slidenum">
               <a:rPr lang="en-US" smtClean="0"/>
-              <a:t>21</a:t>
+              <a:t>23</a:t>
             </a:fld>
             <a:endParaRPr lang="en-US"/>
           </a:p>
@@ -5749,8 +5750,8 @@
           </p:graphicFrame>
         </mc:Fallback>
       </mc:AlternateContent>
-      <mc:AlternateContent xmlns:mc="http://schemas.openxmlformats.org/markup-compatibility/2006" xmlns:a14="http://schemas.microsoft.com/office/drawing/2010/main">
-        <mc:Choice Requires="a14">
+      <mc:AlternateContent xmlns:mc="http://schemas.openxmlformats.org/markup-compatibility/2006">
+        <mc:Choice xmlns:a14="http://schemas.microsoft.com/office/drawing/2010/main" Requires="a14">
           <p:sp>
             <p:nvSpPr>
               <p:cNvPr id="9" name="TextBox 8">
@@ -5765,8 +5766,8 @@
             </p:nvSpPr>
             <p:spPr>
               <a:xfrm>
-                <a:off x="6953296" y="1160502"/>
-                <a:ext cx="2663999" cy="369332"/>
+                <a:off x="6908535" y="749808"/>
+                <a:ext cx="5094728" cy="369332"/>
               </a:xfrm>
               <a:prstGeom prst="rect">
                 <a:avLst/>
@@ -5796,16 +5797,66 @@
                   </m:oMath>
                 </a14:m>
                 <a:r>
+                  <a:rPr lang="en-US" b="1" i="0" baseline="0" dirty="0">
+                    <a:latin typeface="Calibri"/>
+                  </a:rPr>
+                  <a:t> </a:t>
+                </a:r>
+                <a:r>
                   <a:rPr b="1" i="0" baseline="0" dirty="0">
                     <a:latin typeface="Calibri"/>
                   </a:rPr>
-                  <a:t>score)</a:t>
+                  <a:t>score</a:t>
+                </a:r>
+                <a:r>
+                  <a:rPr lang="en-US" b="1" i="0" baseline="0" dirty="0">
+                    <a:latin typeface="Calibri"/>
+                  </a:rPr>
+                  <a:t> </a:t>
+                </a:r>
+                <a14:m>
+                  <m:oMath xmlns:m="http://schemas.openxmlformats.org/officeDocument/2006/math">
+                    <m:r>
+                      <a:rPr lang="en-US" b="1" i="0" baseline="0" dirty="0" smtClean="0">
+                        <a:latin typeface="Cambria Math" panose="02040503050406030204" pitchFamily="18" charset="0"/>
+                      </a:rPr>
+                      <m:t>→</m:t>
+                    </m:r>
+                  </m:oMath>
+                </a14:m>
+                <a:r>
+                  <a:rPr lang="en-US" b="1" i="0" baseline="0" dirty="0">
+                    <a:latin typeface="Calibri"/>
+                  </a:rPr>
+                  <a:t> comparability </a:t>
+                </a:r>
+                <a14:m>
+                  <m:oMath xmlns:m="http://schemas.openxmlformats.org/officeDocument/2006/math">
+                    <m:r>
+                      <a:rPr lang="en-US" b="1" i="0" baseline="0" dirty="0" smtClean="0">
+                        <a:latin typeface="Cambria Math" panose="02040503050406030204" pitchFamily="18" charset="0"/>
+                      </a:rPr>
+                      <m:t>→</m:t>
+                    </m:r>
+                  </m:oMath>
+                </a14:m>
+                <a:r>
+                  <a:rPr lang="en-US" b="1" i="0" baseline="0" dirty="0">
+                    <a:latin typeface="Calibri"/>
+                  </a:rPr>
+                  <a:t> Hero</a:t>
+                </a:r>
+                <a:r>
+                  <a:rPr b="1" i="0" baseline="0" dirty="0">
+                    <a:latin typeface="Calibri"/>
+                  </a:rPr>
+                  <a:t>)</a:t>
                 </a:r>
               </a:p>
             </p:txBody>
           </p:sp>
         </mc:Choice>
-        <mc:Fallback xmlns="">
+        <mc:Fallback>
           <p:sp>
             <p:nvSpPr>
               <p:cNvPr id="9" name="TextBox 8">
@@ -5822,8 +5873,8 @@
             </p:nvSpPr>
             <p:spPr>
               <a:xfrm>
-                <a:off x="6953296" y="1160502"/>
-                <a:ext cx="2663999" cy="369332"/>
+                <a:off x="6908535" y="749808"/>
+                <a:ext cx="5094728" cy="369332"/>
               </a:xfrm>
               <a:prstGeom prst="rect">
                 <a:avLst/>
@@ -5831,7 +5882,7 @@
               <a:blipFill>
                 <a:blip r:embed="rId3"/>
                 <a:stretch>
-                  <a:fillRect l="-1896" t="-6667" r="-948" b="-26667"/>
+                  <a:fillRect l="-744" t="-6667" b="-23333"/>
                 </a:stretch>
               </a:blipFill>
             </p:spPr>
@@ -5850,8 +5901,8 @@
           </p:sp>
         </mc:Fallback>
       </mc:AlternateContent>
-      <mc:AlternateContent xmlns:mc="http://schemas.openxmlformats.org/markup-compatibility/2006" xmlns:a14="http://schemas.microsoft.com/office/drawing/2010/main">
-        <mc:Choice Requires="a14">
+      <mc:AlternateContent xmlns:mc="http://schemas.openxmlformats.org/markup-compatibility/2006">
+        <mc:Choice xmlns:a14="http://schemas.microsoft.com/office/drawing/2010/main" Requires="a14">
           <p:sp>
             <p:nvSpPr>
               <p:cNvPr id="10" name="TextBox 9">
@@ -5866,8 +5917,8 @@
             </p:nvSpPr>
             <p:spPr>
               <a:xfrm>
-                <a:off x="6830873" y="1810402"/>
-                <a:ext cx="5361127" cy="2097754"/>
+                <a:off x="6984337" y="1264044"/>
+                <a:ext cx="4411913" cy="5146794"/>
               </a:xfrm>
               <a:prstGeom prst="rect">
                 <a:avLst/>
@@ -5884,47 +5935,47 @@
                   <a:lnSpc>
                     <a:spcPct val="150000"/>
                   </a:lnSpc>
-                  <a:buChar char="•"/>
                 </a:pPr>
                 <a:r>
-                  <a:rPr sz="1400" b="0" i="0" baseline="0" dirty="0">
-                    <a:latin typeface="Calibri"/>
-                  </a:rPr>
-                  <a:t>  Slide 2 — </a:t>
+                  <a:rPr lang="en-US" sz="1000" b="0" i="0" baseline="0" dirty="0">
+                    <a:latin typeface="Calibri"/>
+                  </a:rPr>
+                  <a:t>Block A — Empirical inputs &amp; overlap</a:t>
+                </a:r>
+              </a:p>
+              <a:p>
+                <a:pPr lvl="1">
+                  <a:lnSpc>
+                    <a:spcPct val="150000"/>
+                  </a:lnSpc>
+                </a:pPr>
+                <a:r>
+                  <a:rPr lang="en-US" sz="1000" b="0" i="0" baseline="0" dirty="0">
+                    <a:latin typeface="Calibri"/>
+                  </a:rPr>
+                  <a:t>Slide 2 — </a:t>
                 </a:r>
                 <a14:m>
                   <m:oMath xmlns:m="http://schemas.openxmlformats.org/officeDocument/2006/math">
                     <m:sSub>
                       <m:sSubPr>
                         <m:ctrlPr>
-                          <a:rPr lang="en-US" sz="1400" b="0" i="1" baseline="0" dirty="0">
+                          <a:rPr lang="en-US" sz="1000" b="0" i="0" baseline="0" dirty="0" err="1" smtClean="0">
                             <a:latin typeface="Cambria Math" panose="02040503050406030204" pitchFamily="18" charset="0"/>
                           </a:rPr>
                         </m:ctrlPr>
                       </m:sSubPr>
                       <m:e>
-                        <m:acc>
-                          <m:accPr>
-                            <m:chr m:val="ˆ"/>
-                            <m:ctrlPr>
-                              <a:rPr lang="en-US" sz="1400" b="0" i="0" baseline="0" dirty="0">
-                                <a:latin typeface="Cambria Math" panose="02040503050406030204" pitchFamily="18" charset="0"/>
-                              </a:rPr>
-                            </m:ctrlPr>
-                          </m:accPr>
-                          <m:e>
-                            <m:r>
-                              <a:rPr lang="en-US" sz="1400" b="0" i="0" baseline="0" dirty="0">
-                                <a:latin typeface="Cambria Math" panose="02040503050406030204" pitchFamily="18" charset="0"/>
-                              </a:rPr>
-                              <m:t>𝐴</m:t>
-                            </m:r>
-                          </m:e>
-                        </m:acc>
+                        <m:r>
+                          <a:rPr lang="en-US" sz="1000" b="0" i="0" baseline="0" dirty="0" err="1" smtClean="0">
+                            <a:latin typeface="Cambria Math" panose="02040503050406030204" pitchFamily="18" charset="0"/>
+                          </a:rPr>
+                          <m:t>Â</m:t>
+                        </m:r>
                       </m:e>
                       <m:sub>
                         <m:r>
-                          <a:rPr lang="en-US" sz="1400" b="0" i="0" baseline="0" dirty="0">
+                          <a:rPr lang="en-US" sz="1000" b="0" i="0" baseline="0" dirty="0" err="1" smtClean="0">
                             <a:latin typeface="Cambria Math" panose="02040503050406030204" pitchFamily="18" charset="0"/>
                           </a:rPr>
                           <m:t>𝑖</m:t>
@@ -5934,44 +5985,38 @@
                   </m:oMath>
                 </a14:m>
                 <a:r>
-                  <a:rPr sz="1400" b="0" i="0" baseline="0" dirty="0">
+                  <a:rPr lang="en-US" sz="1000" b="0" i="0" baseline="0" dirty="0">
                     <a:latin typeface="Calibri"/>
                   </a:rPr>
                   <a:t>, </a:t>
                 </a:r>
                 <a14:m>
                   <m:oMath xmlns:m="http://schemas.openxmlformats.org/officeDocument/2006/math">
+                    <m:r>
+                      <a:rPr lang="en-US" sz="1000" b="0" i="0" baseline="0" dirty="0" smtClean="0">
+                        <a:latin typeface="Cambria Math" panose="02040503050406030204" pitchFamily="18" charset="0"/>
+                      </a:rPr>
+                      <m:t>𝑇</m:t>
+                    </m:r>
                     <m:sSub>
                       <m:sSubPr>
                         <m:ctrlPr>
-                          <a:rPr lang="en-US" sz="1400" b="0" i="1" baseline="0" dirty="0">
+                          <a:rPr lang="en-US" sz="1000" b="0" i="0" baseline="0" dirty="0" err="1" smtClean="0">
                             <a:latin typeface="Cambria Math" panose="02040503050406030204" pitchFamily="18" charset="0"/>
                           </a:rPr>
                         </m:ctrlPr>
                       </m:sSubPr>
                       <m:e>
-                        <m:acc>
-                          <m:accPr>
-                            <m:chr m:val="ˆ"/>
-                            <m:ctrlPr>
-                              <a:rPr lang="en-US" sz="1400" b="0" i="0" baseline="0" dirty="0">
-                                <a:latin typeface="Cambria Math" panose="02040503050406030204" pitchFamily="18" charset="0"/>
-                              </a:rPr>
-                            </m:ctrlPr>
-                          </m:accPr>
-                          <m:e>
-                            <m:r>
-                              <a:rPr lang="en-US" sz="1400" b="0" i="0" baseline="0" dirty="0">
-                                <a:latin typeface="Cambria Math" panose="02040503050406030204" pitchFamily="18" charset="0"/>
-                              </a:rPr>
-                              <m:t>𝑇</m:t>
-                            </m:r>
-                          </m:e>
-                        </m:acc>
+                        <m:r>
+                          <a:rPr lang="en-US" sz="1000" b="0" i="0" baseline="0" dirty="0" err="1" smtClean="0">
+                            <a:latin typeface="Cambria Math" panose="02040503050406030204" pitchFamily="18" charset="0"/>
+                          </a:rPr>
+                          <m:t>̂</m:t>
+                        </m:r>
                       </m:e>
                       <m:sub>
                         <m:r>
-                          <a:rPr lang="en-US" sz="1400" b="0" i="0" baseline="0" dirty="0">
+                          <a:rPr lang="en-US" sz="1000" b="0" i="0" baseline="0" dirty="0" err="1" smtClean="0">
                             <a:latin typeface="Cambria Math" panose="02040503050406030204" pitchFamily="18" charset="0"/>
                           </a:rPr>
                           <m:t>𝑗</m:t>
@@ -5981,10 +6026,48 @@
                   </m:oMath>
                 </a14:m>
                 <a:r>
-                  <a:rPr sz="1400" b="0" i="0" baseline="0" dirty="0">
-                    <a:latin typeface="Calibri"/>
-                  </a:rPr>
-                  <a:t> inputs</a:t>
+                  <a:rPr lang="en-US" sz="1000" b="0" i="0" baseline="0" dirty="0">
+                    <a:latin typeface="Calibri"/>
+                  </a:rPr>
+                  <a:t> inputs (2011–2021 panel)</a:t>
+                </a:r>
+              </a:p>
+              <a:p>
+                <a:pPr lvl="1">
+                  <a:lnSpc>
+                    <a:spcPct val="150000"/>
+                  </a:lnSpc>
+                </a:pPr>
+                <a:r>
+                  <a:rPr lang="en-US" sz="1000" b="0" i="0" baseline="0" dirty="0">
+                    <a:latin typeface="Calibri"/>
+                  </a:rPr>
+                  <a:t>Slide 3 — NCAA interval overlap, full panel (</a:t>
+                </a:r>
+                <a:r>
+                  <a:rPr lang="el-GR" sz="1000" b="0" i="0" baseline="0" dirty="0">
+                    <a:latin typeface="Calibri"/>
+                  </a:rPr>
+                  <a:t>ρ </a:t>
+                </a:r>
+                <a:r>
+                  <a:rPr lang="en-US" sz="1000" b="0" i="0" baseline="0" dirty="0">
+                    <a:latin typeface="Calibri"/>
+                  </a:rPr>
+                  <a:t>diagnostic)</a:t>
+                </a:r>
+              </a:p>
+              <a:p>
+                <a:pPr lvl="1">
+                  <a:lnSpc>
+                    <a:spcPct val="150000"/>
+                  </a:lnSpc>
+                </a:pPr>
+                <a:r>
+                  <a:rPr lang="en-US" sz="1000" b="0" i="0" baseline="0" dirty="0">
+                    <a:latin typeface="Calibri"/>
+                  </a:rPr>
+                  <a:t>Slides 4–5 — NCAA vs LG interval pair (2015–2019 window)</a:t>
                 </a:r>
               </a:p>
               <a:p>
@@ -5992,29 +6075,265 @@
                   <a:lnSpc>
                     <a:spcPct val="150000"/>
                   </a:lnSpc>
-                  <a:buChar char="•"/>
                 </a:pPr>
                 <a:r>
-                  <a:rPr sz="1400" b="0" i="0" baseline="0" dirty="0">
-                    <a:latin typeface="Calibri"/>
-                  </a:rPr>
-                  <a:t>  Slide 3 — team interval overlap (</a:t>
-                </a:r>
-                <a14:m>
-                  <m:oMath xmlns:m="http://schemas.openxmlformats.org/officeDocument/2006/math">
-                    <m:r>
-                      <a:rPr lang="en-US" sz="1400" b="0" i="0" baseline="0" dirty="0" smtClean="0">
-                        <a:latin typeface="Cambria Math" panose="02040503050406030204" pitchFamily="18" charset="0"/>
-                      </a:rPr>
-                      <m:t>𝜌</m:t>
-                    </m:r>
-                  </m:oMath>
-                </a14:m>
-                <a:r>
-                  <a:rPr sz="1400" b="0" i="0" baseline="0" dirty="0">
-                    <a:latin typeface="Calibri"/>
-                  </a:rPr>
-                  <a:t> diagnostic, 530 CELL 8)</a:t>
+                  <a:rPr lang="en-US" sz="1000" b="0" i="0" baseline="0" dirty="0">
+                    <a:latin typeface="Calibri"/>
+                  </a:rPr>
+                  <a:t>Block B — LG </a:t>
+                </a:r>
+                <a:r>
+                  <a:rPr lang="el-GR" sz="1000" b="0" i="0" baseline="0" dirty="0">
+                    <a:latin typeface="Calibri"/>
+                  </a:rPr>
+                  <a:t>ρ </a:t>
+                </a:r>
+                <a:r>
+                  <a:rPr lang="en-US" sz="1000" b="0" i="0" baseline="0" dirty="0">
+                    <a:latin typeface="Calibri"/>
+                  </a:rPr>
+                  <a:t>validation (ASSIGN readouts)</a:t>
+                </a:r>
+              </a:p>
+              <a:p>
+                <a:pPr lvl="1">
+                  <a:lnSpc>
+                    <a:spcPct val="150000"/>
+                  </a:lnSpc>
+                </a:pPr>
+                <a:r>
+                  <a:rPr lang="en-US" sz="1000" b="0" i="0" baseline="0" dirty="0">
+                    <a:latin typeface="Calibri"/>
+                  </a:rPr>
+                  <a:t>Slide 6 — LG ASSIGN: </a:t>
+                </a:r>
+                <a:r>
+                  <a:rPr lang="en-US" sz="1000" b="0" i="0" baseline="0" dirty="0" err="1">
+                    <a:latin typeface="Calibri"/>
+                  </a:rPr>
+                  <a:t>global_wss</a:t>
+                </a:r>
+                <a:r>
+                  <a:rPr lang="en-US" sz="1000" b="0" i="0" baseline="0" dirty="0">
+                    <a:latin typeface="Calibri"/>
+                  </a:rPr>
+                  <a:t> vs </a:t>
+                </a:r>
+                <a:r>
+                  <a:rPr lang="el-GR" sz="1000" b="0" i="0" baseline="0" dirty="0">
+                    <a:latin typeface="Calibri"/>
+                  </a:rPr>
+                  <a:t>ρ (</a:t>
+                </a:r>
+                <a:r>
+                  <a:rPr lang="en-US" sz="1000" b="0" i="0" baseline="0" dirty="0">
+                    <a:latin typeface="Calibri"/>
+                  </a:rPr>
+                  <a:t>primary)</a:t>
+                </a:r>
+              </a:p>
+              <a:p>
+                <a:pPr lvl="1">
+                  <a:lnSpc>
+                    <a:spcPct val="150000"/>
+                  </a:lnSpc>
+                </a:pPr>
+                <a:r>
+                  <a:rPr lang="en-US" sz="1000" b="0" i="0" baseline="0" dirty="0">
+                    <a:latin typeface="Calibri"/>
+                  </a:rPr>
+                  <a:t>Slide 7 — </a:t>
+                </a:r>
+                <a14:m>
+                  <m:oMath xmlns:m="http://schemas.openxmlformats.org/officeDocument/2006/math">
+                    <m:sSub>
+                      <m:sSubPr>
+                        <m:ctrlPr>
+                          <a:rPr lang="en-US" sz="1000" b="0" i="0" baseline="0" dirty="0" smtClean="0">
+                            <a:latin typeface="Cambria Math" panose="02040503050406030204" pitchFamily="18" charset="0"/>
+                          </a:rPr>
+                        </m:ctrlPr>
+                      </m:sSubPr>
+                      <m:e>
+                        <m:r>
+                          <a:rPr lang="en-US" sz="1000" b="0" i="0" baseline="0" dirty="0" smtClean="0">
+                            <a:latin typeface="Cambria Math" panose="02040503050406030204" pitchFamily="18" charset="0"/>
+                          </a:rPr>
+                          <m:t>𝐻</m:t>
+                        </m:r>
+                      </m:e>
+                      <m:sub>
+                        <m:r>
+                          <a:rPr lang="en-US" sz="1000" b="0" i="0" baseline="0" dirty="0" smtClean="0">
+                            <a:latin typeface="Cambria Math" panose="02040503050406030204" pitchFamily="18" charset="0"/>
+                          </a:rPr>
+                          <m:t>𝑠𝑜𝑟𝑡</m:t>
+                        </m:r>
+                      </m:sub>
+                    </m:sSub>
+                  </m:oMath>
+                </a14:m>
+                <a:r>
+                  <a:rPr lang="en-US" sz="1000" b="0" i="0" baseline="0" dirty="0">
+                    <a:latin typeface="Calibri"/>
+                  </a:rPr>
+                  <a:t> glossary + </a:t>
+                </a:r>
+                <a:r>
+                  <a:rPr lang="el-GR" sz="1000" b="0" i="0" baseline="0" dirty="0">
+                    <a:latin typeface="Calibri"/>
+                  </a:rPr>
+                  <a:t>ρ </a:t>
+                </a:r>
+                <a:r>
+                  <a:rPr lang="en-US" sz="1000" b="0" i="0" baseline="0" dirty="0">
+                    <a:latin typeface="Calibri"/>
+                  </a:rPr>
+                  <a:t>inset (companion)</a:t>
+                </a:r>
+              </a:p>
+              <a:p>
+                <a:pPr lvl="1">
+                  <a:lnSpc>
+                    <a:spcPct val="150000"/>
+                  </a:lnSpc>
+                </a:pPr>
+                <a:r>
+                  <a:rPr lang="en-US" sz="1000" b="0" i="0" baseline="0" dirty="0">
+                    <a:latin typeface="Calibri"/>
+                  </a:rPr>
+                  <a:t>Block C — Team </a:t>
+                </a:r>
+                <a14:m>
+                  <m:oMath xmlns:m="http://schemas.openxmlformats.org/officeDocument/2006/math">
+                    <m:sSub>
+                      <m:sSubPr>
+                        <m:ctrlPr>
+                          <a:rPr lang="en-US" sz="1000" b="0" i="0" baseline="0" dirty="0" smtClean="0">
+                            <a:latin typeface="Cambria Math" panose="02040503050406030204" pitchFamily="18" charset="0"/>
+                          </a:rPr>
+                        </m:ctrlPr>
+                      </m:sSubPr>
+                      <m:e>
+                        <m:r>
+                          <a:rPr lang="en-US" sz="1000" b="0" i="0" baseline="0" dirty="0" smtClean="0">
+                            <a:latin typeface="Cambria Math" panose="02040503050406030204" pitchFamily="18" charset="0"/>
+                          </a:rPr>
+                          <m:t>𝐿</m:t>
+                        </m:r>
+                      </m:e>
+                      <m:sub>
+                        <m:r>
+                          <a:rPr lang="en-US" sz="1000" b="0" i="0" baseline="0" dirty="0" smtClean="0">
+                            <a:latin typeface="Cambria Math" panose="02040503050406030204" pitchFamily="18" charset="0"/>
+                          </a:rPr>
+                          <m:t>𝐶</m:t>
+                        </m:r>
+                      </m:sub>
+                    </m:sSub>
+                  </m:oMath>
+                </a14:m>
+                <a:r>
+                  <a:rPr lang="en-US" sz="1000" b="0" i="0" baseline="0" dirty="0">
+                    <a:latin typeface="Calibri"/>
+                  </a:rPr>
+                  <a:t> (SCORE-side input, pre-SCORE)</a:t>
+                </a:r>
+              </a:p>
+              <a:p>
+                <a:pPr lvl="1">
+                  <a:lnSpc>
+                    <a:spcPct val="150000"/>
+                  </a:lnSpc>
+                </a:pPr>
+                <a:r>
+                  <a:rPr lang="en-US" sz="1000" b="0" i="0" baseline="0" dirty="0">
+                    <a:latin typeface="Calibri"/>
+                  </a:rPr>
+                  <a:t>Slide 8 — Empirical team </a:t>
+                </a:r>
+                <a14:m>
+                  <m:oMath xmlns:m="http://schemas.openxmlformats.org/officeDocument/2006/math">
+                    <m:sSub>
+                      <m:sSubPr>
+                        <m:ctrlPr>
+                          <a:rPr lang="en-US" sz="1000" b="0" i="0" baseline="0" dirty="0" smtClean="0">
+                            <a:latin typeface="Cambria Math" panose="02040503050406030204" pitchFamily="18" charset="0"/>
+                          </a:rPr>
+                        </m:ctrlPr>
+                      </m:sSubPr>
+                      <m:e>
+                        <m:r>
+                          <a:rPr lang="en-US" sz="1000" b="0" i="0" baseline="0" dirty="0" smtClean="0">
+                            <a:latin typeface="Cambria Math" panose="02040503050406030204" pitchFamily="18" charset="0"/>
+                          </a:rPr>
+                          <m:t>𝐿</m:t>
+                        </m:r>
+                      </m:e>
+                      <m:sub>
+                        <m:r>
+                          <a:rPr lang="en-US" sz="1000" b="0" i="0" baseline="0" dirty="0" smtClean="0">
+                            <a:latin typeface="Cambria Math" panose="02040503050406030204" pitchFamily="18" charset="0"/>
+                          </a:rPr>
+                          <m:t>𝐶</m:t>
+                        </m:r>
+                      </m:sub>
+                    </m:sSub>
+                  </m:oMath>
+                </a14:m>
+                <a:r>
+                  <a:rPr lang="en-US" sz="1000" b="0" i="0" baseline="0" dirty="0">
+                    <a:latin typeface="Calibri"/>
+                  </a:rPr>
+                  <a:t> distribution</a:t>
+                </a:r>
+              </a:p>
+              <a:p>
+                <a:pPr lvl="1">
+                  <a:lnSpc>
+                    <a:spcPct val="150000"/>
+                  </a:lnSpc>
+                </a:pPr>
+                <a:r>
+                  <a:rPr lang="en-US" sz="1000" b="0" i="0" baseline="0" dirty="0">
+                    <a:latin typeface="Calibri"/>
+                  </a:rPr>
+                  <a:t>Slides 9–11 — Empirical vs LG </a:t>
+                </a:r>
+                <a14:m>
+                  <m:oMath xmlns:m="http://schemas.openxmlformats.org/officeDocument/2006/math">
+                    <m:sSub>
+                      <m:sSubPr>
+                        <m:ctrlPr>
+                          <a:rPr lang="en-US" sz="1000" b="0" i="0" baseline="0" dirty="0" smtClean="0">
+                            <a:latin typeface="Cambria Math" panose="02040503050406030204" pitchFamily="18" charset="0"/>
+                          </a:rPr>
+                        </m:ctrlPr>
+                      </m:sSubPr>
+                      <m:e>
+                        <m:r>
+                          <a:rPr lang="en-US" sz="1000" b="0" i="0" baseline="0" dirty="0" smtClean="0">
+                            <a:latin typeface="Cambria Math" panose="02040503050406030204" pitchFamily="18" charset="0"/>
+                          </a:rPr>
+                          <m:t>𝐿</m:t>
+                        </m:r>
+                      </m:e>
+                      <m:sub>
+                        <m:r>
+                          <a:rPr lang="en-US" sz="1000" b="0" i="0" baseline="0" dirty="0" smtClean="0">
+                            <a:latin typeface="Cambria Math" panose="02040503050406030204" pitchFamily="18" charset="0"/>
+                          </a:rPr>
+                          <m:t>𝐶</m:t>
+                        </m:r>
+                      </m:sub>
+                    </m:sSub>
+                  </m:oMath>
+                </a14:m>
+                <a:r>
+                  <a:rPr lang="en-US" sz="1000" b="0" i="0" baseline="0" dirty="0">
+                    <a:latin typeface="Calibri"/>
+                  </a:rPr>
+                  <a:t> (raw · normalized · overlay)</a:t>
                 </a:r>
               </a:p>
               <a:p>
@@ -6022,27 +6341,84 @@
                   <a:lnSpc>
                     <a:spcPct val="150000"/>
                   </a:lnSpc>
-                  <a:buChar char="•"/>
                 </a:pPr>
                 <a:r>
-                  <a:rPr sz="1400" b="0" i="0" baseline="0" dirty="0">
-                    <a:latin typeface="Calibri"/>
-                  </a:rPr>
-                  <a:t>  Slide 4 — team </a:t>
+                  <a:rPr lang="en-US" sz="1000" b="0" i="0" baseline="0" dirty="0">
+                    <a:latin typeface="Calibri"/>
+                  </a:rPr>
+                  <a:t>Block D — Alex comparability (inputs → SELECT)</a:t>
+                </a:r>
+              </a:p>
+              <a:p>
+                <a:pPr lvl="1">
+                  <a:lnSpc>
+                    <a:spcPct val="150000"/>
+                  </a:lnSpc>
+                </a:pPr>
+                <a:r>
+                  <a:rPr lang="en-US" sz="1000" b="0" i="0" baseline="0" dirty="0">
+                    <a:latin typeface="Calibri"/>
+                  </a:rPr>
+                  <a:t>Slide 12 — NCAA roster sizes vs fixed </a:t>
+                </a:r>
+                <a14:m>
+                  <m:oMath xmlns:m="http://schemas.openxmlformats.org/officeDocument/2006/math">
+                    <m:r>
+                      <a:rPr lang="en-US" sz="1000" b="0" i="0" baseline="0" dirty="0" smtClean="0">
+                        <a:latin typeface="Cambria Math" panose="02040503050406030204" pitchFamily="18" charset="0"/>
+                      </a:rPr>
+                      <m:t>𝐶</m:t>
+                    </m:r>
+                    <m:r>
+                      <a:rPr lang="en-US" sz="1000" b="0" i="0" baseline="0" dirty="0" smtClean="0">
+                        <a:latin typeface="Cambria Math" panose="02040503050406030204" pitchFamily="18" charset="0"/>
+                      </a:rPr>
+                      <m:t>=15</m:t>
+                    </m:r>
+                  </m:oMath>
+                </a14:m>
+                <a:endParaRPr lang="en-US" sz="1000" b="0" i="0" baseline="0" dirty="0">
+                  <a:latin typeface="Calibri"/>
+                </a:endParaRPr>
+              </a:p>
+              <a:p>
+                <a:pPr lvl="1">
+                  <a:lnSpc>
+                    <a:spcPct val="150000"/>
+                  </a:lnSpc>
+                </a:pPr>
+                <a:r>
+                  <a:rPr lang="en-US" sz="1000" b="0" i="0" baseline="0" dirty="0">
+                    <a:latin typeface="Calibri"/>
+                  </a:rPr>
+                  <a:t>Slides 13–14 — Hero min_minutes ladder (empirical inverted-U robust)</a:t>
+                </a:r>
+              </a:p>
+              <a:p>
+                <a:pPr lvl="1">
+                  <a:lnSpc>
+                    <a:spcPct val="150000"/>
+                  </a:lnSpc>
+                </a:pPr>
+                <a:r>
+                  <a:rPr lang="en-US" sz="1000" b="0" i="0" baseline="0" dirty="0">
+                    <a:latin typeface="Calibri"/>
+                  </a:rPr>
+                  <a:t>Slides 15–16 — LG capacity sweep: </a:t>
                 </a:r>
                 <a14:m>
                   <m:oMath xmlns:m="http://schemas.openxmlformats.org/officeDocument/2006/math">
                     <m:sSub>
                       <m:sSubPr>
                         <m:ctrlPr>
-                          <a:rPr lang="en-US" sz="1400" b="0" i="0" baseline="0" dirty="0">
+                          <a:rPr lang="en-US" sz="1000" b="0" i="0" baseline="0" dirty="0" smtClean="0">
                             <a:latin typeface="Cambria Math" panose="02040503050406030204" pitchFamily="18" charset="0"/>
                           </a:rPr>
                         </m:ctrlPr>
                       </m:sSubPr>
                       <m:e>
                         <m:r>
-                          <a:rPr lang="en-US" sz="1400" b="0" i="0" baseline="0" dirty="0">
+                          <a:rPr lang="en-US" sz="1000" b="0" i="0" baseline="0" dirty="0" smtClean="0">
                             <a:latin typeface="Cambria Math" panose="02040503050406030204" pitchFamily="18" charset="0"/>
                           </a:rPr>
                           <m:t>𝐿</m:t>
@@ -6050,7 +6426,7 @@
                       </m:e>
                       <m:sub>
                         <m:r>
-                          <a:rPr lang="en-US" sz="1400" b="0" i="0" baseline="0" dirty="0">
+                          <a:rPr lang="en-US" sz="1000" b="0" i="0" baseline="0" dirty="0" smtClean="0">
                             <a:latin typeface="Cambria Math" panose="02040503050406030204" pitchFamily="18" charset="0"/>
                           </a:rPr>
                           <m:t>𝐶</m:t>
@@ -6060,10 +6436,71 @@
                   </m:oMath>
                 </a14:m>
                 <a:r>
-                  <a:rPr sz="1400" b="0" i="0" baseline="0" dirty="0">
-                    <a:latin typeface="Calibri"/>
-                  </a:rPr>
-                  <a:t> distribution</a:t>
+                  <a:rPr lang="en-US" sz="1000" b="0" i="0" baseline="0" dirty="0">
+                    <a:latin typeface="Calibri"/>
+                  </a:rPr>
+                  <a:t> vs NCAA · SELECT vs Hero</a:t>
+                </a:r>
+              </a:p>
+              <a:p>
+                <a:pPr lvl="1">
+                  <a:lnSpc>
+                    <a:spcPct val="150000"/>
+                  </a:lnSpc>
+                </a:pPr>
+                <a:r>
+                  <a:rPr lang="en-US" sz="1000" b="0" i="0" baseline="0" dirty="0">
+                    <a:latin typeface="Calibri"/>
+                  </a:rPr>
+                  <a:t>Slide 17 — Empirical roster-size multiset (Alex caps fix)</a:t>
+                </a:r>
+              </a:p>
+              <a:p>
+                <a:pPr lvl="1">
+                  <a:lnSpc>
+                    <a:spcPct val="150000"/>
+                  </a:lnSpc>
+                </a:pPr>
+                <a:r>
+                  <a:rPr lang="en-US" sz="1000" b="0" i="0" baseline="0" dirty="0">
+                    <a:latin typeface="Calibri"/>
+                  </a:rPr>
+                  <a:t>Slides 18–19 — Empirical caps: </a:t>
+                </a:r>
+                <a14:m>
+                  <m:oMath xmlns:m="http://schemas.openxmlformats.org/officeDocument/2006/math">
+                    <m:sSub>
+                      <m:sSubPr>
+                        <m:ctrlPr>
+                          <a:rPr lang="en-US" sz="1000" b="0" i="0" baseline="0" dirty="0" smtClean="0">
+                            <a:latin typeface="Cambria Math" panose="02040503050406030204" pitchFamily="18" charset="0"/>
+                          </a:rPr>
+                        </m:ctrlPr>
+                      </m:sSubPr>
+                      <m:e>
+                        <m:r>
+                          <a:rPr lang="en-US" sz="1000" b="0" i="0" baseline="0" dirty="0" smtClean="0">
+                            <a:latin typeface="Cambria Math" panose="02040503050406030204" pitchFamily="18" charset="0"/>
+                          </a:rPr>
+                          <m:t>𝐿</m:t>
+                        </m:r>
+                      </m:e>
+                      <m:sub>
+                        <m:r>
+                          <a:rPr lang="en-US" sz="1000" b="0" i="0" baseline="0" dirty="0" smtClean="0">
+                            <a:latin typeface="Cambria Math" panose="02040503050406030204" pitchFamily="18" charset="0"/>
+                          </a:rPr>
+                          <m:t>𝐶</m:t>
+                        </m:r>
+                      </m:sub>
+                    </m:sSub>
+                  </m:oMath>
+                </a14:m>
+                <a:r>
+                  <a:rPr lang="en-US" sz="1000" b="0" i="0" baseline="0" dirty="0">
+                    <a:latin typeface="Calibri"/>
+                  </a:rPr>
+                  <a:t> vs NCAA · SELECT vs Hero</a:t>
                 </a:r>
               </a:p>
               <a:p>
@@ -6071,47 +6508,53 @@
                   <a:lnSpc>
                     <a:spcPct val="150000"/>
                   </a:lnSpc>
-                  <a:buChar char="•"/>
                 </a:pPr>
                 <a:r>
-                  <a:rPr sz="1400" b="0" i="0" baseline="0" dirty="0">
-                    <a:latin typeface="Calibri"/>
-                  </a:rPr>
-                  <a:t>  Slide 5 — Sketch A: </a:t>
-                </a:r>
-                <a14:m>
-                  <m:oMath xmlns:m="http://schemas.openxmlformats.org/officeDocument/2006/math">
+                  <a:rPr lang="en-US" sz="1000" b="0" i="0" baseline="0" dirty="0">
+                    <a:latin typeface="Calibri"/>
+                  </a:rPr>
+                  <a:t>Block E — SCORE-side empirical (PD17)</a:t>
+                </a:r>
+              </a:p>
+              <a:p>
+                <a:pPr lvl="1">
+                  <a:lnSpc>
+                    <a:spcPct val="150000"/>
+                  </a:lnSpc>
+                </a:pPr>
+                <a:r>
+                  <a:rPr lang="en-US" sz="1000" b="0" i="0" baseline="0" dirty="0">
+                    <a:latin typeface="Calibri"/>
+                  </a:rPr>
+                  <a:t>Slide 20 — Sketch A: </a:t>
+                </a:r>
+                <a14:m>
+                  <m:oMath xmlns:m="http://schemas.openxmlformats.org/officeDocument/2006/math">
+                    <m:r>
+                      <a:rPr lang="en-US" sz="1000" b="0" i="0" baseline="0" dirty="0" smtClean="0">
+                        <a:latin typeface="Cambria Math" panose="02040503050406030204" pitchFamily="18" charset="0"/>
+                      </a:rPr>
+                      <m:t>𝑇</m:t>
+                    </m:r>
                     <m:sSub>
                       <m:sSubPr>
                         <m:ctrlPr>
-                          <a:rPr lang="en-US" sz="1400" b="0" i="1" baseline="0" dirty="0">
+                          <a:rPr lang="en-US" sz="1000" b="0" i="0" baseline="0" dirty="0" err="1" smtClean="0">
                             <a:latin typeface="Cambria Math" panose="02040503050406030204" pitchFamily="18" charset="0"/>
                           </a:rPr>
                         </m:ctrlPr>
                       </m:sSubPr>
                       <m:e>
-                        <m:acc>
-                          <m:accPr>
-                            <m:chr m:val="ˆ"/>
-                            <m:ctrlPr>
-                              <a:rPr lang="en-US" sz="1400" b="0" i="0" baseline="0" dirty="0">
-                                <a:latin typeface="Cambria Math" panose="02040503050406030204" pitchFamily="18" charset="0"/>
-                              </a:rPr>
-                            </m:ctrlPr>
-                          </m:accPr>
-                          <m:e>
-                            <m:r>
-                              <a:rPr lang="en-US" sz="1400" b="0" i="0" baseline="0" dirty="0">
-                                <a:latin typeface="Cambria Math" panose="02040503050406030204" pitchFamily="18" charset="0"/>
-                              </a:rPr>
-                              <m:t>𝑇</m:t>
-                            </m:r>
-                          </m:e>
-                        </m:acc>
+                        <m:r>
+                          <a:rPr lang="en-US" sz="1000" b="0" i="0" baseline="0" dirty="0" err="1" smtClean="0">
+                            <a:latin typeface="Cambria Math" panose="02040503050406030204" pitchFamily="18" charset="0"/>
+                          </a:rPr>
+                          <m:t>̂</m:t>
+                        </m:r>
                       </m:e>
                       <m:sub>
                         <m:r>
-                          <a:rPr lang="en-US" sz="1400" b="0" i="0" baseline="0" dirty="0">
+                          <a:rPr lang="en-US" sz="1000" b="0" i="0" baseline="0" dirty="0" err="1" smtClean="0">
                             <a:latin typeface="Cambria Math" panose="02040503050406030204" pitchFamily="18" charset="0"/>
                           </a:rPr>
                           <m:t>𝑗</m:t>
@@ -6121,7 +6564,7 @@
                   </m:oMath>
                 </a14:m>
                 <a:r>
-                  <a:rPr sz="1400" b="0" i="0" baseline="0" dirty="0">
+                  <a:rPr lang="en-US" sz="1000" b="0" i="0" baseline="0" dirty="0">
                     <a:latin typeface="Calibri"/>
                   </a:rPr>
                   <a:t> vs </a:t>
@@ -6131,14 +6574,14 @@
                     <m:sSub>
                       <m:sSubPr>
                         <m:ctrlPr>
-                          <a:rPr lang="en-US" sz="1400" b="0" i="0" baseline="0" dirty="0">
+                          <a:rPr lang="en-US" sz="1000" b="0" i="0" baseline="0" dirty="0" smtClean="0">
                             <a:latin typeface="Cambria Math" panose="02040503050406030204" pitchFamily="18" charset="0"/>
                           </a:rPr>
                         </m:ctrlPr>
                       </m:sSubPr>
                       <m:e>
                         <m:r>
-                          <a:rPr lang="en-US" sz="1400" b="0" i="0" baseline="0" dirty="0">
+                          <a:rPr lang="en-US" sz="1000" b="0" i="0" baseline="0" dirty="0" smtClean="0">
                             <a:latin typeface="Cambria Math" panose="02040503050406030204" pitchFamily="18" charset="0"/>
                           </a:rPr>
                           <m:t>𝐿</m:t>
@@ -6146,7 +6589,7 @@
                       </m:e>
                       <m:sub>
                         <m:r>
-                          <a:rPr lang="en-US" sz="1400" b="0" i="0" baseline="0" dirty="0">
+                          <a:rPr lang="en-US" sz="1000" b="0" i="0" baseline="0" dirty="0" smtClean="0">
                             <a:latin typeface="Cambria Math" panose="02040503050406030204" pitchFamily="18" charset="0"/>
                           </a:rPr>
                           <m:t>𝐶</m:t>
@@ -6155,38 +6598,71 @@
                     </m:sSub>
                   </m:oMath>
                 </a14:m>
-                <a:endParaRPr sz="1400" b="0" i="0" baseline="0" dirty="0">
+                <a:endParaRPr lang="en-US" sz="1000" b="0" i="0" baseline="0" dirty="0">
                   <a:latin typeface="Calibri"/>
                 </a:endParaRPr>
+              </a:p>
+              <a:p>
+                <a:pPr lvl="1">
+                  <a:lnSpc>
+                    <a:spcPct val="150000"/>
+                  </a:lnSpc>
+                </a:pPr>
+                <a:r>
+                  <a:rPr lang="en-US" sz="1000" b="0" i="0" baseline="0" dirty="0">
+                    <a:latin typeface="Calibri"/>
+                  </a:rPr>
+                  <a:t>Slide 21 — </a:t>
+                </a:r>
+                <a:r>
+                  <a:rPr lang="el-GR" sz="1000" b="0" i="0" baseline="0" dirty="0">
+                    <a:latin typeface="Calibri"/>
+                  </a:rPr>
+                  <a:t>γ </a:t>
+                </a:r>
+                <a:r>
+                  <a:rPr lang="en-US" sz="1000" b="0" i="0" baseline="0" dirty="0">
+                    <a:latin typeface="Calibri"/>
+                  </a:rPr>
+                  <a:t>sweep on real rosters</a:t>
+                </a:r>
               </a:p>
               <a:p>
                 <a:pPr>
                   <a:lnSpc>
                     <a:spcPct val="150000"/>
                   </a:lnSpc>
-                  <a:buChar char="•"/>
                 </a:pPr>
                 <a:r>
-                  <a:rPr sz="1400" b="0" i="0" baseline="0" dirty="0">
-                    <a:latin typeface="Calibri"/>
-                  </a:rPr>
-                  <a:t>  Slide 6 — </a:t>
-                </a:r>
-                <a14:m>
-                  <m:oMath xmlns:m="http://schemas.openxmlformats.org/officeDocument/2006/math">
-                    <m:r>
-                      <a:rPr lang="en-US" sz="1400" b="0" i="0" baseline="0" dirty="0" smtClean="0">
-                        <a:latin typeface="Cambria Math" panose="02040503050406030204" pitchFamily="18" charset="0"/>
-                      </a:rPr>
-                      <m:t>𝛾</m:t>
-                    </m:r>
-                  </m:oMath>
-                </a14:m>
-                <a:r>
-                  <a:rPr sz="1400" b="0" i="0" baseline="0" dirty="0">
-                    <a:latin typeface="Calibri"/>
-                  </a:rPr>
-                  <a:t> sweep on real rosters</a:t>
+                  <a:rPr lang="en-US" sz="1000" b="0" i="0" baseline="0" dirty="0">
+                    <a:latin typeface="Calibri"/>
+                  </a:rPr>
+                  <a:t>Appendix</a:t>
+                </a:r>
+              </a:p>
+              <a:p>
+                <a:pPr lvl="1">
+                  <a:lnSpc>
+                    <a:spcPct val="150000"/>
+                  </a:lnSpc>
+                </a:pPr>
+                <a:r>
+                  <a:rPr lang="en-US" sz="1000" b="0" i="0" baseline="0" dirty="0">
+                    <a:latin typeface="Calibri"/>
+                  </a:rPr>
+                  <a:t>Slide 22 — 539 </a:t>
+                </a:r>
+                <a:r>
+                  <a:rPr lang="el-GR" sz="1000" b="0" i="0" baseline="0" dirty="0">
+                    <a:latin typeface="Calibri"/>
+                  </a:rPr>
+                  <a:t>ρ </a:t>
+                </a:r>
+                <a:r>
+                  <a:rPr lang="en-US" sz="1000" b="0" i="0" baseline="0" dirty="0">
+                    <a:latin typeface="Calibri"/>
+                  </a:rPr>
+                  <a:t>calibration capstone (legacy sim axes)</a:t>
                 </a:r>
               </a:p>
               <a:p>
@@ -6194,44 +6670,15 @@
                   <a:lnSpc>
                     <a:spcPct val="150000"/>
                   </a:lnSpc>
-                  <a:buChar char="•"/>
                 </a:pPr>
-                <a:r>
-                  <a:rPr sz="1400" b="0" i="0" baseline="0" dirty="0">
-                    <a:latin typeface="Calibri"/>
-                  </a:rPr>
-                  <a:t>  Slide 7 — sim </a:t>
-                </a:r>
-                <a14:m>
-                  <m:oMath xmlns:m="http://schemas.openxmlformats.org/officeDocument/2006/math">
-                    <m:r>
-                      <a:rPr lang="en-US" sz="1400" b="0" i="0" baseline="0" dirty="0" smtClean="0">
-                        <a:latin typeface="Cambria Math" panose="02040503050406030204" pitchFamily="18" charset="0"/>
-                      </a:rPr>
-                      <m:t>𝜌</m:t>
-                    </m:r>
-                  </m:oMath>
-                </a14:m>
-                <a:r>
-                  <a:rPr sz="1400" b="0" i="0" baseline="0" dirty="0">
-                    <a:latin typeface="Calibri"/>
-                  </a:rPr>
-                  <a:t> </a:t>
-                </a:r>
-                <a:r>
-                  <a:rPr lang="en-US" sz="1400" dirty="0">
-                    <a:latin typeface="Calibri"/>
-                  </a:rPr>
-                  <a:t>calibration capstone</a:t>
-                </a:r>
-                <a:endParaRPr sz="1400" b="0" i="0" baseline="0" dirty="0">
+                <a:endParaRPr sz="1000" b="0" i="0" baseline="0" dirty="0">
                   <a:latin typeface="Calibri"/>
                 </a:endParaRPr>
               </a:p>
             </p:txBody>
           </p:sp>
         </mc:Choice>
-        <mc:Fallback xmlns="">
+        <mc:Fallback>
           <p:sp>
             <p:nvSpPr>
               <p:cNvPr id="10" name="TextBox 9">
@@ -6248,8 +6695,8 @@
             </p:nvSpPr>
             <p:spPr>
               <a:xfrm>
-                <a:off x="6830873" y="1810402"/>
-                <a:ext cx="5361127" cy="2097754"/>
+                <a:off x="6984337" y="1264044"/>
+                <a:ext cx="4411913" cy="5146794"/>
               </a:xfrm>
               <a:prstGeom prst="rect">
                 <a:avLst/>
@@ -6257,7 +6704,7 @@
               <a:blipFill>
                 <a:blip r:embed="rId4"/>
                 <a:stretch>
-                  <a:fillRect l="-473" b="-2410"/>
+                  <a:fillRect/>
                 </a:stretch>
               </a:blipFill>
             </p:spPr>
@@ -6857,8 +7304,8 @@
         </p:blipFill>
         <p:spPr>
           <a:xfrm>
-            <a:off x="1446967" y="2512541"/>
-            <a:ext cx="9298066" cy="3632226"/>
+            <a:off x="1446968" y="2512541"/>
+            <a:ext cx="9298063" cy="3632226"/>
           </a:xfrm>
           <a:prstGeom prst="rect">
             <a:avLst/>
@@ -8494,8 +8941,8 @@
         </p:blipFill>
         <p:spPr>
           <a:xfrm>
-            <a:off x="2837341" y="2512541"/>
-            <a:ext cx="6517318" cy="3632226"/>
+            <a:off x="2837342" y="2512541"/>
+            <a:ext cx="6517316" cy="3632226"/>
           </a:xfrm>
           <a:prstGeom prst="rect">
             <a:avLst/>
@@ -10450,7 +10897,7 @@
       </p:sp>
       <p:pic>
         <p:nvPicPr>
-          <p:cNvPr id="4" name="Picture 3" descr="HERO_min_minutes_sensitivity_compare_2011_2021.png"/>
+          <p:cNvPr id="4" name="Picture 3"/>
           <p:cNvPicPr>
             <a:picLocks noChangeAspect="1"/>
           </p:cNvPicPr>
@@ -10458,14 +10905,13 @@
         </p:nvPicPr>
         <p:blipFill>
           <a:blip r:embed="rId2"/>
-          <a:stretch>
-            <a:fillRect/>
-          </a:stretch>
+          <a:srcRect/>
+          <a:stretch/>
         </p:blipFill>
         <p:spPr>
           <a:xfrm>
-            <a:off x="468988" y="1220692"/>
-            <a:ext cx="11276037" cy="3219105"/>
+            <a:off x="468988" y="1299994"/>
+            <a:ext cx="11276037" cy="3060501"/>
           </a:xfrm>
           <a:prstGeom prst="rect">
             <a:avLst/>
@@ -13115,8 +13561,8 @@
           </a:prstGeom>
         </p:spPr>
       </p:pic>
-      <mc:AlternateContent xmlns:mc="http://schemas.openxmlformats.org/markup-compatibility/2006" xmlns:a14="http://schemas.microsoft.com/office/drawing/2010/main">
-        <mc:Choice Requires="a14">
+      <mc:AlternateContent xmlns:mc="http://schemas.openxmlformats.org/markup-compatibility/2006">
+        <mc:Choice xmlns:a14="http://schemas.microsoft.com/office/drawing/2010/main" Requires="a14">
           <p:sp>
             <p:nvSpPr>
               <p:cNvPr id="5" name="TextBox 4"/>
@@ -13416,7 +13862,7 @@
                   <a:rPr sz="1000" b="0" i="0" baseline="0" dirty="0">
                     <a:latin typeface="Calibri"/>
                   </a:rPr>
-                  <a:t>  Next lever: </a:t>
+                  <a:t>  </a:t>
                 </a:r>
                 <a14:m>
                   <m:oMath xmlns:m="http://schemas.openxmlformats.org/officeDocument/2006/math">
@@ -13432,45 +13878,47 @@
                   <a:rPr sz="1000" b="0" i="0" baseline="0" dirty="0">
                     <a:latin typeface="Calibri"/>
                   </a:rPr>
-                  <a:t> sweep on SELECT — not </a:t>
-                </a:r>
-                <a14:m>
-                  <m:oMath xmlns:m="http://schemas.openxmlformats.org/officeDocument/2006/math">
-                    <m:r>
-                      <a:rPr lang="en-US" sz="1000" b="0" i="0" baseline="0" dirty="0" smtClean="0">
-                        <a:latin typeface="Cambria Math" panose="02040503050406030204" pitchFamily="18" charset="0"/>
-                      </a:rPr>
-                      <m:t>𝜌</m:t>
-                    </m:r>
-                  </m:oMath>
-                </a14:m>
-                <a:r>
-                  <a:rPr sz="1000" b="0" i="0" baseline="0" dirty="0">
-                    <a:latin typeface="Calibri"/>
-                  </a:rPr>
-                  <a:t> or </a:t>
-                </a:r>
-                <a14:m>
-                  <m:oMath xmlns:m="http://schemas.openxmlformats.org/officeDocument/2006/math">
-                    <m:r>
-                      <a:rPr lang="en-US" sz="1000" b="0" i="0" baseline="0" dirty="0" smtClean="0">
-                        <a:latin typeface="Cambria Math" panose="02040503050406030204" pitchFamily="18" charset="0"/>
-                      </a:rPr>
-                      <m:t>𝐶</m:t>
-                    </m:r>
-                  </m:oMath>
-                </a14:m>
-                <a:r>
-                  <a:rPr sz="1000" b="0" i="0" baseline="0" dirty="0">
-                    <a:latin typeface="Calibri"/>
-                  </a:rPr>
-                  <a:t> alone.</a:t>
+                  <a:t> sweep </a:t>
+                </a:r>
+                <a:r>
+                  <a:rPr lang="en-US" sz="1000" b="0" i="0" baseline="0" dirty="0">
+                    <a:latin typeface="Calibri"/>
+                  </a:rPr>
+                  <a:t>results</a:t>
+                </a:r>
+                <a:r>
+                  <a:rPr sz="1000" b="0" i="0" baseline="0" dirty="0">
+                    <a:latin typeface="Calibri"/>
+                  </a:rPr>
+                  <a:t> </a:t>
+                </a:r>
+                <a14:m>
+                  <m:oMath xmlns:m="http://schemas.openxmlformats.org/officeDocument/2006/math">
+                    <m:r>
+                      <a:rPr lang="en-US" sz="1000" b="0" i="0" baseline="0" dirty="0" smtClean="0">
+                        <a:latin typeface="Cambria Math" panose="02040503050406030204" pitchFamily="18" charset="0"/>
+                      </a:rPr>
+                      <m:t>→</m:t>
+                    </m:r>
+                  </m:oMath>
+                </a14:m>
+                <a:r>
+                  <a:rPr lang="en-US" sz="1000" b="0" i="0" dirty="0">
+                    <a:latin typeface="Calibri"/>
+                  </a:rPr>
+                  <a:t> slides 20-21</a:t>
+                </a:r>
+                <a:r>
+                  <a:rPr sz="1000" b="0" i="0" baseline="0" dirty="0">
+                    <a:latin typeface="Calibri"/>
+                  </a:rPr>
+                  <a:t>.</a:t>
                 </a:r>
               </a:p>
             </p:txBody>
           </p:sp>
         </mc:Choice>
-        <mc:Fallback xmlns="">
+        <mc:Fallback>
           <p:sp>
             <p:nvSpPr>
               <p:cNvPr id="5" name="TextBox 4"/>
@@ -15206,10 +15654,22 @@
           <a:p>
             <a:pPr algn="l"/>
             <a:r>
-              <a:rPr sz="1100" b="1" i="0" baseline="0">
+              <a:rPr sz="1100" b="1" i="0" baseline="0" dirty="0">
                 <a:latin typeface="Calibri"/>
               </a:rPr>
-              <a:t>Talking point: input fix necessary but not sufficient — λ sweep on SELECT is the next experiment.</a:t>
+              <a:t>Talking point: input fix necessary but not sufficient — </a:t>
+            </a:r>
+            <a:r>
+              <a:rPr sz="1100" b="1" i="0" baseline="0" dirty="0" err="1">
+                <a:latin typeface="Calibri"/>
+              </a:rPr>
+              <a:t>λ</a:t>
+            </a:r>
+            <a:r>
+              <a:rPr sz="1100" b="1" i="0" baseline="0" dirty="0">
+                <a:latin typeface="Calibri"/>
+              </a:rPr>
+              <a:t> sweep on SELECT is the next experiment.</a:t>
             </a:r>
           </a:p>
         </p:txBody>
@@ -16300,6 +16760,1245 @@
   <p:cSld>
     <p:spTree>
       <p:nvGrpSpPr>
+        <p:cNvPr id="1" name="">
+          <a:extLst>
+            <a:ext uri="{FF2B5EF4-FFF2-40B4-BE49-F238E27FC236}">
+              <a16:creationId xmlns:a16="http://schemas.microsoft.com/office/drawing/2014/main" id="{060D0B08-25AB-28A6-6B02-75E11D8C99B6}"/>
+            </a:ext>
+          </a:extLst>
+        </p:cNvPr>
+        <p:cNvGrpSpPr/>
+        <p:nvPr/>
+      </p:nvGrpSpPr>
+      <p:grpSpPr>
+        <a:xfrm>
+          <a:off x="0" y="0"/>
+          <a:ext cx="0" cy="0"/>
+          <a:chOff x="0" y="0"/>
+          <a:chExt cx="0" cy="0"/>
+        </a:xfrm>
+      </p:grpSpPr>
+      <mc:AlternateContent xmlns:mc="http://schemas.openxmlformats.org/markup-compatibility/2006">
+        <mc:Choice xmlns:a14="http://schemas.microsoft.com/office/drawing/2010/main" Requires="a14">
+          <p:sp>
+            <p:nvSpPr>
+              <p:cNvPr id="2" name="TextBox 1">
+                <a:extLst>
+                  <a:ext uri="{FF2B5EF4-FFF2-40B4-BE49-F238E27FC236}">
+                    <a16:creationId xmlns:a16="http://schemas.microsoft.com/office/drawing/2014/main" id="{DFB3D7A0-2FEA-AECB-A855-14F9CFCF07B2}"/>
+                  </a:ext>
+                </a:extLst>
+              </p:cNvPr>
+              <p:cNvSpPr txBox="1"/>
+              <p:nvPr/>
+            </p:nvSpPr>
+            <p:spPr>
+              <a:xfrm>
+                <a:off x="384048" y="219456"/>
+                <a:ext cx="3583032" cy="400110"/>
+              </a:xfrm>
+              <a:prstGeom prst="rect">
+                <a:avLst/>
+              </a:prstGeom>
+              <a:noFill/>
+            </p:spPr>
+            <p:txBody>
+              <a:bodyPr wrap="none">
+                <a:spAutoFit/>
+              </a:bodyPr>
+              <a:lstStyle/>
+              <a:p>
+                <a:r>
+                  <a:rPr lang="en-US" sz="2000" b="1" i="0" baseline="0" dirty="0">
+                    <a:latin typeface="Calibri"/>
+                  </a:rPr>
+                  <a:t>LG SELECT</a:t>
+                </a:r>
+                <a:r>
+                  <a:rPr sz="2000" b="1" i="0" baseline="0" dirty="0">
+                    <a:latin typeface="Calibri"/>
+                  </a:rPr>
+                  <a:t> —</a:t>
+                </a:r>
+                <a:r>
+                  <a:rPr lang="en-US" sz="2000" b="1" i="0" baseline="0" dirty="0">
+                    <a:latin typeface="Calibri"/>
+                  </a:rPr>
+                  <a:t> </a:t>
+                </a:r>
+                <a14:m>
+                  <m:oMath xmlns:m="http://schemas.openxmlformats.org/officeDocument/2006/math">
+                    <m:r>
+                      <a:rPr lang="en-US" sz="2000" b="1" i="0" baseline="0" dirty="0" smtClean="0">
+                        <a:latin typeface="Cambria Math" panose="02040503050406030204" pitchFamily="18" charset="0"/>
+                      </a:rPr>
+                      <m:t>𝜆</m:t>
+                    </m:r>
+                  </m:oMath>
+                </a14:m>
+                <a:r>
+                  <a:rPr lang="en-US" sz="2000" b="1" i="0" baseline="0" dirty="0">
+                    <a:latin typeface="Calibri"/>
+                  </a:rPr>
+                  <a:t> sweep (fine grid)</a:t>
+                </a:r>
+                <a:endParaRPr sz="2000" b="1" i="0" baseline="0" dirty="0">
+                  <a:latin typeface="Calibri"/>
+                </a:endParaRPr>
+              </a:p>
+            </p:txBody>
+          </p:sp>
+        </mc:Choice>
+        <mc:Fallback>
+          <p:sp>
+            <p:nvSpPr>
+              <p:cNvPr id="2" name="TextBox 1">
+                <a:extLst>
+                  <a:ext uri="{FF2B5EF4-FFF2-40B4-BE49-F238E27FC236}">
+                    <a16:creationId xmlns:a16="http://schemas.microsoft.com/office/drawing/2014/main" id="{DFB3D7A0-2FEA-AECB-A855-14F9CFCF07B2}"/>
+                  </a:ext>
+                </a:extLst>
+              </p:cNvPr>
+              <p:cNvSpPr txBox="1">
+                <a:spLocks noRot="1" noChangeAspect="1" noMove="1" noResize="1" noEditPoints="1" noAdjustHandles="1" noChangeArrowheads="1" noChangeShapeType="1" noTextEdit="1"/>
+              </p:cNvSpPr>
+              <p:nvPr/>
+            </p:nvSpPr>
+            <p:spPr>
+              <a:xfrm>
+                <a:off x="384048" y="219456"/>
+                <a:ext cx="3583032" cy="400110"/>
+              </a:xfrm>
+              <a:prstGeom prst="rect">
+                <a:avLst/>
+              </a:prstGeom>
+              <a:blipFill>
+                <a:blip r:embed="rId2"/>
+                <a:stretch>
+                  <a:fillRect l="-1767" t="-9375" r="-707" b="-28125"/>
+                </a:stretch>
+              </a:blipFill>
+            </p:spPr>
+            <p:txBody>
+              <a:bodyPr/>
+              <a:lstStyle/>
+              <a:p>
+                <a:r>
+                  <a:rPr lang="en-US">
+                    <a:noFill/>
+                  </a:rPr>
+                  <a:t> </a:t>
+                </a:r>
+              </a:p>
+            </p:txBody>
+          </p:sp>
+        </mc:Fallback>
+      </mc:AlternateContent>
+      <mc:AlternateContent xmlns:mc="http://schemas.openxmlformats.org/markup-compatibility/2006">
+        <mc:Choice xmlns:a14="http://schemas.microsoft.com/office/drawing/2010/main" Requires="a14">
+          <p:sp>
+            <p:nvSpPr>
+              <p:cNvPr id="3" name="TextBox 2">
+                <a:extLst>
+                  <a:ext uri="{FF2B5EF4-FFF2-40B4-BE49-F238E27FC236}">
+                    <a16:creationId xmlns:a16="http://schemas.microsoft.com/office/drawing/2014/main" id="{26E7036D-B0DA-5719-C998-F91385FF4F46}"/>
+                  </a:ext>
+                </a:extLst>
+              </p:cNvPr>
+              <p:cNvSpPr txBox="1"/>
+              <p:nvPr/>
+            </p:nvSpPr>
+            <p:spPr>
+              <a:xfrm>
+                <a:off x="384048" y="713232"/>
+                <a:ext cx="4731039" cy="246221"/>
+              </a:xfrm>
+              <a:prstGeom prst="rect">
+                <a:avLst/>
+              </a:prstGeom>
+              <a:noFill/>
+            </p:spPr>
+            <p:txBody>
+              <a:bodyPr wrap="none">
+                <a:spAutoFit/>
+              </a:bodyPr>
+              <a:lstStyle/>
+              <a:p>
+                <a:r>
+                  <a:rPr sz="1000" b="0" i="0" baseline="0" dirty="0">
+                    <a:latin typeface="Calibri"/>
+                  </a:rPr>
+                  <a:t>MBB 2011-2021 · </a:t>
+                </a:r>
+                <a:r>
+                  <a:rPr lang="en-US" sz="1000" b="0" i="0" baseline="0" dirty="0">
+                    <a:latin typeface="Calibri"/>
+                  </a:rPr>
+                  <a:t>empirical roster caps </a:t>
+                </a:r>
+                <a:r>
+                  <a:rPr sz="1000" b="0" i="0" baseline="0" dirty="0">
+                    <a:latin typeface="Calibri"/>
+                  </a:rPr>
+                  <a:t>·</a:t>
+                </a:r>
+                <a:r>
+                  <a:rPr lang="en-US" sz="1000" dirty="0"/>
+                  <a:t> </a:t>
+                </a:r>
+                <a14:m>
+                  <m:oMath xmlns:m="http://schemas.openxmlformats.org/officeDocument/2006/math">
+                    <m:r>
+                      <a:rPr lang="en-US" sz="1000" i="1" dirty="0" smtClean="0">
+                        <a:latin typeface="Cambria Math" panose="02040503050406030204" pitchFamily="18" charset="0"/>
+                      </a:rPr>
+                      <m:t>𝜌</m:t>
+                    </m:r>
+                    <m:r>
+                      <a:rPr lang="en-US" sz="1000" i="0" dirty="0">
+                        <a:latin typeface="Cambria Math" panose="02040503050406030204" pitchFamily="18" charset="0"/>
+                      </a:rPr>
+                      <m:t>=0.5</m:t>
+                    </m:r>
+                  </m:oMath>
+                </a14:m>
+                <a:r>
+                  <a:rPr lang="en-US" sz="1000" dirty="0"/>
+                  <a:t> · </a:t>
+                </a:r>
+                <a14:m>
+                  <m:oMath xmlns:m="http://schemas.openxmlformats.org/officeDocument/2006/math">
+                    <m:r>
+                      <a:rPr lang="en-US" sz="1000" i="1" dirty="0" smtClean="0">
+                        <a:latin typeface="Cambria Math" panose="02040503050406030204" pitchFamily="18" charset="0"/>
+                      </a:rPr>
+                      <m:t>𝑆</m:t>
+                    </m:r>
+                    <m:r>
+                      <a:rPr lang="en-US" sz="1000" i="0" dirty="0" smtClean="0">
+                        <a:latin typeface="Cambria Math" panose="02040503050406030204" pitchFamily="18" charset="0"/>
+                      </a:rPr>
+                      <m:t>=</m:t>
+                    </m:r>
+                    <m:r>
+                      <a:rPr lang="en-US" sz="1000" i="1" dirty="0" smtClean="0">
+                        <a:latin typeface="Cambria Math" panose="02040503050406030204" pitchFamily="18" charset="0"/>
+                      </a:rPr>
+                      <m:t>𝐴</m:t>
+                    </m:r>
+                    <m:r>
+                      <a:rPr lang="en-US" sz="1000" i="0" dirty="0" smtClean="0">
+                        <a:latin typeface="Cambria Math" panose="02040503050406030204" pitchFamily="18" charset="0"/>
+                      </a:rPr>
+                      <m:t>−</m:t>
+                    </m:r>
+                    <m:r>
+                      <a:rPr lang="en-US" sz="1000" i="1" dirty="0" smtClean="0">
+                        <a:latin typeface="Cambria Math" panose="02040503050406030204" pitchFamily="18" charset="0"/>
+                      </a:rPr>
+                      <m:t>𝜆</m:t>
+                    </m:r>
+                    <m:r>
+                      <a:rPr lang="en-US" sz="1000" i="1" dirty="0" smtClean="0">
+                        <a:latin typeface="Cambria Math" panose="02040503050406030204" pitchFamily="18" charset="0"/>
+                      </a:rPr>
+                      <m:t>𝐶</m:t>
+                    </m:r>
+                  </m:oMath>
+                </a14:m>
+                <a:r>
+                  <a:rPr lang="en-US" sz="1000" dirty="0"/>
+                  <a:t>  · </a:t>
+                </a:r>
+                <a14:m>
+                  <m:oMath xmlns:m="http://schemas.openxmlformats.org/officeDocument/2006/math">
+                    <m:r>
+                      <a:rPr lang="en-US" sz="1000" i="1" dirty="0" smtClean="0">
+                        <a:latin typeface="Cambria Math" panose="02040503050406030204" pitchFamily="18" charset="0"/>
+                      </a:rPr>
+                      <m:t>𝜆</m:t>
+                    </m:r>
+                    <m:r>
+                      <a:rPr lang="en-US" sz="1000" i="0" dirty="0" smtClean="0">
+                        <a:latin typeface="Cambria Math" panose="02040503050406030204" pitchFamily="18" charset="0"/>
+                      </a:rPr>
+                      <m:t>∈1.25,1.5,1.75,2,3,4</m:t>
+                    </m:r>
+                  </m:oMath>
+                </a14:m>
+                <a:r>
+                  <a:rPr sz="1000" b="0" i="0" baseline="0" dirty="0">
+                    <a:latin typeface="Calibri"/>
+                  </a:rPr>
+                  <a:t> </a:t>
+                </a:r>
+              </a:p>
+            </p:txBody>
+          </p:sp>
+        </mc:Choice>
+        <mc:Fallback>
+          <p:sp>
+            <p:nvSpPr>
+              <p:cNvPr id="3" name="TextBox 2">
+                <a:extLst>
+                  <a:ext uri="{FF2B5EF4-FFF2-40B4-BE49-F238E27FC236}">
+                    <a16:creationId xmlns:a16="http://schemas.microsoft.com/office/drawing/2014/main" id="{26E7036D-B0DA-5719-C998-F91385FF4F46}"/>
+                  </a:ext>
+                </a:extLst>
+              </p:cNvPr>
+              <p:cNvSpPr txBox="1">
+                <a:spLocks noRot="1" noChangeAspect="1" noMove="1" noResize="1" noEditPoints="1" noAdjustHandles="1" noChangeArrowheads="1" noChangeShapeType="1" noTextEdit="1"/>
+              </p:cNvSpPr>
+              <p:nvPr/>
+            </p:nvSpPr>
+            <p:spPr>
+              <a:xfrm>
+                <a:off x="384048" y="713232"/>
+                <a:ext cx="4731039" cy="246221"/>
+              </a:xfrm>
+              <a:prstGeom prst="rect">
+                <a:avLst/>
+              </a:prstGeom>
+              <a:blipFill>
+                <a:blip r:embed="rId3"/>
+                <a:stretch>
+                  <a:fillRect b="-10000"/>
+                </a:stretch>
+              </a:blipFill>
+            </p:spPr>
+            <p:txBody>
+              <a:bodyPr/>
+              <a:lstStyle/>
+              <a:p>
+                <a:r>
+                  <a:rPr lang="en-US">
+                    <a:noFill/>
+                  </a:rPr>
+                  <a:t> </a:t>
+                </a:r>
+              </a:p>
+            </p:txBody>
+          </p:sp>
+        </mc:Fallback>
+      </mc:AlternateContent>
+      <p:pic>
+        <p:nvPicPr>
+          <p:cNvPr id="4" name="Picture 3">
+            <a:extLst>
+              <a:ext uri="{FF2B5EF4-FFF2-40B4-BE49-F238E27FC236}">
+                <a16:creationId xmlns:a16="http://schemas.microsoft.com/office/drawing/2014/main" id="{85BDFB24-FF5C-AE7A-51B7-E57D35A66025}"/>
+              </a:ext>
+            </a:extLst>
+          </p:cNvPr>
+          <p:cNvPicPr>
+            <a:picLocks noChangeAspect="1"/>
+          </p:cNvPicPr>
+          <p:nvPr/>
+        </p:nvPicPr>
+        <p:blipFill>
+          <a:blip r:embed="rId4"/>
+          <a:srcRect/>
+          <a:stretch/>
+        </p:blipFill>
+        <p:spPr>
+          <a:xfrm>
+            <a:off x="941171" y="998593"/>
+            <a:ext cx="10309658" cy="4290655"/>
+          </a:xfrm>
+          <a:prstGeom prst="rect">
+            <a:avLst/>
+          </a:prstGeom>
+        </p:spPr>
+      </p:pic>
+      <p:sp>
+        <p:nvSpPr>
+          <p:cNvPr id="5" name="TextBox 4">
+            <a:extLst>
+              <a:ext uri="{FF2B5EF4-FFF2-40B4-BE49-F238E27FC236}">
+                <a16:creationId xmlns:a16="http://schemas.microsoft.com/office/drawing/2014/main" id="{3818CC3E-9B9F-BB17-98F7-9CE5AC576F40}"/>
+              </a:ext>
+            </a:extLst>
+          </p:cNvPr>
+          <p:cNvSpPr txBox="1"/>
+          <p:nvPr/>
+        </p:nvSpPr>
+        <p:spPr>
+          <a:xfrm>
+            <a:off x="384048" y="5395296"/>
+            <a:ext cx="11160252" cy="545107"/>
+          </a:xfrm>
+          <a:prstGeom prst="rect">
+            <a:avLst/>
+          </a:prstGeom>
+          <a:noFill/>
+        </p:spPr>
+        <p:txBody>
+          <a:bodyPr wrap="square" numCol="2">
+            <a:noAutofit/>
+          </a:bodyPr>
+          <a:lstStyle/>
+          <a:p>
+            <a:pPr marL="171450" indent="-171450">
+              <a:buFont typeface="Arial" panose="020B0604020202020204" pitchFamily="34" charset="0"/>
+              <a:buChar char="•"/>
+            </a:pPr>
+            <a:r>
+              <a:rPr lang="en-US" sz="1000" b="0" i="0" baseline="0" dirty="0">
+                <a:latin typeface="Calibri"/>
+              </a:rPr>
+              <a:t>Empirical NCAA (dashed): inverted-U on LOO; peak bin 11 (~2.6% draft rate).</a:t>
+            </a:r>
+          </a:p>
+          <a:p>
+            <a:pPr marL="171450" indent="-171450">
+              <a:buFont typeface="Arial" panose="020B0604020202020204" pitchFamily="34" charset="0"/>
+              <a:buChar char="•"/>
+            </a:pPr>
+            <a:r>
+              <a:rPr lang="el-GR" sz="1000" b="1" i="0" baseline="0" dirty="0">
+                <a:latin typeface="Calibri"/>
+              </a:rPr>
+              <a:t>λ = 1.25</a:t>
+            </a:r>
+            <a:r>
+              <a:rPr lang="el-GR" sz="1000" b="0" i="0" baseline="0" dirty="0">
+                <a:latin typeface="Calibri"/>
+              </a:rPr>
+              <a:t>: </a:t>
+            </a:r>
+            <a:r>
+              <a:rPr lang="en-US" sz="1000" b="0" i="0" baseline="0" dirty="0">
+                <a:latin typeface="Calibri"/>
+              </a:rPr>
+              <a:t>still monotone ↑ on LOO — last arm before the flip.</a:t>
+            </a:r>
+          </a:p>
+          <a:p>
+            <a:pPr marL="171450" indent="-171450">
+              <a:buFont typeface="Arial" panose="020B0604020202020204" pitchFamily="34" charset="0"/>
+              <a:buChar char="•"/>
+            </a:pPr>
+            <a:r>
+              <a:rPr lang="el-GR" sz="1000" b="1" i="0" baseline="0" dirty="0">
+                <a:latin typeface="Calibri"/>
+              </a:rPr>
+              <a:t>λ = 1.5</a:t>
+            </a:r>
+            <a:r>
+              <a:rPr lang="el-GR" sz="1000" b="0" i="0" baseline="0" dirty="0">
+                <a:latin typeface="Calibri"/>
+              </a:rPr>
+              <a:t>: </a:t>
+            </a:r>
+            <a:r>
+              <a:rPr lang="en-US" sz="1000" b="0" i="0" baseline="0" dirty="0">
+                <a:latin typeface="Calibri"/>
+              </a:rPr>
+              <a:t>first inverted-U-like LOO curve.</a:t>
+            </a:r>
+          </a:p>
+          <a:p>
+            <a:pPr marL="171450" indent="-171450">
+              <a:buFont typeface="Arial" panose="020B0604020202020204" pitchFamily="34" charset="0"/>
+              <a:buChar char="•"/>
+            </a:pPr>
+            <a:r>
+              <a:rPr lang="el-GR" sz="1000" b="1" i="0" baseline="0" dirty="0">
+                <a:latin typeface="Calibri"/>
+              </a:rPr>
+              <a:t>λ = 2, 3</a:t>
+            </a:r>
+            <a:r>
+              <a:rPr lang="el-GR" sz="1000" b="0" i="0" baseline="0" dirty="0">
+                <a:latin typeface="Calibri"/>
+              </a:rPr>
+              <a:t>: </a:t>
+            </a:r>
+            <a:r>
+              <a:rPr lang="en-US" sz="1000" b="0" i="0" baseline="0" dirty="0">
+                <a:latin typeface="Calibri"/>
+              </a:rPr>
+              <a:t>inverted-U on LOO; </a:t>
+            </a:r>
+            <a:r>
+              <a:rPr lang="en-US" sz="1000" b="1" i="0" baseline="0" dirty="0">
+                <a:latin typeface="Calibri"/>
+              </a:rPr>
+              <a:t>peak bin 11 matches empirical</a:t>
+            </a:r>
+            <a:r>
+              <a:rPr lang="en-US" sz="1000" b="0" i="0" baseline="0" dirty="0">
+                <a:latin typeface="Calibri"/>
+              </a:rPr>
+              <a:t>.</a:t>
+            </a:r>
+          </a:p>
+          <a:p>
+            <a:pPr marL="171450" indent="-171450">
+              <a:buFont typeface="Arial" panose="020B0604020202020204" pitchFamily="34" charset="0"/>
+              <a:buChar char="•"/>
+            </a:pPr>
+            <a:r>
+              <a:rPr lang="en-US" sz="1000" b="0" i="0" baseline="0" dirty="0">
+                <a:latin typeface="Calibri"/>
+              </a:rPr>
+              <a:t>Pool mean (right): all arms monotone ↑ at these </a:t>
+            </a:r>
+            <a:r>
+              <a:rPr lang="el-GR" sz="1000" b="0" i="0" baseline="0" dirty="0">
+                <a:latin typeface="Calibri"/>
+              </a:rPr>
+              <a:t>λ — </a:t>
+            </a:r>
+            <a:r>
+              <a:rPr lang="en-US" sz="1000" b="0" i="0" baseline="0" dirty="0">
+                <a:latin typeface="Calibri"/>
+              </a:rPr>
+              <a:t>Hero on LOO axis only here.</a:t>
+            </a:r>
+          </a:p>
+          <a:p>
+            <a:pPr marL="171450" indent="-171450">
+              <a:buFont typeface="Arial" panose="020B0604020202020204" pitchFamily="34" charset="0"/>
+              <a:buChar char="•"/>
+            </a:pPr>
+            <a:r>
+              <a:rPr lang="en-US" sz="1000" b="1" i="0" baseline="0" dirty="0">
+                <a:latin typeface="Calibri"/>
+              </a:rPr>
+              <a:t>Takeaway</a:t>
+            </a:r>
+            <a:r>
+              <a:rPr lang="en-US" sz="1000" b="0" i="0" baseline="0" dirty="0">
+                <a:latin typeface="Calibri"/>
+              </a:rPr>
+              <a:t>: with inputs fixed, curvature lives in </a:t>
+            </a:r>
+            <a:r>
+              <a:rPr lang="en-US" sz="1000" b="1" i="0" baseline="0" dirty="0">
+                <a:latin typeface="Calibri"/>
+              </a:rPr>
+              <a:t>SCORE (</a:t>
+            </a:r>
+            <a:r>
+              <a:rPr lang="el-GR" sz="1000" b="1" i="0" baseline="0" dirty="0">
+                <a:latin typeface="Calibri"/>
+              </a:rPr>
+              <a:t>λ)</a:t>
+            </a:r>
+            <a:r>
+              <a:rPr lang="el-GR" sz="1000" b="0" i="0" baseline="0" dirty="0">
+                <a:latin typeface="Calibri"/>
+              </a:rPr>
+              <a:t>, </a:t>
+            </a:r>
+            <a:r>
+              <a:rPr lang="en-US" sz="1000" b="0" i="0" baseline="0" dirty="0">
+                <a:latin typeface="Calibri"/>
+              </a:rPr>
+              <a:t>not ASSIGN (</a:t>
+            </a:r>
+            <a:r>
+              <a:rPr lang="el-GR" sz="1000" b="0" i="0" baseline="0" dirty="0">
+                <a:latin typeface="Calibri"/>
+              </a:rPr>
+              <a:t>ρ) </a:t>
+            </a:r>
+            <a:r>
+              <a:rPr lang="en-US" sz="1000" b="0" i="0" baseline="0" dirty="0">
+                <a:latin typeface="Calibri"/>
+              </a:rPr>
+              <a:t>or caps.</a:t>
+            </a:r>
+          </a:p>
+        </p:txBody>
+      </p:sp>
+      <p:sp>
+        <p:nvSpPr>
+          <p:cNvPr id="6" name="TextBox 5">
+            <a:extLst>
+              <a:ext uri="{FF2B5EF4-FFF2-40B4-BE49-F238E27FC236}">
+                <a16:creationId xmlns:a16="http://schemas.microsoft.com/office/drawing/2014/main" id="{6DBD0231-4A7A-76E8-AEE4-AF568701571A}"/>
+              </a:ext>
+            </a:extLst>
+          </p:cNvPr>
+          <p:cNvSpPr txBox="1"/>
+          <p:nvPr/>
+        </p:nvSpPr>
+        <p:spPr>
+          <a:xfrm>
+            <a:off x="384048" y="6053328"/>
+            <a:ext cx="11423599" cy="430887"/>
+          </a:xfrm>
+          <a:prstGeom prst="rect">
+            <a:avLst/>
+          </a:prstGeom>
+          <a:noFill/>
+        </p:spPr>
+        <p:txBody>
+          <a:bodyPr wrap="square">
+            <a:spAutoFit/>
+          </a:bodyPr>
+          <a:lstStyle/>
+          <a:p>
+            <a:pPr algn="l"/>
+            <a:r>
+              <a:rPr lang="en-US" sz="1100" b="1" i="0" baseline="0" dirty="0">
+                <a:latin typeface="Calibri"/>
+              </a:rPr>
+              <a:t>Talking point: </a:t>
+            </a:r>
+            <a:r>
+              <a:rPr lang="en-US" sz="1100" i="0" baseline="0" dirty="0">
+                <a:latin typeface="Calibri"/>
+              </a:rPr>
+              <a:t>With NCAA-comparable inputs fixed, LOO SELECT stays monotone at </a:t>
+            </a:r>
+            <a:r>
+              <a:rPr lang="el-GR" sz="1100" b="1" i="0" baseline="0" dirty="0">
+                <a:latin typeface="Calibri"/>
+              </a:rPr>
+              <a:t>λ = 1.25 </a:t>
+            </a:r>
+            <a:r>
+              <a:rPr lang="en-US" sz="1100" i="0" baseline="0" dirty="0">
+                <a:latin typeface="Calibri"/>
+              </a:rPr>
+              <a:t>and flips to inverted-U by </a:t>
+            </a:r>
+            <a:r>
+              <a:rPr lang="el-GR" sz="1100" b="1" i="0" baseline="0" dirty="0">
+                <a:latin typeface="Calibri"/>
+              </a:rPr>
+              <a:t>λ = 1.5; λ = 2–3 </a:t>
+            </a:r>
+            <a:r>
+              <a:rPr lang="en-US" sz="1100" i="0" baseline="0" dirty="0">
+                <a:latin typeface="Calibri"/>
+              </a:rPr>
+              <a:t>matches the </a:t>
+            </a:r>
+            <a:r>
+              <a:rPr lang="en-US" sz="1100" b="1" i="0" baseline="0" dirty="0">
+                <a:latin typeface="Calibri"/>
+              </a:rPr>
+              <a:t>empirical peak bin (11) </a:t>
+            </a:r>
+            <a:r>
+              <a:rPr lang="en-US" sz="1100" i="0" baseline="0" dirty="0">
+                <a:latin typeface="Calibri"/>
+              </a:rPr>
+              <a:t>on LOO — curvature lives in </a:t>
+            </a:r>
+            <a:r>
+              <a:rPr lang="en-US" sz="1100" b="1" i="0" baseline="0" dirty="0">
+                <a:latin typeface="Calibri"/>
+              </a:rPr>
+              <a:t>SCORE</a:t>
+            </a:r>
+            <a:r>
+              <a:rPr lang="en-US" sz="1100" i="0" baseline="0" dirty="0">
+                <a:latin typeface="Calibri"/>
+              </a:rPr>
+              <a:t>, not ASSIGN.</a:t>
+            </a:r>
+            <a:endParaRPr sz="1100" i="0" baseline="0" dirty="0">
+              <a:latin typeface="Calibri"/>
+            </a:endParaRPr>
+          </a:p>
+        </p:txBody>
+      </p:sp>
+    </p:spTree>
+    <p:extLst>
+      <p:ext uri="{BB962C8B-B14F-4D97-AF65-F5344CB8AC3E}">
+        <p14:creationId xmlns:p14="http://schemas.microsoft.com/office/powerpoint/2010/main" val="3749114398"/>
+      </p:ext>
+    </p:extLst>
+  </p:cSld>
+  <p:clrMapOvr>
+    <a:masterClrMapping/>
+  </p:clrMapOvr>
+</p:sld>
+</file>
+
+<file path=ppt/slides/slide21.xml><?xml version="1.0" encoding="utf-8"?>
+<p:sld xmlns:a="http://schemas.openxmlformats.org/drawingml/2006/main" xmlns:r="http://schemas.openxmlformats.org/officeDocument/2006/relationships" xmlns:p="http://schemas.openxmlformats.org/presentationml/2006/main">
+  <p:cSld>
+    <p:spTree>
+      <p:nvGrpSpPr>
+        <p:cNvPr id="1" name="">
+          <a:extLst>
+            <a:ext uri="{FF2B5EF4-FFF2-40B4-BE49-F238E27FC236}">
+              <a16:creationId xmlns:a16="http://schemas.microsoft.com/office/drawing/2014/main" id="{EC6948AF-6B50-211A-E7B4-8BEDBC6172FD}"/>
+            </a:ext>
+          </a:extLst>
+        </p:cNvPr>
+        <p:cNvGrpSpPr/>
+        <p:nvPr/>
+      </p:nvGrpSpPr>
+      <p:grpSpPr>
+        <a:xfrm>
+          <a:off x="0" y="0"/>
+          <a:ext cx="0" cy="0"/>
+          <a:chOff x="0" y="0"/>
+          <a:chExt cx="0" cy="0"/>
+        </a:xfrm>
+      </p:grpSpPr>
+      <mc:AlternateContent xmlns:mc="http://schemas.openxmlformats.org/markup-compatibility/2006">
+        <mc:Choice xmlns:a14="http://schemas.microsoft.com/office/drawing/2010/main" Requires="a14">
+          <p:sp>
+            <p:nvSpPr>
+              <p:cNvPr id="2" name="TextBox 1">
+                <a:extLst>
+                  <a:ext uri="{FF2B5EF4-FFF2-40B4-BE49-F238E27FC236}">
+                    <a16:creationId xmlns:a16="http://schemas.microsoft.com/office/drawing/2014/main" id="{956B7CE1-1642-0377-0B90-2D07B9BC0F63}"/>
+                  </a:ext>
+                </a:extLst>
+              </p:cNvPr>
+              <p:cNvSpPr txBox="1"/>
+              <p:nvPr/>
+            </p:nvSpPr>
+            <p:spPr>
+              <a:xfrm>
+                <a:off x="384048" y="219456"/>
+                <a:ext cx="4289188" cy="400110"/>
+              </a:xfrm>
+              <a:prstGeom prst="rect">
+                <a:avLst/>
+              </a:prstGeom>
+              <a:noFill/>
+            </p:spPr>
+            <p:txBody>
+              <a:bodyPr wrap="none">
+                <a:spAutoFit/>
+              </a:bodyPr>
+              <a:lstStyle/>
+              <a:p>
+                <a:r>
+                  <a:rPr lang="en-US" sz="2000" b="1" i="0" baseline="0" dirty="0">
+                    <a:latin typeface="Calibri"/>
+                  </a:rPr>
+                  <a:t>LG SELECT</a:t>
+                </a:r>
+                <a:r>
+                  <a:rPr sz="2000" b="1" i="0" baseline="0" dirty="0">
+                    <a:latin typeface="Calibri"/>
+                  </a:rPr>
+                  <a:t> —</a:t>
+                </a:r>
+                <a:r>
+                  <a:rPr lang="en-US" sz="2000" b="1" i="0" baseline="0" dirty="0">
+                    <a:latin typeface="Calibri"/>
+                  </a:rPr>
+                  <a:t> </a:t>
+                </a:r>
+                <a14:m>
+                  <m:oMath xmlns:m="http://schemas.openxmlformats.org/officeDocument/2006/math">
+                    <m:r>
+                      <a:rPr lang="en-US" sz="2000" b="1" i="0" baseline="0" dirty="0" smtClean="0">
+                        <a:latin typeface="Cambria Math" panose="02040503050406030204" pitchFamily="18" charset="0"/>
+                      </a:rPr>
+                      <m:t>𝜆</m:t>
+                    </m:r>
+                  </m:oMath>
+                </a14:m>
+                <a:r>
+                  <a:rPr lang="en-US" sz="2000" b="1" i="0" baseline="0" dirty="0">
+                    <a:latin typeface="Calibri"/>
+                  </a:rPr>
+                  <a:t> sweep (extended arms)</a:t>
+                </a:r>
+                <a:endParaRPr sz="2000" b="1" i="0" baseline="0" dirty="0">
+                  <a:latin typeface="Calibri"/>
+                </a:endParaRPr>
+              </a:p>
+            </p:txBody>
+          </p:sp>
+        </mc:Choice>
+        <mc:Fallback>
+          <p:sp>
+            <p:nvSpPr>
+              <p:cNvPr id="2" name="TextBox 1">
+                <a:extLst>
+                  <a:ext uri="{FF2B5EF4-FFF2-40B4-BE49-F238E27FC236}">
+                    <a16:creationId xmlns:a16="http://schemas.microsoft.com/office/drawing/2014/main" id="{956B7CE1-1642-0377-0B90-2D07B9BC0F63}"/>
+                  </a:ext>
+                </a:extLst>
+              </p:cNvPr>
+              <p:cNvSpPr txBox="1">
+                <a:spLocks noRot="1" noChangeAspect="1" noMove="1" noResize="1" noEditPoints="1" noAdjustHandles="1" noChangeArrowheads="1" noChangeShapeType="1" noTextEdit="1"/>
+              </p:cNvSpPr>
+              <p:nvPr/>
+            </p:nvSpPr>
+            <p:spPr>
+              <a:xfrm>
+                <a:off x="384048" y="219456"/>
+                <a:ext cx="4289188" cy="400110"/>
+              </a:xfrm>
+              <a:prstGeom prst="rect">
+                <a:avLst/>
+              </a:prstGeom>
+              <a:blipFill>
+                <a:blip r:embed="rId2"/>
+                <a:stretch>
+                  <a:fillRect l="-1475" t="-9375" r="-295" b="-28125"/>
+                </a:stretch>
+              </a:blipFill>
+            </p:spPr>
+            <p:txBody>
+              <a:bodyPr/>
+              <a:lstStyle/>
+              <a:p>
+                <a:r>
+                  <a:rPr lang="en-US">
+                    <a:noFill/>
+                  </a:rPr>
+                  <a:t> </a:t>
+                </a:r>
+              </a:p>
+            </p:txBody>
+          </p:sp>
+        </mc:Fallback>
+      </mc:AlternateContent>
+      <p:sp>
+        <p:nvSpPr>
+          <p:cNvPr id="3" name="TextBox 2">
+            <a:extLst>
+              <a:ext uri="{FF2B5EF4-FFF2-40B4-BE49-F238E27FC236}">
+                <a16:creationId xmlns:a16="http://schemas.microsoft.com/office/drawing/2014/main" id="{005778F5-29FD-A98A-7A16-AA23ACA1741F}"/>
+              </a:ext>
+            </a:extLst>
+          </p:cNvPr>
+          <p:cNvSpPr txBox="1"/>
+          <p:nvPr/>
+        </p:nvSpPr>
+        <p:spPr>
+          <a:xfrm>
+            <a:off x="384048" y="713232"/>
+            <a:ext cx="2064989" cy="261610"/>
+          </a:xfrm>
+          <a:prstGeom prst="rect">
+            <a:avLst/>
+          </a:prstGeom>
+          <a:noFill/>
+        </p:spPr>
+        <p:txBody>
+          <a:bodyPr wrap="none">
+            <a:spAutoFit/>
+          </a:bodyPr>
+          <a:lstStyle/>
+          <a:p>
+            <a:r>
+              <a:rPr lang="en-US" sz="1100" dirty="0"/>
+              <a:t>Same panel · </a:t>
+            </a:r>
+            <a:r>
+              <a:rPr lang="en-US" sz="1100" dirty="0" err="1"/>
+              <a:t>λ</a:t>
+            </a:r>
+            <a:r>
+              <a:rPr lang="en-US" sz="1100" dirty="0"/>
+              <a:t> ∈ {1.5, 2, 4, 8, 16}</a:t>
+            </a:r>
+            <a:endParaRPr sz="700" b="0" i="0" baseline="0" dirty="0">
+              <a:latin typeface="Calibri"/>
+            </a:endParaRPr>
+          </a:p>
+        </p:txBody>
+      </p:sp>
+      <p:pic>
+        <p:nvPicPr>
+          <p:cNvPr id="4" name="Picture 3">
+            <a:extLst>
+              <a:ext uri="{FF2B5EF4-FFF2-40B4-BE49-F238E27FC236}">
+                <a16:creationId xmlns:a16="http://schemas.microsoft.com/office/drawing/2014/main" id="{E7B0A31C-9072-675D-D772-493D283EEB62}"/>
+              </a:ext>
+            </a:extLst>
+          </p:cNvPr>
+          <p:cNvPicPr>
+            <a:picLocks noChangeAspect="1"/>
+          </p:cNvPicPr>
+          <p:nvPr/>
+        </p:nvPicPr>
+        <p:blipFill>
+          <a:blip r:embed="rId3"/>
+          <a:srcRect/>
+          <a:stretch/>
+        </p:blipFill>
+        <p:spPr>
+          <a:xfrm>
+            <a:off x="941171" y="998593"/>
+            <a:ext cx="10309658" cy="4290654"/>
+          </a:xfrm>
+          <a:prstGeom prst="rect">
+            <a:avLst/>
+          </a:prstGeom>
+        </p:spPr>
+      </p:pic>
+      <p:sp>
+        <p:nvSpPr>
+          <p:cNvPr id="5" name="TextBox 4">
+            <a:extLst>
+              <a:ext uri="{FF2B5EF4-FFF2-40B4-BE49-F238E27FC236}">
+                <a16:creationId xmlns:a16="http://schemas.microsoft.com/office/drawing/2014/main" id="{2E63828F-BB33-8023-6759-4B4A35782872}"/>
+              </a:ext>
+            </a:extLst>
+          </p:cNvPr>
+          <p:cNvSpPr txBox="1"/>
+          <p:nvPr/>
+        </p:nvSpPr>
+        <p:spPr>
+          <a:xfrm>
+            <a:off x="384048" y="5395296"/>
+            <a:ext cx="11160252" cy="545107"/>
+          </a:xfrm>
+          <a:prstGeom prst="rect">
+            <a:avLst/>
+          </a:prstGeom>
+          <a:noFill/>
+        </p:spPr>
+        <p:txBody>
+          <a:bodyPr wrap="square" numCol="2">
+            <a:noAutofit/>
+          </a:bodyPr>
+          <a:lstStyle/>
+          <a:p>
+            <a:pPr marL="171450" indent="-171450">
+              <a:buFont typeface="Arial" panose="020B0604020202020204" pitchFamily="34" charset="0"/>
+              <a:buChar char="•"/>
+            </a:pPr>
+            <a:r>
+              <a:rPr lang="en-US" sz="1000" b="0" i="0" baseline="0" dirty="0">
+                <a:latin typeface="Calibri"/>
+              </a:rPr>
+              <a:t>LOO (left): inverted-U persists for </a:t>
+            </a:r>
+            <a:r>
+              <a:rPr lang="en-US" sz="1000" b="1" i="0" baseline="0" dirty="0">
+                <a:latin typeface="Calibri"/>
+              </a:rPr>
+              <a:t>all</a:t>
+            </a:r>
+            <a:r>
+              <a:rPr lang="en-US" sz="1000" b="0" i="0" baseline="0" dirty="0">
+                <a:latin typeface="Calibri"/>
+              </a:rPr>
+              <a:t> arms ≥ 1.5.</a:t>
+            </a:r>
+          </a:p>
+          <a:p>
+            <a:pPr marL="171450" indent="-171450">
+              <a:buFont typeface="Arial" panose="020B0604020202020204" pitchFamily="34" charset="0"/>
+              <a:buChar char="•"/>
+            </a:pPr>
+            <a:r>
+              <a:rPr lang="el-GR" sz="1000" b="1" i="0" baseline="0" dirty="0">
+                <a:latin typeface="Calibri"/>
+              </a:rPr>
+              <a:t>λ = 2, 4</a:t>
+            </a:r>
+            <a:r>
+              <a:rPr lang="el-GR" sz="1000" b="0" i="0" baseline="0" dirty="0">
+                <a:latin typeface="Calibri"/>
+              </a:rPr>
+              <a:t>: </a:t>
+            </a:r>
+            <a:r>
+              <a:rPr lang="en-US" sz="1000" b="0" i="0" baseline="0" dirty="0">
+                <a:latin typeface="Calibri"/>
+              </a:rPr>
+              <a:t>peak bins 11–12 — closest to empirical shape on LOO.</a:t>
+            </a:r>
+          </a:p>
+          <a:p>
+            <a:pPr marL="171450" indent="-171450">
+              <a:buFont typeface="Arial" panose="020B0604020202020204" pitchFamily="34" charset="0"/>
+              <a:buChar char="•"/>
+            </a:pPr>
+            <a:r>
+              <a:rPr lang="el-GR" sz="1000" b="1" i="0" baseline="0" dirty="0">
+                <a:latin typeface="Calibri"/>
+              </a:rPr>
+              <a:t>λ = 8, 16</a:t>
+            </a:r>
+            <a:r>
+              <a:rPr lang="el-GR" sz="1000" b="0" i="0" baseline="0" dirty="0">
+                <a:latin typeface="Calibri"/>
+              </a:rPr>
+              <a:t>: </a:t>
+            </a:r>
+            <a:r>
+              <a:rPr lang="en-US" sz="1000" b="0" i="0" baseline="0" dirty="0">
+                <a:latin typeface="Calibri"/>
+              </a:rPr>
+              <a:t>peak shifts </a:t>
+            </a:r>
+            <a:r>
+              <a:rPr lang="en-US" sz="1000" b="1" i="0" baseline="0" dirty="0">
+                <a:latin typeface="Calibri"/>
+              </a:rPr>
+              <a:t>left</a:t>
+            </a:r>
+            <a:r>
+              <a:rPr lang="en-US" sz="1000" b="0" i="0" baseline="0" dirty="0">
+                <a:latin typeface="Calibri"/>
+              </a:rPr>
+              <a:t> (bins 9–12) — high </a:t>
+            </a:r>
+            <a:r>
+              <a:rPr lang="el-GR" sz="1000" b="0" i="0" baseline="0" dirty="0">
+                <a:latin typeface="Calibri"/>
+              </a:rPr>
+              <a:t>λ </a:t>
+            </a:r>
+            <a:r>
+              <a:rPr lang="en-US" sz="1000" b="0" i="0" baseline="0" dirty="0">
+                <a:latin typeface="Calibri"/>
+              </a:rPr>
+              <a:t>over-penalizes elite pools.</a:t>
+            </a:r>
+          </a:p>
+          <a:p>
+            <a:pPr marL="171450" indent="-171450">
+              <a:buFont typeface="Arial" panose="020B0604020202020204" pitchFamily="34" charset="0"/>
+              <a:buChar char="•"/>
+            </a:pPr>
+            <a:r>
+              <a:rPr lang="en-US" sz="1000" b="0" i="0" baseline="0" dirty="0">
+                <a:latin typeface="Calibri"/>
+              </a:rPr>
+              <a:t>Pool mean (right): </a:t>
+            </a:r>
+            <a:r>
+              <a:rPr lang="el-GR" sz="1000" b="1" i="0" baseline="0" dirty="0">
+                <a:latin typeface="Calibri"/>
+              </a:rPr>
+              <a:t>λ = 4, 8, 16</a:t>
+            </a:r>
+            <a:r>
+              <a:rPr lang="el-GR" sz="1000" b="0" i="0" baseline="0" dirty="0">
+                <a:latin typeface="Calibri"/>
+              </a:rPr>
+              <a:t> </a:t>
+            </a:r>
+            <a:r>
+              <a:rPr lang="en-US" sz="1000" b="0" i="0" baseline="0" dirty="0">
+                <a:latin typeface="Calibri"/>
+              </a:rPr>
+              <a:t>show inverted-U-like shape; </a:t>
+            </a:r>
+            <a:r>
+              <a:rPr lang="el-GR" sz="1000" b="1" i="0" baseline="0" dirty="0">
+                <a:latin typeface="Calibri"/>
+              </a:rPr>
+              <a:t>λ = 1.5, 2</a:t>
+            </a:r>
+            <a:r>
+              <a:rPr lang="el-GR" sz="1000" b="0" i="0" baseline="0" dirty="0">
+                <a:latin typeface="Calibri"/>
+              </a:rPr>
+              <a:t> </a:t>
+            </a:r>
+            <a:r>
+              <a:rPr lang="en-US" sz="1000" b="0" i="0" baseline="0" dirty="0">
+                <a:latin typeface="Calibri"/>
+              </a:rPr>
+              <a:t>still monotone.</a:t>
+            </a:r>
+          </a:p>
+          <a:p>
+            <a:pPr marL="171450" indent="-171450">
+              <a:buFont typeface="Arial" panose="020B0604020202020204" pitchFamily="34" charset="0"/>
+              <a:buChar char="•"/>
+            </a:pPr>
+            <a:r>
+              <a:rPr lang="en-US" sz="1000" b="1" i="0" baseline="0" dirty="0">
+                <a:latin typeface="Calibri"/>
+              </a:rPr>
+              <a:t>Takeaway</a:t>
+            </a:r>
+            <a:r>
+              <a:rPr lang="en-US" sz="1000" b="0" i="0" baseline="0" dirty="0">
+                <a:latin typeface="Calibri"/>
+              </a:rPr>
+              <a:t>: </a:t>
+            </a:r>
+            <a:r>
+              <a:rPr lang="el-GR" sz="1000" b="0" i="0" baseline="0" dirty="0">
+                <a:latin typeface="Calibri"/>
+              </a:rPr>
+              <a:t>λ </a:t>
+            </a:r>
+            <a:r>
+              <a:rPr lang="en-US" sz="1000" b="0" i="0" baseline="0" dirty="0">
+                <a:latin typeface="Calibri"/>
+              </a:rPr>
+              <a:t>controls both </a:t>
+            </a:r>
+            <a:r>
+              <a:rPr lang="en-US" sz="1000" b="1" i="0" baseline="0" dirty="0">
+                <a:latin typeface="Calibri"/>
+              </a:rPr>
+              <a:t>whether</a:t>
+            </a:r>
+            <a:r>
+              <a:rPr lang="en-US" sz="1000" b="0" i="0" baseline="0" dirty="0">
+                <a:latin typeface="Calibri"/>
+              </a:rPr>
+              <a:t> and </a:t>
+            </a:r>
+            <a:r>
+              <a:rPr lang="en-US" sz="1000" b="1" i="0" baseline="0" dirty="0">
+                <a:latin typeface="Calibri"/>
+              </a:rPr>
+              <a:t>where</a:t>
+            </a:r>
+            <a:r>
+              <a:rPr lang="en-US" sz="1000" b="0" i="0" baseline="0" dirty="0">
+                <a:latin typeface="Calibri"/>
+              </a:rPr>
+              <a:t> the dip appears; very high </a:t>
+            </a:r>
+            <a:r>
+              <a:rPr lang="el-GR" sz="1000" b="0" i="0" baseline="0" dirty="0">
+                <a:latin typeface="Calibri"/>
+              </a:rPr>
+              <a:t>λ </a:t>
+            </a:r>
+            <a:r>
+              <a:rPr lang="en-US" sz="1000" b="0" i="0" baseline="0" dirty="0">
+                <a:latin typeface="Calibri"/>
+              </a:rPr>
+              <a:t>is not “more empirical.”</a:t>
+            </a:r>
+          </a:p>
+          <a:p>
+            <a:endParaRPr lang="en-US" sz="1000" b="0" i="0" baseline="0" dirty="0">
+              <a:latin typeface="Calibri"/>
+            </a:endParaRPr>
+          </a:p>
+        </p:txBody>
+      </p:sp>
+      <p:sp>
+        <p:nvSpPr>
+          <p:cNvPr id="6" name="TextBox 5">
+            <a:extLst>
+              <a:ext uri="{FF2B5EF4-FFF2-40B4-BE49-F238E27FC236}">
+                <a16:creationId xmlns:a16="http://schemas.microsoft.com/office/drawing/2014/main" id="{734C1A31-708A-558A-D52C-952586F69249}"/>
+              </a:ext>
+            </a:extLst>
+          </p:cNvPr>
+          <p:cNvSpPr txBox="1"/>
+          <p:nvPr/>
+        </p:nvSpPr>
+        <p:spPr>
+          <a:xfrm>
+            <a:off x="384048" y="6053328"/>
+            <a:ext cx="11423599" cy="261610"/>
+          </a:xfrm>
+          <a:prstGeom prst="rect">
+            <a:avLst/>
+          </a:prstGeom>
+          <a:noFill/>
+        </p:spPr>
+        <p:txBody>
+          <a:bodyPr wrap="square">
+            <a:spAutoFit/>
+          </a:bodyPr>
+          <a:lstStyle/>
+          <a:p>
+            <a:r>
+              <a:rPr lang="en-US" sz="1100" b="1" dirty="0"/>
+              <a:t>Talking point:</a:t>
+            </a:r>
+            <a:r>
+              <a:rPr lang="en-US" sz="1100" dirty="0"/>
+              <a:t> Inverted-U on LOO </a:t>
+            </a:r>
+            <a:r>
+              <a:rPr lang="en-US" sz="1100" b="1" dirty="0"/>
+              <a:t>persists</a:t>
+            </a:r>
+            <a:r>
+              <a:rPr lang="en-US" sz="1100" dirty="0"/>
+              <a:t> for </a:t>
+            </a:r>
+            <a:r>
+              <a:rPr lang="en-US" sz="1100" b="1" dirty="0" err="1"/>
+              <a:t>λ</a:t>
+            </a:r>
+            <a:r>
+              <a:rPr lang="en-US" sz="1100" b="1" dirty="0"/>
+              <a:t> ≥ 1.5</a:t>
+            </a:r>
+            <a:r>
+              <a:rPr lang="en-US" sz="1100" dirty="0"/>
+              <a:t>, but </a:t>
+            </a:r>
+            <a:r>
+              <a:rPr lang="en-US" sz="1100" b="1" dirty="0" err="1"/>
+              <a:t>λ</a:t>
+            </a:r>
+            <a:r>
+              <a:rPr lang="en-US" sz="1100" b="1" dirty="0"/>
+              <a:t> = 8–16</a:t>
+            </a:r>
+            <a:r>
+              <a:rPr lang="en-US" sz="1100" dirty="0"/>
+              <a:t> shifts the peak </a:t>
+            </a:r>
+            <a:r>
+              <a:rPr lang="en-US" sz="1100" b="1" dirty="0"/>
+              <a:t>too far left</a:t>
+            </a:r>
+            <a:r>
+              <a:rPr lang="en-US" sz="1100" dirty="0"/>
+              <a:t>; on pool mean, inverted-U appears only at </a:t>
+            </a:r>
+            <a:r>
+              <a:rPr lang="en-US" sz="1100" b="1" dirty="0" err="1"/>
+              <a:t>λ</a:t>
+            </a:r>
+            <a:r>
+              <a:rPr lang="en-US" sz="1100" b="1" dirty="0"/>
+              <a:t> ≥ 4</a:t>
+            </a:r>
+            <a:r>
+              <a:rPr lang="en-US" sz="1100" dirty="0"/>
+              <a:t> — so “more </a:t>
+            </a:r>
+            <a:r>
+              <a:rPr lang="en-US" sz="1100" dirty="0" err="1"/>
+              <a:t>λ</a:t>
+            </a:r>
+            <a:r>
+              <a:rPr lang="en-US" sz="1100" dirty="0"/>
+              <a:t>” is not uniformly “more empirical.”</a:t>
+            </a:r>
+            <a:endParaRPr sz="800" i="0" baseline="0" dirty="0">
+              <a:latin typeface="Calibri"/>
+            </a:endParaRPr>
+          </a:p>
+        </p:txBody>
+      </p:sp>
+    </p:spTree>
+    <p:extLst>
+      <p:ext uri="{BB962C8B-B14F-4D97-AF65-F5344CB8AC3E}">
+        <p14:creationId xmlns:p14="http://schemas.microsoft.com/office/powerpoint/2010/main" val="3531618714"/>
+      </p:ext>
+    </p:extLst>
+  </p:cSld>
+  <p:clrMapOvr>
+    <a:masterClrMapping/>
+  </p:clrMapOvr>
+</p:sld>
+</file>
+
+<file path=ppt/slides/slide22.xml><?xml version="1.0" encoding="utf-8"?>
+<p:sld xmlns:a="http://schemas.openxmlformats.org/drawingml/2006/main" xmlns:r="http://schemas.openxmlformats.org/officeDocument/2006/relationships" xmlns:p="http://schemas.openxmlformats.org/presentationml/2006/main">
+  <p:cSld>
+    <p:spTree>
+      <p:nvGrpSpPr>
         <p:cNvPr id="1" name=""/>
         <p:cNvGrpSpPr/>
         <p:nvPr/>
@@ -17477,7 +19176,7 @@
 </p:sld>
 </file>
 
-<file path=ppt/slides/slide21.xml><?xml version="1.0" encoding="utf-8"?>
+<file path=ppt/slides/slide23.xml><?xml version="1.0" encoding="utf-8"?>
 <p:sld xmlns:a="http://schemas.openxmlformats.org/drawingml/2006/main" xmlns:r="http://schemas.openxmlformats.org/officeDocument/2006/relationships" xmlns:p="http://schemas.openxmlformats.org/presentationml/2006/main">
   <p:cSld>
     <p:spTree>
@@ -18620,604 +20319,6 @@
               </a:prstGeom>
               <a:blipFill>
                 <a:blip r:embed="rId10"/>
-                <a:stretch>
-                  <a:fillRect b="-13636"/>
-                </a:stretch>
-              </a:blipFill>
-            </p:spPr>
-            <p:txBody>
-              <a:bodyPr/>
-              <a:lstStyle/>
-              <a:p>
-                <a:r>
-                  <a:rPr lang="en-US">
-                    <a:noFill/>
-                  </a:rPr>
-                  <a:t> </a:t>
-                </a:r>
-              </a:p>
-            </p:txBody>
-          </p:sp>
-        </mc:Fallback>
-      </mc:AlternateContent>
-    </p:spTree>
-  </p:cSld>
-  <p:clrMapOvr>
-    <a:masterClrMapping/>
-  </p:clrMapOvr>
-</p:sld>
-</file>
-
-<file path=ppt/slides/slide22.xml><?xml version="1.0" encoding="utf-8"?>
-<p:sld xmlns:a="http://schemas.openxmlformats.org/drawingml/2006/main" xmlns:r="http://schemas.openxmlformats.org/officeDocument/2006/relationships" xmlns:p="http://schemas.openxmlformats.org/presentationml/2006/main">
-  <p:cSld>
-    <p:spTree>
-      <p:nvGrpSpPr>
-        <p:cNvPr id="1" name=""/>
-        <p:cNvGrpSpPr/>
-        <p:nvPr/>
-      </p:nvGrpSpPr>
-      <p:grpSpPr>
-        <a:xfrm>
-          <a:off x="0" y="0"/>
-          <a:ext cx="0" cy="0"/>
-          <a:chOff x="0" y="0"/>
-          <a:chExt cx="0" cy="0"/>
-        </a:xfrm>
-      </p:grpSpPr>
-      <p:sp>
-        <p:nvSpPr>
-          <p:cNvPr id="2" name="TextBox 1"/>
-          <p:cNvSpPr txBox="1"/>
-          <p:nvPr/>
-        </p:nvSpPr>
-        <p:spPr>
-          <a:xfrm>
-            <a:off x="384048" y="219456"/>
-            <a:ext cx="11423599" cy="457200"/>
-          </a:xfrm>
-          <a:prstGeom prst="rect">
-            <a:avLst/>
-          </a:prstGeom>
-          <a:noFill/>
-        </p:spPr>
-        <p:txBody>
-          <a:bodyPr wrap="none">
-            <a:spAutoFit/>
-          </a:bodyPr>
-          <a:lstStyle/>
-          <a:p>
-            <a:r>
-              <a:rPr sz="2000" b="1" i="0" baseline="0" dirty="0">
-                <a:latin typeface="Calibri"/>
-              </a:rPr>
-              <a:t>PD17 — Empirical vs sim interval overlap (\rho calibration target)</a:t>
-            </a:r>
-          </a:p>
-        </p:txBody>
-      </p:sp>
-      <p:sp>
-        <p:nvSpPr>
-          <p:cNvPr id="3" name="TextBox 2"/>
-          <p:cNvSpPr txBox="1"/>
-          <p:nvPr/>
-        </p:nvSpPr>
-        <p:spPr>
-          <a:xfrm>
-            <a:off x="384048" y="713232"/>
-            <a:ext cx="11423599" cy="246888"/>
-          </a:xfrm>
-          <a:prstGeom prst="rect">
-            <a:avLst/>
-          </a:prstGeom>
-          <a:noFill/>
-        </p:spPr>
-        <p:txBody>
-          <a:bodyPr wrap="none">
-            <a:spAutoFit/>
-          </a:bodyPr>
-          <a:lstStyle/>
-          <a:p>
-            <a:r>
-              <a:rPr sz="1000" b="0" i="0" baseline="0">
-                <a:latin typeface="Calibri"/>
-              </a:rPr>
-              <a:t>Assign block capstone · empirical MBB vs 539 sim · same coverage diagnostic</a:t>
-            </a:r>
-          </a:p>
-        </p:txBody>
-      </p:sp>
-      <p:pic>
-        <p:nvPicPr>
-          <p:cNvPr id="4" name="Picture 3"/>
-          <p:cNvPicPr>
-            <a:picLocks noChangeAspect="1"/>
-          </p:cNvPicPr>
-          <p:nvPr/>
-        </p:nvPicPr>
-        <p:blipFill>
-          <a:blip r:embed="rId2"/>
-          <a:srcRect/>
-          <a:stretch/>
-        </p:blipFill>
-        <p:spPr>
-          <a:xfrm>
-            <a:off x="758522" y="960120"/>
-            <a:ext cx="11063037" cy="3459480"/>
-          </a:xfrm>
-          <a:prstGeom prst="rect">
-            <a:avLst/>
-          </a:prstGeom>
-        </p:spPr>
-      </p:pic>
-      <mc:AlternateContent xmlns:mc="http://schemas.openxmlformats.org/markup-compatibility/2006" xmlns:a14="http://schemas.microsoft.com/office/drawing/2010/main">
-        <mc:Choice Requires="a14">
-          <p:sp>
-            <p:nvSpPr>
-              <p:cNvPr id="5" name="TextBox 4"/>
-              <p:cNvSpPr txBox="1"/>
-              <p:nvPr/>
-            </p:nvSpPr>
-            <p:spPr>
-              <a:xfrm>
-                <a:off x="384048" y="4372927"/>
-                <a:ext cx="6334804" cy="1472070"/>
-              </a:xfrm>
-              <a:prstGeom prst="rect">
-                <a:avLst/>
-              </a:prstGeom>
-              <a:noFill/>
-            </p:spPr>
-            <p:txBody>
-              <a:bodyPr wrap="square">
-                <a:spAutoFit/>
-              </a:bodyPr>
-              <a:lstStyle/>
-              <a:p>
-                <a:pPr>
-                  <a:lnSpc>
-                    <a:spcPct val="150000"/>
-                  </a:lnSpc>
-                  <a:buChar char="•"/>
-                </a:pPr>
-                <a:r>
-                  <a:rPr lang="en-US" sz="1000" dirty="0"/>
-                  <a:t> Three panels: empirical (left) · four </a:t>
-                </a:r>
-                <a14:m>
-                  <m:oMath xmlns:m="http://schemas.openxmlformats.org/officeDocument/2006/math">
-                    <m:r>
-                      <a:rPr lang="en-US" sz="1000" i="1" dirty="0" smtClean="0">
-                        <a:latin typeface="Cambria Math" panose="02040503050406030204" pitchFamily="18" charset="0"/>
-                      </a:rPr>
-                      <m:t>𝜌</m:t>
-                    </m:r>
-                  </m:oMath>
-                </a14:m>
-                <a:r>
-                  <a:rPr lang="en-US" sz="1000" dirty="0"/>
-                  <a:t> arms (center) · </a:t>
-                </a:r>
-                <a14:m>
-                  <m:oMath xmlns:m="http://schemas.openxmlformats.org/officeDocument/2006/math">
-                    <m:r>
-                      <a:rPr lang="en-US" sz="1000" i="1" dirty="0" smtClean="0">
-                        <a:latin typeface="Cambria Math" panose="02040503050406030204" pitchFamily="18" charset="0"/>
-                      </a:rPr>
-                      <m:t>𝜌</m:t>
-                    </m:r>
-                    <m:r>
-                      <a:rPr lang="en-US" sz="1000" i="0" dirty="0">
-                        <a:latin typeface="Cambria Math" panose="02040503050406030204" pitchFamily="18" charset="0"/>
-                      </a:rPr>
-                      <m:t>=1→32</m:t>
-                    </m:r>
-                  </m:oMath>
-                </a14:m>
-                <a:r>
-                  <a:rPr lang="en-US" sz="1000" dirty="0"/>
-                  <a:t> sweep (right).</a:t>
-                </a:r>
-              </a:p>
-              <a:p>
-                <a:pPr>
-                  <a:lnSpc>
-                    <a:spcPct val="150000"/>
-                  </a:lnSpc>
-                  <a:buChar char="•"/>
-                </a:pPr>
-                <a:r>
-                  <a:rPr lang="en-US" sz="1000" dirty="0"/>
-                  <a:t>  Same </a:t>
-                </a:r>
-                <a14:m>
-                  <m:oMath xmlns:m="http://schemas.openxmlformats.org/officeDocument/2006/math">
-                    <m:sSub>
-                      <m:sSubPr>
-                        <m:ctrlPr>
-                          <a:rPr lang="en-US" sz="1000" i="1" dirty="0" err="1" smtClean="0">
-                            <a:latin typeface="Cambria Math" panose="02040503050406030204" pitchFamily="18" charset="0"/>
-                          </a:rPr>
-                        </m:ctrlPr>
-                      </m:sSubPr>
-                      <m:e>
-                        <m:r>
-                          <a:rPr lang="en-US" sz="1000" i="1" dirty="0" err="1" smtClean="0">
-                            <a:latin typeface="Cambria Math" panose="02040503050406030204" pitchFamily="18" charset="0"/>
-                          </a:rPr>
-                          <m:t>𝐴</m:t>
-                        </m:r>
-                      </m:e>
-                      <m:sub>
-                        <m:r>
-                          <a:rPr lang="en-US" sz="1000" i="1" dirty="0" err="1" smtClean="0">
-                            <a:latin typeface="Cambria Math" panose="02040503050406030204" pitchFamily="18" charset="0"/>
-                          </a:rPr>
-                          <m:t>𝑖</m:t>
-                        </m:r>
-                      </m:sub>
-                    </m:sSub>
-                  </m:oMath>
-                </a14:m>
-                <a:r>
-                  <a:rPr lang="en-US" sz="1000" dirty="0"/>
-                  <a:t> / </a:t>
-                </a:r>
-                <a14:m>
-                  <m:oMath xmlns:m="http://schemas.openxmlformats.org/officeDocument/2006/math">
-                    <m:sSub>
-                      <m:sSubPr>
-                        <m:ctrlPr>
-                          <a:rPr lang="en-US" sz="1000" i="1" dirty="0" smtClean="0">
-                            <a:latin typeface="Cambria Math" panose="02040503050406030204" pitchFamily="18" charset="0"/>
-                          </a:rPr>
-                        </m:ctrlPr>
-                      </m:sSubPr>
-                      <m:e>
-                        <m:r>
-                          <a:rPr lang="en-US" sz="1000" i="1" dirty="0" smtClean="0">
-                            <a:latin typeface="Cambria Math" panose="02040503050406030204" pitchFamily="18" charset="0"/>
-                          </a:rPr>
-                          <m:t>𝑇</m:t>
-                        </m:r>
-                      </m:e>
-                      <m:sub>
-                        <m:sSup>
-                          <m:sSupPr>
-                            <m:ctrlPr>
-                              <a:rPr lang="en-US" sz="1000" i="1" dirty="0" smtClean="0">
-                                <a:latin typeface="Cambria Math" panose="02040503050406030204" pitchFamily="18" charset="0"/>
-                              </a:rPr>
-                            </m:ctrlPr>
-                          </m:sSupPr>
-                          <m:e>
-                            <m:r>
-                              <a:rPr lang="en-US" sz="1000" i="1" dirty="0" smtClean="0">
-                                <a:latin typeface="Cambria Math" panose="02040503050406030204" pitchFamily="18" charset="0"/>
-                              </a:rPr>
-                              <m:t>𝑗</m:t>
-                            </m:r>
-                          </m:e>
-                          <m:sup>
-                            <m:r>
-                              <a:rPr lang="en-US" sz="1000" i="0" dirty="0" smtClean="0">
-                                <a:latin typeface="Cambria Math" panose="02040503050406030204" pitchFamily="18" charset="0"/>
-                              </a:rPr>
-                              <m:t>∗</m:t>
-                            </m:r>
-                          </m:sup>
-                        </m:sSup>
-                      </m:sub>
-                    </m:sSub>
-                  </m:oMath>
-                </a14:m>
-                <a:r>
-                  <a:rPr lang="en-US" sz="1000" dirty="0"/>
-                  <a:t> draw across sim panels; seed fixed.</a:t>
-                </a:r>
-              </a:p>
-              <a:p>
-                <a:pPr>
-                  <a:lnSpc>
-                    <a:spcPct val="150000"/>
-                  </a:lnSpc>
-                  <a:buChar char="•"/>
-                </a:pPr>
-                <a:r>
-                  <a:rPr lang="en-US" sz="1000" dirty="0"/>
-                  <a:t>  Empirical max coverage </a:t>
-                </a:r>
-                <a14:m>
-                  <m:oMath xmlns:m="http://schemas.openxmlformats.org/officeDocument/2006/math">
-                    <m:r>
-                      <a:rPr lang="en-US" sz="1000" dirty="0" smtClean="0">
-                        <a:latin typeface="Cambria Math" panose="02040503050406030204" pitchFamily="18" charset="0"/>
-                      </a:rPr>
-                      <m:t>=</m:t>
-                    </m:r>
-                    <m:r>
-                      <a:rPr lang="en-US" sz="1000" i="0" dirty="0">
-                        <a:latin typeface="Cambria Math" panose="02040503050406030204" pitchFamily="18" charset="0"/>
-                      </a:rPr>
-                      <m:t>6,305</m:t>
-                    </m:r>
-                  </m:oMath>
-                </a14:m>
-                <a:r>
-                  <a:rPr lang="en-US" sz="1000" dirty="0"/>
-                  <a:t>; sort-and-chop max </a:t>
-                </a:r>
-                <a14:m>
-                  <m:oMath xmlns:m="http://schemas.openxmlformats.org/officeDocument/2006/math">
-                    <m:r>
-                      <a:rPr lang="en-US" sz="1000" dirty="0" smtClean="0">
-                        <a:latin typeface="Cambria Math" panose="02040503050406030204" pitchFamily="18" charset="0"/>
-                      </a:rPr>
-                      <m:t>=</m:t>
-                    </m:r>
-                    <m:r>
-                      <a:rPr lang="en-US" sz="1000" i="0" dirty="0">
-                        <a:latin typeface="Cambria Math" panose="02040503050406030204" pitchFamily="18" charset="0"/>
-                      </a:rPr>
-                      <m:t>7</m:t>
-                    </m:r>
-                  </m:oMath>
-                </a14:m>
-                <a:r>
-                  <a:rPr lang="en-US" sz="1000" dirty="0"/>
-                  <a:t>.</a:t>
-                </a:r>
-              </a:p>
-              <a:p>
-                <a:pPr>
-                  <a:lnSpc>
-                    <a:spcPct val="150000"/>
-                  </a:lnSpc>
-                  <a:buChar char="•"/>
-                </a:pPr>
-                <a:r>
-                  <a:rPr lang="en-US" sz="1000" dirty="0"/>
-                  <a:t>  Center: </a:t>
-                </a:r>
-                <a14:m>
-                  <m:oMath xmlns:m="http://schemas.openxmlformats.org/officeDocument/2006/math">
-                    <m:r>
-                      <a:rPr lang="en-US" sz="1000" i="1" dirty="0" smtClean="0">
-                        <a:latin typeface="Cambria Math" panose="02040503050406030204" pitchFamily="18" charset="0"/>
-                      </a:rPr>
-                      <m:t>𝜌</m:t>
-                    </m:r>
-                    <m:r>
-                      <a:rPr lang="en-US" sz="1000" i="0" dirty="0">
-                        <a:latin typeface="Cambria Math" panose="02040503050406030204" pitchFamily="18" charset="0"/>
-                      </a:rPr>
-                      <m:t>∈</m:t>
-                    </m:r>
-                    <m:d>
-                      <m:dPr>
-                        <m:begChr m:val="{"/>
-                        <m:endChr m:val="}"/>
-                        <m:ctrlPr>
-                          <a:rPr lang="en-US" sz="1000" i="0" dirty="0">
-                            <a:latin typeface="Cambria Math" panose="02040503050406030204" pitchFamily="18" charset="0"/>
-                          </a:rPr>
-                        </m:ctrlPr>
-                      </m:dPr>
-                      <m:e>
-                        <m:r>
-                          <a:rPr lang="en-US" sz="1000" i="0" dirty="0">
-                            <a:latin typeface="Cambria Math" panose="02040503050406030204" pitchFamily="18" charset="0"/>
-                          </a:rPr>
-                          <m:t>0.001,1,8,32</m:t>
-                        </m:r>
-                      </m:e>
-                    </m:d>
-                  </m:oMath>
-                </a14:m>
-                <a:r>
-                  <a:rPr lang="en-US" sz="1000" dirty="0"/>
-                  <a:t>; right sweep peaks </a:t>
-                </a:r>
-                <a14:m>
-                  <m:oMath xmlns:m="http://schemas.openxmlformats.org/officeDocument/2006/math">
-                    <m:r>
-                      <a:rPr lang="en-US" sz="1000" i="1" dirty="0" smtClean="0">
-                        <a:latin typeface="Cambria Math" panose="02040503050406030204" pitchFamily="18" charset="0"/>
-                      </a:rPr>
-                      <m:t>𝜌</m:t>
-                    </m:r>
-                    <m:r>
-                      <a:rPr lang="en-US" sz="1000" i="0" dirty="0">
-                        <a:latin typeface="Cambria Math" panose="02040503050406030204" pitchFamily="18" charset="0"/>
-                      </a:rPr>
-                      <m:t>=1→1000</m:t>
-                    </m:r>
-                  </m:oMath>
-                </a14:m>
-                <a:r>
-                  <a:rPr lang="en-US" sz="1000" dirty="0"/>
-                  <a:t>, </a:t>
-                </a:r>
-                <a14:m>
-                  <m:oMath xmlns:m="http://schemas.openxmlformats.org/officeDocument/2006/math">
-                    <m:r>
-                      <a:rPr lang="en-US" sz="1000" i="1" dirty="0" smtClean="0">
-                        <a:latin typeface="Cambria Math" panose="02040503050406030204" pitchFamily="18" charset="0"/>
-                      </a:rPr>
-                      <m:t>𝜌</m:t>
-                    </m:r>
-                    <m:r>
-                      <a:rPr lang="en-US" sz="1000" i="0" dirty="0">
-                        <a:latin typeface="Cambria Math" panose="02040503050406030204" pitchFamily="18" charset="0"/>
-                      </a:rPr>
-                      <m:t>=32→588</m:t>
-                    </m:r>
-                  </m:oMath>
-                </a14:m>
-                <a:r>
-                  <a:rPr lang="en-US" sz="1000" dirty="0"/>
-                  <a:t>.</a:t>
-                </a:r>
-              </a:p>
-              <a:p>
-                <a:pPr>
-                  <a:lnSpc>
-                    <a:spcPct val="150000"/>
-                  </a:lnSpc>
-                  <a:buChar char="•"/>
-                </a:pPr>
-                <a:r>
-                  <a:rPr lang="en-US" sz="1000" dirty="0"/>
-                  <a:t>  Sim sort-and-chop peak </a:t>
-                </a:r>
-                <a14:m>
-                  <m:oMath xmlns:m="http://schemas.openxmlformats.org/officeDocument/2006/math">
-                    <m:r>
-                      <a:rPr lang="en-US" sz="1000" dirty="0" smtClean="0">
-                        <a:latin typeface="Cambria Math" panose="02040503050406030204" pitchFamily="18" charset="0"/>
-                      </a:rPr>
-                      <m:t>=</m:t>
-                    </m:r>
-                    <m:r>
-                      <a:rPr lang="en-US" sz="1000" i="0" dirty="0">
-                        <a:latin typeface="Cambria Math" panose="02040503050406030204" pitchFamily="18" charset="0"/>
-                      </a:rPr>
-                      <m:t>1</m:t>
-                    </m:r>
-                  </m:oMath>
-                </a14:m>
-                <a:r>
-                  <a:rPr lang="en-US" sz="1000" dirty="0"/>
-                  <a:t> on both sim panels.</a:t>
-                </a:r>
-              </a:p>
-              <a:p>
-                <a:pPr>
-                  <a:lnSpc>
-                    <a:spcPct val="150000"/>
-                  </a:lnSpc>
-                  <a:buChar char="•"/>
-                </a:pPr>
-                <a:r>
-                  <a:rPr lang="en-US" sz="1000" dirty="0"/>
-                  <a:t>  PPM z vs [0,1] ability — compare shape, seed 42.</a:t>
-                </a:r>
-                <a:endParaRPr sz="1000" b="0" i="0" baseline="0" dirty="0">
-                  <a:latin typeface="Calibri"/>
-                </a:endParaRPr>
-              </a:p>
-            </p:txBody>
-          </p:sp>
-        </mc:Choice>
-        <mc:Fallback xmlns="">
-          <p:sp>
-            <p:nvSpPr>
-              <p:cNvPr id="5" name="TextBox 4"/>
-              <p:cNvSpPr txBox="1">
-                <a:spLocks noRot="1" noChangeAspect="1" noMove="1" noResize="1" noEditPoints="1" noAdjustHandles="1" noChangeArrowheads="1" noChangeShapeType="1" noTextEdit="1"/>
-              </p:cNvSpPr>
-              <p:nvPr/>
-            </p:nvSpPr>
-            <p:spPr>
-              <a:xfrm>
-                <a:off x="384048" y="4372927"/>
-                <a:ext cx="6334804" cy="1472070"/>
-              </a:xfrm>
-              <a:prstGeom prst="rect">
-                <a:avLst/>
-              </a:prstGeom>
-              <a:blipFill>
-                <a:blip r:embed="rId3"/>
-                <a:stretch>
-                  <a:fillRect b="-1709"/>
-                </a:stretch>
-              </a:blipFill>
-            </p:spPr>
-            <p:txBody>
-              <a:bodyPr/>
-              <a:lstStyle/>
-              <a:p>
-                <a:r>
-                  <a:rPr lang="en-US">
-                    <a:noFill/>
-                  </a:rPr>
-                  <a:t> </a:t>
-                </a:r>
-              </a:p>
-            </p:txBody>
-          </p:sp>
-        </mc:Fallback>
-      </mc:AlternateContent>
-      <mc:AlternateContent xmlns:mc="http://schemas.openxmlformats.org/markup-compatibility/2006" xmlns:a14="http://schemas.microsoft.com/office/drawing/2010/main">
-        <mc:Choice Requires="a14">
-          <p:sp>
-            <p:nvSpPr>
-              <p:cNvPr id="6" name="TextBox 5"/>
-              <p:cNvSpPr txBox="1"/>
-              <p:nvPr/>
-            </p:nvSpPr>
-            <p:spPr>
-              <a:xfrm>
-                <a:off x="384048" y="6053328"/>
-                <a:ext cx="11423599" cy="261610"/>
-              </a:xfrm>
-              <a:prstGeom prst="rect">
-                <a:avLst/>
-              </a:prstGeom>
-              <a:noFill/>
-            </p:spPr>
-            <p:txBody>
-              <a:bodyPr wrap="square">
-                <a:spAutoFit/>
-              </a:bodyPr>
-              <a:lstStyle/>
-              <a:p>
-                <a:pPr algn="l"/>
-                <a:r>
-                  <a:rPr sz="1100" b="1" i="0" baseline="0" dirty="0">
-                    <a:latin typeface="Calibri"/>
-                  </a:rPr>
-                  <a:t>Claim (PD17): Real rosters sit at high coverage peak — sim </a:t>
-                </a:r>
-                <a14:m>
-                  <m:oMath xmlns:m="http://schemas.openxmlformats.org/officeDocument/2006/math">
-                    <m:r>
-                      <a:rPr lang="en-US" sz="1100" b="1" i="0" baseline="0" dirty="0" smtClean="0">
-                        <a:latin typeface="Cambria Math" panose="02040503050406030204" pitchFamily="18" charset="0"/>
-                      </a:rPr>
-                      <m:t>𝜌</m:t>
-                    </m:r>
-                  </m:oMath>
-                </a14:m>
-                <a:r>
-                  <a:rPr sz="1100" b="1" i="0" baseline="0" dirty="0">
-                    <a:latin typeface="Calibri"/>
-                  </a:rPr>
-                  <a:t> must be tuned so soft assign matches that overlap, not sort-and-chop.</a:t>
-                </a:r>
-              </a:p>
-            </p:txBody>
-          </p:sp>
-        </mc:Choice>
-        <mc:Fallback xmlns="">
-          <p:sp>
-            <p:nvSpPr>
-              <p:cNvPr id="6" name="TextBox 5"/>
-              <p:cNvSpPr txBox="1">
-                <a:spLocks noRot="1" noChangeAspect="1" noMove="1" noResize="1" noEditPoints="1" noAdjustHandles="1" noChangeArrowheads="1" noChangeShapeType="1" noTextEdit="1"/>
-              </p:cNvSpPr>
-              <p:nvPr/>
-            </p:nvSpPr>
-            <p:spPr>
-              <a:xfrm>
-                <a:off x="384048" y="6053328"/>
-                <a:ext cx="11423599" cy="261610"/>
-              </a:xfrm>
-              <a:prstGeom prst="rect">
-                <a:avLst/>
-              </a:prstGeom>
-              <a:blipFill>
-                <a:blip r:embed="rId4"/>
                 <a:stretch>
                   <a:fillRect b="-13636"/>
                 </a:stretch>
@@ -21690,55 +22791,132 @@
           <a:chExt cx="0" cy="0"/>
         </a:xfrm>
       </p:grpSpPr>
-      <p:sp>
-        <p:nvSpPr>
-          <p:cNvPr id="2" name="TextBox 1"/>
-          <p:cNvSpPr txBox="1"/>
-          <p:nvPr/>
-        </p:nvSpPr>
-        <p:spPr>
-          <a:xfrm>
-            <a:off x="384048" y="219456"/>
-            <a:ext cx="6067815" cy="400110"/>
-          </a:xfrm>
-          <a:prstGeom prst="rect">
-            <a:avLst/>
-          </a:prstGeom>
-          <a:noFill/>
-        </p:spPr>
-        <p:txBody>
-          <a:bodyPr wrap="none">
-            <a:spAutoFit/>
-          </a:bodyPr>
-          <a:lstStyle/>
-          <a:p>
-            <a:r>
-              <a:rPr lang="en-US" sz="2000" b="1" i="0" baseline="0" dirty="0">
-                <a:latin typeface="Calibri"/>
-              </a:rPr>
-              <a:t>LG</a:t>
-            </a:r>
-            <a:r>
-              <a:rPr sz="2000" b="1" i="0" baseline="0" dirty="0">
-                <a:latin typeface="Calibri"/>
-              </a:rPr>
-              <a:t> sim — team \hat{A}_{</a:t>
-            </a:r>
-            <a:r>
-              <a:rPr sz="2000" b="1" i="0" baseline="0" dirty="0" err="1">
-                <a:latin typeface="Calibri"/>
-              </a:rPr>
-              <a:t>i</a:t>
-            </a:r>
-            <a:r>
-              <a:rPr sz="2000" b="1" i="0" baseline="0" dirty="0">
-                <a:latin typeface="Calibri"/>
-              </a:rPr>
-              <a:t>} interval overlap (2015-2019)</a:t>
-            </a:r>
-          </a:p>
-        </p:txBody>
-      </p:sp>
+      <mc:AlternateContent xmlns:mc="http://schemas.openxmlformats.org/markup-compatibility/2006">
+        <mc:Choice xmlns:a14="http://schemas.microsoft.com/office/drawing/2010/main" Requires="a14">
+          <p:sp>
+            <p:nvSpPr>
+              <p:cNvPr id="2" name="TextBox 1"/>
+              <p:cNvSpPr txBox="1"/>
+              <p:nvPr/>
+            </p:nvSpPr>
+            <p:spPr>
+              <a:xfrm>
+                <a:off x="384048" y="219456"/>
+                <a:ext cx="5152693" cy="418191"/>
+              </a:xfrm>
+              <a:prstGeom prst="rect">
+                <a:avLst/>
+              </a:prstGeom>
+              <a:noFill/>
+            </p:spPr>
+            <p:txBody>
+              <a:bodyPr wrap="none">
+                <a:spAutoFit/>
+              </a:bodyPr>
+              <a:lstStyle/>
+              <a:p>
+                <a:r>
+                  <a:rPr lang="en-US" sz="2000" b="1" i="0" baseline="0" dirty="0">
+                    <a:latin typeface="Calibri"/>
+                  </a:rPr>
+                  <a:t>LG</a:t>
+                </a:r>
+                <a:r>
+                  <a:rPr sz="2000" b="1" i="0" baseline="0" dirty="0">
+                    <a:latin typeface="Calibri"/>
+                  </a:rPr>
+                  <a:t> sim — team </a:t>
+                </a:r>
+                <a14:m>
+                  <m:oMath xmlns:m="http://schemas.openxmlformats.org/officeDocument/2006/math">
+                    <m:sSub>
+                      <m:sSubPr>
+                        <m:ctrlPr>
+                          <a:rPr lang="en-US" sz="2000" b="1" i="0" baseline="0" dirty="0">
+                            <a:latin typeface="Cambria Math" panose="02040503050406030204" pitchFamily="18" charset="0"/>
+                          </a:rPr>
+                        </m:ctrlPr>
+                      </m:sSubPr>
+                      <m:e>
+                        <m:acc>
+                          <m:accPr>
+                            <m:chr m:val="ˆ"/>
+                            <m:ctrlPr>
+                              <a:rPr lang="en-US" sz="2000" b="1" i="0" baseline="0" dirty="0">
+                                <a:latin typeface="Cambria Math" panose="02040503050406030204" pitchFamily="18" charset="0"/>
+                              </a:rPr>
+                            </m:ctrlPr>
+                          </m:accPr>
+                          <m:e>
+                            <m:r>
+                              <a:rPr lang="en-US" sz="2000" b="1" i="0" baseline="0" dirty="0">
+                                <a:latin typeface="Cambria Math" panose="02040503050406030204" pitchFamily="18" charset="0"/>
+                              </a:rPr>
+                              <m:t>𝐴</m:t>
+                            </m:r>
+                          </m:e>
+                        </m:acc>
+                      </m:e>
+                      <m:sub>
+                        <m:r>
+                          <a:rPr lang="en-US" sz="2000" b="1" i="0" baseline="0" dirty="0">
+                            <a:latin typeface="Cambria Math" panose="02040503050406030204" pitchFamily="18" charset="0"/>
+                          </a:rPr>
+                          <m:t>𝑖</m:t>
+                        </m:r>
+                      </m:sub>
+                    </m:sSub>
+                  </m:oMath>
+                </a14:m>
+                <a:r>
+                  <a:rPr sz="2000" b="1" i="0" baseline="0" dirty="0">
+                    <a:latin typeface="Calibri"/>
+                  </a:rPr>
+                  <a:t> interval overlap (2015-2019)</a:t>
+                </a:r>
+              </a:p>
+            </p:txBody>
+          </p:sp>
+        </mc:Choice>
+        <mc:Fallback>
+          <p:sp>
+            <p:nvSpPr>
+              <p:cNvPr id="2" name="TextBox 1"/>
+              <p:cNvSpPr txBox="1">
+                <a:spLocks noRot="1" noChangeAspect="1" noMove="1" noResize="1" noEditPoints="1" noAdjustHandles="1" noChangeArrowheads="1" noChangeShapeType="1" noTextEdit="1"/>
+              </p:cNvSpPr>
+              <p:nvPr/>
+            </p:nvSpPr>
+            <p:spPr>
+              <a:xfrm>
+                <a:off x="384048" y="219456"/>
+                <a:ext cx="5152693" cy="418191"/>
+              </a:xfrm>
+              <a:prstGeom prst="rect">
+                <a:avLst/>
+              </a:prstGeom>
+              <a:blipFill>
+                <a:blip r:embed="rId2"/>
+                <a:stretch>
+                  <a:fillRect l="-1232" t="-14706" r="-493" b="-23529"/>
+                </a:stretch>
+              </a:blipFill>
+            </p:spPr>
+            <p:txBody>
+              <a:bodyPr/>
+              <a:lstStyle/>
+              <a:p>
+                <a:r>
+                  <a:rPr lang="en-US">
+                    <a:noFill/>
+                  </a:rPr>
+                  <a:t> </a:t>
+                </a:r>
+              </a:p>
+            </p:txBody>
+          </p:sp>
+        </mc:Fallback>
+      </mc:AlternateContent>
       <mc:AlternateContent xmlns:mc="http://schemas.openxmlformats.org/markup-compatibility/2006" xmlns:a14="http://schemas.microsoft.com/office/drawing/2010/main">
         <mc:Choice Requires="a14">
           <p:sp>
@@ -21929,7 +23107,7 @@
                 <a:avLst/>
               </a:prstGeom>
               <a:blipFill>
-                <a:blip r:embed="rId2"/>
+                <a:blip r:embed="rId3"/>
                 <a:stretch>
                   <a:fillRect b="-10000"/>
                 </a:stretch>
@@ -21959,14 +23137,14 @@
           <p:nvPr/>
         </p:nvPicPr>
         <p:blipFill>
-          <a:blip r:embed="rId3"/>
+          <a:blip r:embed="rId4"/>
           <a:srcRect/>
           <a:stretch/>
         </p:blipFill>
         <p:spPr>
           <a:xfrm>
-            <a:off x="5037579" y="1157694"/>
-            <a:ext cx="6523276" cy="4734635"/>
+            <a:off x="4976548" y="972185"/>
+            <a:ext cx="6200117" cy="4734635"/>
           </a:xfrm>
           <a:prstGeom prst="rect">
             <a:avLst/>
@@ -23005,7 +24183,7 @@
                 <a:avLst/>
               </a:prstGeom>
               <a:blipFill>
-                <a:blip r:embed="rId4"/>
+                <a:blip r:embed="rId5"/>
                 <a:stretch>
                   <a:fillRect b="-1408"/>
                 </a:stretch>
@@ -23095,8 +24273,8 @@
           <a:chExt cx="0" cy="0"/>
         </a:xfrm>
       </p:grpSpPr>
-      <mc:AlternateContent xmlns:mc="http://schemas.openxmlformats.org/markup-compatibility/2006" xmlns:a14="http://schemas.microsoft.com/office/drawing/2010/main">
-        <mc:Choice Requires="a14">
+      <mc:AlternateContent xmlns:mc="http://schemas.openxmlformats.org/markup-compatibility/2006">
+        <mc:Choice xmlns:a14="http://schemas.microsoft.com/office/drawing/2010/main" Requires="a14">
           <p:sp>
             <p:nvSpPr>
               <p:cNvPr id="2" name="TextBox 1"/>
@@ -23106,7 +24284,7 @@
             <p:spPr>
               <a:xfrm>
                 <a:off x="384048" y="219456"/>
-                <a:ext cx="3426515" cy="400110"/>
+                <a:ext cx="8733353" cy="400110"/>
               </a:xfrm>
               <a:prstGeom prst="rect">
                 <a:avLst/>
@@ -23169,6 +24347,10 @@
                     </m:r>
                   </m:oMath>
                 </a14:m>
+                <a:r>
+                  <a:rPr lang="en-US" sz="2000" b="1" dirty="0"/>
+                  <a:t> — total global within-team sum of squared-errors </a:t>
+                </a:r>
                 <a:endParaRPr sz="2000" b="1" i="0" baseline="0" dirty="0">
                   <a:latin typeface="Calibri"/>
                 </a:endParaRPr>
@@ -23176,7 +24358,7 @@
             </p:txBody>
           </p:sp>
         </mc:Choice>
-        <mc:Fallback xmlns="">
+        <mc:Fallback>
           <p:sp>
             <p:nvSpPr>
               <p:cNvPr id="2" name="TextBox 1"/>
@@ -23188,7 +24370,7 @@
             <p:spPr>
               <a:xfrm>
                 <a:off x="384048" y="219456"/>
-                <a:ext cx="3426515" cy="400110"/>
+                <a:ext cx="8733353" cy="400110"/>
               </a:xfrm>
               <a:prstGeom prst="rect">
                 <a:avLst/>
@@ -23196,7 +24378,7 @@
               <a:blipFill>
                 <a:blip r:embed="rId2"/>
                 <a:stretch>
-                  <a:fillRect l="-1852" t="-9375" b="-28125"/>
+                  <a:fillRect l="-726" t="-9375" r="-581" b="-28125"/>
                 </a:stretch>
               </a:blipFill>
             </p:spPr>
@@ -23402,8 +24584,8 @@
           </a:prstGeom>
         </p:spPr>
       </p:pic>
-      <mc:AlternateContent xmlns:mc="http://schemas.openxmlformats.org/markup-compatibility/2006" xmlns:a14="http://schemas.microsoft.com/office/drawing/2010/main">
-        <mc:Choice Requires="a14">
+      <mc:AlternateContent xmlns:mc="http://schemas.openxmlformats.org/markup-compatibility/2006">
+        <mc:Choice xmlns:a14="http://schemas.microsoft.com/office/drawing/2010/main" Requires="a14">
           <p:sp>
             <p:nvSpPr>
               <p:cNvPr id="5" name="TextBox 4"/>
@@ -23665,25 +24847,25 @@
                 <a14:m>
                   <m:oMath xmlns:m="http://schemas.openxmlformats.org/officeDocument/2006/math">
                     <m:r>
-                      <a:rPr lang="en-US" sz="1000" b="0" i="0" baseline="0" dirty="0" smtClean="0">
-                        <a:latin typeface="Cambria Math" panose="02040503050406030204" pitchFamily="18" charset="0"/>
-                      </a:rPr>
-                      <m:t>𝑔𝑙𝑜𝑏𝑎𝑙</m:t>
-                    </m:r>
-                    <m:r>
-                      <a:rPr lang="en-US" sz="1000" b="0" i="0" baseline="0" dirty="0" smtClean="0">
+                      <a:rPr lang="en-US" sz="1000" b="1" i="0" baseline="0" dirty="0" smtClean="0">
+                        <a:latin typeface="Cambria Math" panose="02040503050406030204" pitchFamily="18" charset="0"/>
+                      </a:rPr>
+                      <m:t>𝐠𝐥𝐨𝐛𝐚𝐥</m:t>
+                    </m:r>
+                    <m:r>
+                      <a:rPr lang="en-US" sz="1000" b="1" i="0" baseline="0" dirty="0" smtClean="0">
                         <a:latin typeface="Cambria Math" panose="02040503050406030204" pitchFamily="18" charset="0"/>
                       </a:rPr>
                       <m:t>_</m:t>
                     </m:r>
                     <m:r>
-                      <a:rPr lang="en-US" sz="1000" b="0" i="0" baseline="0" dirty="0" smtClean="0">
-                        <a:latin typeface="Cambria Math" panose="02040503050406030204" pitchFamily="18" charset="0"/>
-                      </a:rPr>
-                      <m:t>𝑤𝑠𝑠</m:t>
-                    </m:r>
-                    <m:r>
-                      <a:rPr lang="en-US" sz="1000" b="0" i="0" baseline="0" dirty="0" smtClean="0">
+                      <a:rPr lang="en-US" sz="1000" b="1" i="0" baseline="0" dirty="0" smtClean="0">
+                        <a:latin typeface="Cambria Math" panose="02040503050406030204" pitchFamily="18" charset="0"/>
+                      </a:rPr>
+                      <m:t>𝐰𝐬𝐬</m:t>
+                    </m:r>
+                    <m:r>
+                      <a:rPr lang="en-US" sz="1000" b="1" i="0" baseline="0" dirty="0" smtClean="0">
                         <a:latin typeface="Cambria Math" panose="02040503050406030204" pitchFamily="18" charset="0"/>
                       </a:rPr>
                       <m:t>=</m:t>
@@ -23691,7 +24873,7 @@
                   </m:oMath>
                 </a14:m>
                 <a:r>
-                  <a:rPr sz="1000" b="0" i="0" baseline="0" dirty="0">
+                  <a:rPr sz="1000" b="1" i="0" baseline="0" dirty="0">
                     <a:latin typeface="Calibri"/>
                   </a:rPr>
                   <a:t> </a:t>
@@ -23704,17 +24886,17 @@
                         <m:limLoc m:val="undOvr"/>
                         <m:supHide m:val="on"/>
                         <m:ctrlPr>
-                          <a:rPr lang="en-US" sz="1000" b="0" i="0" baseline="0" dirty="0" smtClean="0">
+                          <a:rPr lang="en-US" sz="1000" b="1" i="0" baseline="0" dirty="0" smtClean="0">
                             <a:latin typeface="Cambria Math" panose="02040503050406030204" pitchFamily="18" charset="0"/>
                           </a:rPr>
                         </m:ctrlPr>
                       </m:naryPr>
                       <m:sub>
                         <m:r>
-                          <a:rPr lang="en-US" sz="1000" b="0" i="0" baseline="0" dirty="0" smtClean="0">
-                            <a:latin typeface="Cambria Math" panose="02040503050406030204" pitchFamily="18" charset="0"/>
-                          </a:rPr>
-                          <m:t>𝑗</m:t>
+                          <a:rPr lang="en-US" sz="1000" b="1" i="0" baseline="0" dirty="0" smtClean="0">
+                            <a:latin typeface="Cambria Math" panose="02040503050406030204" pitchFamily="18" charset="0"/>
+                          </a:rPr>
+                          <m:t>𝐣</m:t>
                         </m:r>
                       </m:sub>
                       <m:sup/>
@@ -23725,29 +24907,29 @@
                             <m:limLoc m:val="undOvr"/>
                             <m:supHide m:val="on"/>
                             <m:ctrlPr>
-                              <a:rPr lang="en-US" sz="1000" b="0" i="0" baseline="0" dirty="0" smtClean="0">
+                              <a:rPr lang="en-US" sz="1000" b="1" i="0" baseline="0" dirty="0" smtClean="0">
                                 <a:latin typeface="Cambria Math" panose="02040503050406030204" pitchFamily="18" charset="0"/>
                               </a:rPr>
                             </m:ctrlPr>
                           </m:naryPr>
                           <m:sub>
                             <m:r>
-                              <a:rPr lang="en-US" sz="1000" b="0" i="0" baseline="0" dirty="0" smtClean="0">
+                              <a:rPr lang="en-US" sz="1000" b="1" i="0" baseline="0" dirty="0" smtClean="0">
                                 <a:latin typeface="Cambria Math" panose="02040503050406030204" pitchFamily="18" charset="0"/>
                               </a:rPr>
-                              <m:t>𝑖</m:t>
+                              <m:t>𝐢</m:t>
                             </m:r>
                             <m:r>
-                              <a:rPr lang="en-US" sz="1000" b="0" i="0" baseline="0" dirty="0" smtClean="0">
+                              <a:rPr lang="en-US" sz="1000" b="1" i="0" baseline="0" dirty="0" smtClean="0">
                                 <a:latin typeface="Cambria Math" panose="02040503050406030204" pitchFamily="18" charset="0"/>
                               </a:rPr>
                               <m:t>∈</m:t>
                             </m:r>
                             <m:r>
-                              <a:rPr lang="en-US" sz="1000" b="0" i="0" baseline="0" dirty="0" smtClean="0">
+                              <a:rPr lang="en-US" sz="1000" b="1" i="0" baseline="0" dirty="0" smtClean="0">
                                 <a:latin typeface="Cambria Math" panose="02040503050406030204" pitchFamily="18" charset="0"/>
                               </a:rPr>
-                              <m:t>𝑗</m:t>
+                              <m:t>𝐣</m:t>
                             </m:r>
                           </m:sub>
                           <m:sup/>
@@ -23755,7 +24937,7 @@
                             <m:sSup>
                               <m:sSupPr>
                                 <m:ctrlPr>
-                                  <a:rPr lang="en-US" sz="1000" b="0" i="1" baseline="0" dirty="0" smtClean="0">
+                                  <a:rPr lang="en-US" sz="1000" b="1" i="1" baseline="0" dirty="0" smtClean="0">
                                     <a:latin typeface="Cambria Math" panose="02040503050406030204" pitchFamily="18" charset="0"/>
                                   </a:rPr>
                                 </m:ctrlPr>
@@ -23764,7 +24946,7 @@
                                 <m:d>
                                   <m:dPr>
                                     <m:ctrlPr>
-                                      <a:rPr lang="en-US" sz="1000" b="0" i="1" baseline="0" dirty="0" smtClean="0">
+                                      <a:rPr lang="en-US" sz="1000" b="1" i="1" baseline="0" dirty="0" smtClean="0">
                                         <a:latin typeface="Cambria Math" panose="02040503050406030204" pitchFamily="18" charset="0"/>
                                       </a:rPr>
                                     </m:ctrlPr>
@@ -23773,7 +24955,7 @@
                                     <m:sSub>
                                       <m:sSubPr>
                                         <m:ctrlPr>
-                                          <a:rPr lang="en-US" sz="1000" b="0" i="1" baseline="0" dirty="0" smtClean="0">
+                                          <a:rPr lang="en-US" sz="1000" b="1" i="1" baseline="0" dirty="0" smtClean="0">
                                             <a:latin typeface="Cambria Math" panose="02040503050406030204" pitchFamily="18" charset="0"/>
                                           </a:rPr>
                                         </m:ctrlPr>
@@ -23783,32 +24965,32 @@
                                           <m:accPr>
                                             <m:chr m:val="ˆ"/>
                                             <m:ctrlPr>
-                                              <a:rPr lang="en-US" sz="1000" b="0" i="0" baseline="0" dirty="0" smtClean="0">
+                                              <a:rPr lang="en-US" sz="1000" b="1" i="0" baseline="0" dirty="0" smtClean="0">
                                                 <a:latin typeface="Cambria Math" panose="02040503050406030204" pitchFamily="18" charset="0"/>
                                               </a:rPr>
                                             </m:ctrlPr>
                                           </m:accPr>
                                           <m:e>
                                             <m:r>
-                                              <a:rPr lang="en-US" sz="1000" b="0" i="0" baseline="0" dirty="0" smtClean="0">
+                                              <a:rPr lang="en-US" sz="1000" b="1" i="0" baseline="0" dirty="0" smtClean="0">
                                                 <a:latin typeface="Cambria Math" panose="02040503050406030204" pitchFamily="18" charset="0"/>
                                               </a:rPr>
-                                              <m:t>𝐴</m:t>
+                                              <m:t>𝐀</m:t>
                                             </m:r>
                                           </m:e>
                                         </m:acc>
                                       </m:e>
                                       <m:sub>
                                         <m:r>
-                                          <a:rPr lang="en-US" sz="1000" b="0" i="0" baseline="0" dirty="0" smtClean="0">
+                                          <a:rPr lang="en-US" sz="1000" b="1" i="0" baseline="0" dirty="0" smtClean="0">
                                             <a:latin typeface="Cambria Math" panose="02040503050406030204" pitchFamily="18" charset="0"/>
                                           </a:rPr>
-                                          <m:t>𝑖</m:t>
+                                          <m:t>𝐢</m:t>
                                         </m:r>
                                       </m:sub>
                                     </m:sSub>
                                     <m:r>
-                                      <a:rPr lang="en-US" sz="1000" b="0" i="0" baseline="0" dirty="0" smtClean="0">
+                                      <a:rPr lang="en-US" sz="1000" b="1" i="0" baseline="0" dirty="0" smtClean="0">
                                         <a:latin typeface="Cambria Math" panose="02040503050406030204" pitchFamily="18" charset="0"/>
                                       </a:rPr>
                                       <m:t>−</m:t>
@@ -23816,7 +24998,7 @@
                                     <m:sSub>
                                       <m:sSubPr>
                                         <m:ctrlPr>
-                                          <a:rPr lang="en-US" sz="1000" b="0" i="1" baseline="0" dirty="0" smtClean="0">
+                                          <a:rPr lang="en-US" sz="1000" b="1" i="1" baseline="0" dirty="0" smtClean="0">
                                             <a:latin typeface="Cambria Math" panose="02040503050406030204" pitchFamily="18" charset="0"/>
                                           </a:rPr>
                                         </m:ctrlPr>
@@ -23826,27 +25008,27 @@
                                           <m:accPr>
                                             <m:chr m:val="ˆ"/>
                                             <m:ctrlPr>
-                                              <a:rPr lang="en-US" sz="1000" b="0" i="0" baseline="0" dirty="0" smtClean="0">
+                                              <a:rPr lang="en-US" sz="1000" b="1" i="0" baseline="0" dirty="0" smtClean="0">
                                                 <a:latin typeface="Cambria Math" panose="02040503050406030204" pitchFamily="18" charset="0"/>
                                               </a:rPr>
                                             </m:ctrlPr>
                                           </m:accPr>
                                           <m:e>
                                             <m:r>
-                                              <a:rPr lang="en-US" sz="1000" b="0" i="0" baseline="0" dirty="0" smtClean="0">
+                                              <a:rPr lang="en-US" sz="1000" b="1" i="0" baseline="0" dirty="0" smtClean="0">
                                                 <a:latin typeface="Cambria Math" panose="02040503050406030204" pitchFamily="18" charset="0"/>
                                               </a:rPr>
-                                              <m:t>𝑇</m:t>
+                                              <m:t>𝐓</m:t>
                                             </m:r>
                                           </m:e>
                                         </m:acc>
                                       </m:e>
                                       <m:sub>
                                         <m:r>
-                                          <a:rPr lang="en-US" sz="1000" b="0" i="0" baseline="0" dirty="0" smtClean="0">
+                                          <a:rPr lang="en-US" sz="1000" b="1" i="0" baseline="0" dirty="0" smtClean="0">
                                             <a:latin typeface="Cambria Math" panose="02040503050406030204" pitchFamily="18" charset="0"/>
                                           </a:rPr>
-                                          <m:t>𝑗</m:t>
+                                          <m:t>𝐣</m:t>
                                         </m:r>
                                       </m:sub>
                                     </m:sSub>
@@ -23855,10 +25037,10 @@
                               </m:e>
                               <m:sup>
                                 <m:r>
-                                  <a:rPr lang="en-US" sz="1000" b="0" i="0" baseline="0" dirty="0" smtClean="0">
+                                  <a:rPr lang="en-US" sz="1000" b="1" i="0" baseline="0" dirty="0" smtClean="0">
                                     <a:latin typeface="Cambria Math" panose="02040503050406030204" pitchFamily="18" charset="0"/>
                                   </a:rPr>
-                                  <m:t>2</m:t>
+                                  <m:t>𝟐</m:t>
                                 </m:r>
                               </m:sup>
                             </m:sSup>
@@ -24659,7 +25841,7 @@
             </p:txBody>
           </p:sp>
         </mc:Choice>
-        <mc:Fallback xmlns="">
+        <mc:Fallback>
           <p:sp>
             <p:nvSpPr>
               <p:cNvPr id="5" name="TextBox 4"/>
@@ -27673,8 +28855,8 @@
           <a:chExt cx="0" cy="0"/>
         </a:xfrm>
       </p:grpSpPr>
-      <mc:AlternateContent xmlns:mc="http://schemas.openxmlformats.org/markup-compatibility/2006" xmlns:a14="http://schemas.microsoft.com/office/drawing/2010/main">
-        <mc:Choice Requires="a14">
+      <mc:AlternateContent xmlns:mc="http://schemas.openxmlformats.org/markup-compatibility/2006">
+        <mc:Choice xmlns:a14="http://schemas.microsoft.com/office/drawing/2010/main" Requires="a14">
           <p:sp>
             <p:nvSpPr>
               <p:cNvPr id="2" name="TextBox 1"/>
@@ -27684,7 +28866,7 @@
             <p:spPr>
               <a:xfrm>
                 <a:off x="384048" y="219456"/>
-                <a:ext cx="4300344" cy="400110"/>
+                <a:ext cx="5254965" cy="400110"/>
               </a:xfrm>
               <a:prstGeom prst="rect">
                 <a:avLst/>
@@ -27750,11 +28932,20 @@
                   </a:rPr>
                   <a:t> distribution</a:t>
                 </a:r>
+                <a:r>
+                  <a:rPr lang="en-US" sz="2000" b="1" i="0" baseline="0" dirty="0">
+                    <a:latin typeface="Calibri"/>
+                  </a:rPr>
+                  <a:t> vs NCAA</a:t>
+                </a:r>
+                <a:endParaRPr sz="2000" b="1" i="0" baseline="0" dirty="0">
+                  <a:latin typeface="Calibri"/>
+                </a:endParaRPr>
               </a:p>
             </p:txBody>
           </p:sp>
         </mc:Choice>
-        <mc:Fallback xmlns="">
+        <mc:Fallback>
           <p:sp>
             <p:nvSpPr>
               <p:cNvPr id="2" name="TextBox 1"/>
@@ -27766,7 +28957,7 @@
             <p:spPr>
               <a:xfrm>
                 <a:off x="384048" y="219456"/>
-                <a:ext cx="4300344" cy="400110"/>
+                <a:ext cx="5254965" cy="400110"/>
               </a:xfrm>
               <a:prstGeom prst="rect">
                 <a:avLst/>
@@ -27774,7 +28965,7 @@
               <a:blipFill>
                 <a:blip r:embed="rId2"/>
                 <a:stretch>
-                  <a:fillRect l="-1475" t="-9375" r="-590" b="-28125"/>
+                  <a:fillRect l="-1205" t="-9375" b="-28125"/>
                 </a:stretch>
               </a:blipFill>
             </p:spPr>
@@ -27793,232 +28984,35 @@
           </p:sp>
         </mc:Fallback>
       </mc:AlternateContent>
-      <mc:AlternateContent xmlns:mc="http://schemas.openxmlformats.org/markup-compatibility/2006" xmlns:a14="http://schemas.microsoft.com/office/drawing/2010/main">
-        <mc:Choice Requires="a14">
-          <p:sp>
-            <p:nvSpPr>
-              <p:cNvPr id="3" name="TextBox 2"/>
-              <p:cNvSpPr txBox="1"/>
-              <p:nvPr/>
-            </p:nvSpPr>
-            <p:spPr>
-              <a:xfrm>
-                <a:off x="384048" y="713232"/>
-                <a:ext cx="4774127" cy="246221"/>
-              </a:xfrm>
-              <a:prstGeom prst="rect">
-                <a:avLst/>
-              </a:prstGeom>
-              <a:noFill/>
-            </p:spPr>
-            <p:txBody>
-              <a:bodyPr wrap="none">
-                <a:spAutoFit/>
-              </a:bodyPr>
-              <a:lstStyle/>
-              <a:p>
-                <a:r>
-                  <a:rPr sz="1000" b="0" i="0" baseline="0" dirty="0">
-                    <a:latin typeface="Calibri"/>
-                  </a:rPr>
-                  <a:t>MBB 2011-2021 · team smooth </a:t>
-                </a:r>
-                <a14:m>
-                  <m:oMath xmlns:m="http://schemas.openxmlformats.org/officeDocument/2006/math">
-                    <m:sSub>
-                      <m:sSubPr>
-                        <m:ctrlPr>
-                          <a:rPr lang="en-US" sz="1000" b="0" i="0" baseline="0" dirty="0">
-                            <a:latin typeface="Cambria Math" panose="02040503050406030204" pitchFamily="18" charset="0"/>
-                          </a:rPr>
-                        </m:ctrlPr>
-                      </m:sSubPr>
-                      <m:e>
-                        <m:r>
-                          <a:rPr lang="en-US" sz="1000" b="0" i="0" baseline="0" dirty="0">
-                            <a:latin typeface="Cambria Math" panose="02040503050406030204" pitchFamily="18" charset="0"/>
-                          </a:rPr>
-                          <m:t>𝐿</m:t>
-                        </m:r>
-                      </m:e>
-                      <m:sub>
-                        <m:r>
-                          <a:rPr lang="en-US" sz="1000" b="0" i="0" baseline="0" dirty="0">
-                            <a:latin typeface="Cambria Math" panose="02040503050406030204" pitchFamily="18" charset="0"/>
-                          </a:rPr>
-                          <m:t>𝐶</m:t>
-                        </m:r>
-                      </m:sub>
-                    </m:sSub>
-                  </m:oMath>
-                </a14:m>
-                <a:r>
-                  <a:rPr sz="1000" b="0" i="0" baseline="0" dirty="0">
-                    <a:latin typeface="Calibri"/>
-                  </a:rPr>
-                  <a:t> · </a:t>
-                </a:r>
-                <a:r>
-                  <a:rPr lang="en-US" sz="1000" b="0" i="0" baseline="0" dirty="0">
-                    <a:latin typeface="Calibri"/>
-                  </a:rPr>
-                  <a:t>LG</a:t>
-                </a:r>
-                <a:r>
-                  <a:rPr sz="1000" b="0" i="0" baseline="0" dirty="0">
-                    <a:latin typeface="Calibri"/>
-                  </a:rPr>
-                  <a:t> </a:t>
-                </a:r>
-                <a14:m>
-                  <m:oMath xmlns:m="http://schemas.openxmlformats.org/officeDocument/2006/math">
-                    <m:r>
-                      <a:rPr lang="en-US" sz="1000" b="0" i="0" baseline="0" dirty="0" smtClean="0">
-                        <a:latin typeface="Cambria Math" panose="02040503050406030204" pitchFamily="18" charset="0"/>
-                      </a:rPr>
-                      <m:t>𝜌</m:t>
-                    </m:r>
-                    <m:r>
-                      <a:rPr lang="en-US" sz="1000" b="0" i="0" baseline="0" dirty="0" smtClean="0">
-                        <a:latin typeface="Cambria Math" panose="02040503050406030204" pitchFamily="18" charset="0"/>
-                      </a:rPr>
-                      <m:t>=0.5</m:t>
-                    </m:r>
-                  </m:oMath>
-                </a14:m>
-                <a:r>
-                  <a:rPr sz="1000" b="0" i="0" baseline="0" dirty="0">
-                    <a:latin typeface="Calibri"/>
-                  </a:rPr>
-                  <a:t> · </a:t>
-                </a:r>
-                <a14:m>
-                  <m:oMath xmlns:m="http://schemas.openxmlformats.org/officeDocument/2006/math">
-                    <m:r>
-                      <a:rPr lang="en-US" sz="1000" b="0" i="0" baseline="0" dirty="0" smtClean="0">
-                        <a:latin typeface="Cambria Math" panose="02040503050406030204" pitchFamily="18" charset="0"/>
-                      </a:rPr>
-                      <m:t>𝛾</m:t>
-                    </m:r>
-                    <m:r>
-                      <a:rPr lang="en-US" sz="1000" b="0" i="0" baseline="0" dirty="0" smtClean="0">
-                        <a:latin typeface="Cambria Math" panose="02040503050406030204" pitchFamily="18" charset="0"/>
-                      </a:rPr>
-                      <m:t>=0.5</m:t>
-                    </m:r>
-                  </m:oMath>
-                </a14:m>
-                <a:r>
-                  <a:rPr sz="1000" b="0" i="0" baseline="0" dirty="0">
-                    <a:latin typeface="Calibri"/>
-                  </a:rPr>
-                  <a:t> · </a:t>
-                </a:r>
-                <a14:m>
-                  <m:oMath xmlns:m="http://schemas.openxmlformats.org/officeDocument/2006/math">
-                    <m:r>
-                      <a:rPr lang="en-US" sz="1000" b="0" i="0" baseline="0" dirty="0" smtClean="0">
-                        <a:latin typeface="Cambria Math" panose="02040503050406030204" pitchFamily="18" charset="0"/>
-                      </a:rPr>
-                      <m:t>𝜃</m:t>
-                    </m:r>
-                    <m:r>
-                      <a:rPr lang="en-US" sz="1000" b="0" i="0" baseline="0" dirty="0" smtClean="0">
-                        <a:latin typeface="Cambria Math" panose="02040503050406030204" pitchFamily="18" charset="0"/>
-                      </a:rPr>
-                      <m:t>=2.295 </m:t>
-                    </m:r>
-                    <m:r>
-                      <a:rPr lang="en-US" sz="1000" b="0" i="0" baseline="0" dirty="0" smtClean="0">
-                        <a:latin typeface="Cambria Math" panose="02040503050406030204" pitchFamily="18" charset="0"/>
-                      </a:rPr>
-                      <m:t>𝑧</m:t>
-                    </m:r>
-                  </m:oMath>
-                </a14:m>
-                <a:r>
-                  <a:rPr sz="1000" b="0" i="0" baseline="0" dirty="0">
-                    <a:latin typeface="Calibri"/>
-                  </a:rPr>
-                  <a:t> (</a:t>
-                </a:r>
-                <a14:m>
-                  <m:oMath xmlns:m="http://schemas.openxmlformats.org/officeDocument/2006/math">
-                    <m:r>
-                      <a:rPr lang="en-US" sz="1000" b="0" i="0" baseline="0" dirty="0" smtClean="0">
-                        <a:latin typeface="Cambria Math" panose="02040503050406030204" pitchFamily="18" charset="0"/>
-                      </a:rPr>
-                      <m:t>𝐾</m:t>
-                    </m:r>
-                    <m:r>
-                      <a:rPr lang="en-US" sz="1000" b="0" i="0" baseline="0" dirty="0" smtClean="0">
-                        <a:latin typeface="Cambria Math" panose="02040503050406030204" pitchFamily="18" charset="0"/>
-                      </a:rPr>
-                      <m:t>/</m:t>
-                    </m:r>
-                    <m:r>
-                      <a:rPr lang="en-US" sz="1000" b="0" i="0" baseline="0" dirty="0" smtClean="0">
-                        <a:latin typeface="Cambria Math" panose="02040503050406030204" pitchFamily="18" charset="0"/>
-                      </a:rPr>
-                      <m:t>𝑁</m:t>
-                    </m:r>
-                    <m:r>
-                      <a:rPr lang="en-US" sz="1000" b="0" i="0" baseline="0" dirty="0" smtClean="0">
-                        <a:latin typeface="Cambria Math" panose="02040503050406030204" pitchFamily="18" charset="0"/>
-                      </a:rPr>
-                      <m:t>=0.0182</m:t>
-                    </m:r>
-                  </m:oMath>
-                </a14:m>
-                <a:r>
-                  <a:rPr sz="1000" b="0" i="0" baseline="0" dirty="0">
-                    <a:latin typeface="Calibri"/>
-                  </a:rPr>
-                  <a:t>)</a:t>
-                </a:r>
-              </a:p>
-            </p:txBody>
-          </p:sp>
-        </mc:Choice>
-        <mc:Fallback xmlns="">
-          <p:sp>
-            <p:nvSpPr>
-              <p:cNvPr id="3" name="TextBox 2"/>
-              <p:cNvSpPr txBox="1">
-                <a:spLocks noRot="1" noChangeAspect="1" noMove="1" noResize="1" noEditPoints="1" noAdjustHandles="1" noChangeArrowheads="1" noChangeShapeType="1" noTextEdit="1"/>
-              </p:cNvSpPr>
-              <p:nvPr/>
-            </p:nvSpPr>
-            <p:spPr>
-              <a:xfrm>
-                <a:off x="384048" y="713232"/>
-                <a:ext cx="4774127" cy="246221"/>
-              </a:xfrm>
-              <a:prstGeom prst="rect">
-                <a:avLst/>
-              </a:prstGeom>
-              <a:blipFill>
-                <a:blip r:embed="rId3"/>
-                <a:stretch>
-                  <a:fillRect b="-10000"/>
-                </a:stretch>
-              </a:blipFill>
-            </p:spPr>
-            <p:txBody>
-              <a:bodyPr/>
-              <a:lstStyle/>
-              <a:p>
-                <a:r>
-                  <a:rPr lang="en-US">
-                    <a:noFill/>
-                  </a:rPr>
-                  <a:t> </a:t>
-                </a:r>
-              </a:p>
-            </p:txBody>
-          </p:sp>
-        </mc:Fallback>
-      </mc:AlternateContent>
+      <p:sp>
+        <p:nvSpPr>
+          <p:cNvPr id="3" name="TextBox 2"/>
+          <p:cNvSpPr txBox="1"/>
+          <p:nvPr/>
+        </p:nvSpPr>
+        <p:spPr>
+          <a:xfrm>
+            <a:off x="384048" y="713232"/>
+            <a:ext cx="3231975" cy="246221"/>
+          </a:xfrm>
+          <a:prstGeom prst="rect">
+            <a:avLst/>
+          </a:prstGeom>
+          <a:noFill/>
+        </p:spPr>
+        <p:txBody>
+          <a:bodyPr wrap="none">
+            <a:spAutoFit/>
+          </a:bodyPr>
+          <a:lstStyle/>
+          <a:p>
+            <a:r>
+              <a:rPr lang="en-US" sz="1000" dirty="0"/>
+              <a:t>MBB 2011-2021 · 6,492 team-seasons · NCAA mean=0.254</a:t>
+            </a:r>
+          </a:p>
+        </p:txBody>
+      </p:sp>
       <p:pic>
         <p:nvPicPr>
           <p:cNvPr id="4" name="Picture 3"/>
@@ -28028,7 +29022,7 @@
           <p:nvPr/>
         </p:nvPicPr>
         <p:blipFill>
-          <a:blip r:embed="rId4"/>
+          <a:blip r:embed="rId3"/>
           <a:srcRect/>
           <a:stretch/>
         </p:blipFill>
@@ -28042,8 +29036,8 @@
           </a:prstGeom>
         </p:spPr>
       </p:pic>
-      <mc:AlternateContent xmlns:mc="http://schemas.openxmlformats.org/markup-compatibility/2006" xmlns:a14="http://schemas.microsoft.com/office/drawing/2010/main">
-        <mc:Choice Requires="a14">
+      <mc:AlternateContent xmlns:mc="http://schemas.openxmlformats.org/markup-compatibility/2006">
+        <mc:Choice xmlns:a14="http://schemas.microsoft.com/office/drawing/2010/main" Requires="a14">
           <p:sp>
             <p:nvSpPr>
               <p:cNvPr id="5" name="TextBox 4"/>
@@ -28053,7 +29047,7 @@
             <p:spPr>
               <a:xfrm>
                 <a:off x="384048" y="1053119"/>
-                <a:ext cx="10605228" cy="1289028"/>
+                <a:ext cx="10605228" cy="973908"/>
               </a:xfrm>
               <a:prstGeom prst="rect">
                 <a:avLst/>
@@ -28073,24 +29067,22 @@
                   <a:buChar char="•"/>
                 </a:pPr>
                 <a:r>
-                  <a:rPr sz="1000" b="0" i="0" baseline="0" dirty="0">
-                    <a:latin typeface="Calibri"/>
-                  </a:rPr>
-                  <a:t>  Team </a:t>
+                  <a:rPr lang="en-US" sz="1000" dirty="0"/>
+                  <a:t> Team </a:t>
                 </a:r>
                 <a14:m>
                   <m:oMath xmlns:m="http://schemas.openxmlformats.org/officeDocument/2006/math">
                     <m:sSub>
                       <m:sSubPr>
                         <m:ctrlPr>
-                          <a:rPr lang="en-US" sz="1000" b="0" i="0" baseline="0" dirty="0">
+                          <a:rPr lang="en-US" sz="1000" i="1" dirty="0">
                             <a:latin typeface="Cambria Math" panose="02040503050406030204" pitchFamily="18" charset="0"/>
                           </a:rPr>
                         </m:ctrlPr>
                       </m:sSubPr>
                       <m:e>
                         <m:r>
-                          <a:rPr lang="en-US" sz="1000" b="0" i="0" baseline="0" dirty="0">
+                          <a:rPr lang="en-US" sz="1000" i="1" dirty="0">
                             <a:latin typeface="Cambria Math" panose="02040503050406030204" pitchFamily="18" charset="0"/>
                           </a:rPr>
                           <m:t>𝐿</m:t>
@@ -28098,146 +29090,18 @@
                       </m:e>
                       <m:sub>
                         <m:r>
-                          <a:rPr lang="en-US" sz="1000" b="0" i="0" baseline="0" dirty="0">
+                          <a:rPr lang="en-US" sz="1000" i="1" dirty="0">
                             <a:latin typeface="Cambria Math" panose="02040503050406030204" pitchFamily="18" charset="0"/>
                           </a:rPr>
                           <m:t>𝐶</m:t>
                         </m:r>
                       </m:sub>
                     </m:sSub>
-                    <m:r>
-                      <a:rPr lang="en-US" sz="1000" b="0" i="0" baseline="0" dirty="0">
-                        <a:latin typeface="Cambria Math" panose="02040503050406030204" pitchFamily="18" charset="0"/>
-                      </a:rPr>
-                      <m:t>=</m:t>
-                    </m:r>
-                    <m:r>
-                      <a:rPr lang="en-US" sz="1000" b="0" i="0" baseline="0" dirty="0">
-                        <a:latin typeface="Cambria Math" panose="02040503050406030204" pitchFamily="18" charset="0"/>
-                      </a:rPr>
-                      <m:t>𝑚𝑒𝑎</m:t>
-                    </m:r>
-                    <m:sSub>
-                      <m:sSubPr>
-                        <m:ctrlPr>
-                          <a:rPr lang="en-US" sz="1000" b="0" i="0" baseline="0" dirty="0">
-                            <a:latin typeface="Cambria Math" panose="02040503050406030204" pitchFamily="18" charset="0"/>
-                          </a:rPr>
-                        </m:ctrlPr>
-                      </m:sSubPr>
-                      <m:e>
-                        <m:r>
-                          <a:rPr lang="en-US" sz="1000" b="0" i="0" baseline="0" dirty="0">
-                            <a:latin typeface="Cambria Math" panose="02040503050406030204" pitchFamily="18" charset="0"/>
-                          </a:rPr>
-                          <m:t>𝑛</m:t>
-                        </m:r>
-                      </m:e>
-                      <m:sub>
-                        <m:r>
-                          <a:rPr lang="en-US" sz="1000" b="0" i="0" baseline="0" dirty="0">
-                            <a:latin typeface="Cambria Math" panose="02040503050406030204" pitchFamily="18" charset="0"/>
-                          </a:rPr>
-                          <m:t>𝑗</m:t>
-                        </m:r>
-                      </m:sub>
-                    </m:sSub>
-                    <m:r>
-                      <a:rPr lang="en-US" sz="1000" b="0" i="0" baseline="0" dirty="0" smtClean="0">
-                        <a:latin typeface="Cambria Math" panose="02040503050406030204" pitchFamily="18" charset="0"/>
-                      </a:rPr>
-                      <m:t> </m:t>
-                    </m:r>
-                    <m:r>
-                      <a:rPr lang="en-US" sz="1000" b="0" i="0" baseline="0" dirty="0">
-                        <a:latin typeface="Cambria Math" panose="02040503050406030204" pitchFamily="18" charset="0"/>
-                      </a:rPr>
-                      <m:t>𝜎</m:t>
-                    </m:r>
-                    <m:d>
-                      <m:dPr>
-                        <m:ctrlPr>
-                          <a:rPr lang="en-US" sz="1000" b="0" i="0" baseline="0" dirty="0">
-                            <a:latin typeface="Cambria Math" panose="02040503050406030204" pitchFamily="18" charset="0"/>
-                          </a:rPr>
-                        </m:ctrlPr>
-                      </m:dPr>
-                      <m:e>
-                        <m:r>
-                          <a:rPr lang="en-US" sz="1000" b="0" i="0" baseline="0" dirty="0">
-                            <a:latin typeface="Cambria Math" panose="02040503050406030204" pitchFamily="18" charset="0"/>
-                          </a:rPr>
-                          <m:t>𝛾</m:t>
-                        </m:r>
-                        <m:d>
-                          <m:dPr>
-                            <m:ctrlPr>
-                              <a:rPr lang="en-US" sz="1000" b="0" i="1" baseline="0" dirty="0">
-                                <a:latin typeface="Cambria Math" panose="02040503050406030204" pitchFamily="18" charset="0"/>
-                              </a:rPr>
-                            </m:ctrlPr>
-                          </m:dPr>
-                          <m:e>
-                            <m:sSub>
-                              <m:sSubPr>
-                                <m:ctrlPr>
-                                  <a:rPr lang="en-US" sz="1000" b="0" i="1" baseline="0" dirty="0">
-                                    <a:latin typeface="Cambria Math" panose="02040503050406030204" pitchFamily="18" charset="0"/>
-                                  </a:rPr>
-                                </m:ctrlPr>
-                              </m:sSubPr>
-                              <m:e>
-                                <m:acc>
-                                  <m:accPr>
-                                    <m:chr m:val="ˆ"/>
-                                    <m:ctrlPr>
-                                      <a:rPr lang="en-US" sz="1000" b="0" i="0" baseline="0" dirty="0">
-                                        <a:latin typeface="Cambria Math" panose="02040503050406030204" pitchFamily="18" charset="0"/>
-                                      </a:rPr>
-                                    </m:ctrlPr>
-                                  </m:accPr>
-                                  <m:e>
-                                    <m:r>
-                                      <a:rPr lang="en-US" sz="1000" b="0" i="0" baseline="0" dirty="0">
-                                        <a:latin typeface="Cambria Math" panose="02040503050406030204" pitchFamily="18" charset="0"/>
-                                      </a:rPr>
-                                      <m:t>𝐴</m:t>
-                                    </m:r>
-                                  </m:e>
-                                </m:acc>
-                              </m:e>
-                              <m:sub>
-                                <m:r>
-                                  <a:rPr lang="en-US" sz="1000" b="0" i="0" baseline="0" dirty="0">
-                                    <a:latin typeface="Cambria Math" panose="02040503050406030204" pitchFamily="18" charset="0"/>
-                                  </a:rPr>
-                                  <m:t>𝑗</m:t>
-                                </m:r>
-                              </m:sub>
-                            </m:sSub>
-                            <m:r>
-                              <a:rPr lang="en-US" sz="1000" b="0" i="0" baseline="0" dirty="0">
-                                <a:latin typeface="Cambria Math" panose="02040503050406030204" pitchFamily="18" charset="0"/>
-                              </a:rPr>
-                              <m:t>−</m:t>
-                            </m:r>
-                            <m:r>
-                              <a:rPr lang="en-US" sz="1000" b="0" i="0" baseline="0" dirty="0">
-                                <a:latin typeface="Cambria Math" panose="02040503050406030204" pitchFamily="18" charset="0"/>
-                              </a:rPr>
-                              <m:t>𝜃</m:t>
-                            </m:r>
-                          </m:e>
-                        </m:d>
-                      </m:e>
-                    </m:d>
-                  </m:oMath>
-                </a14:m>
-                <a:r>
-                  <a:rPr sz="1000" b="0" i="0" baseline="0" dirty="0">
-                    <a:latin typeface="Calibri"/>
-                  </a:rPr>
-                  <a:t> — team-smooth congestion.</a:t>
+                  </m:oMath>
+                </a14:m>
+                <a:r>
+                  <a:rPr lang="en-US" sz="1000" dirty="0"/>
+                  <a:t> after empirical-cap ASSIGN vs real NCAA rosters.</a:t>
                 </a:r>
               </a:p>
               <a:p>
@@ -28248,22 +29112,48 @@
                   <a:buChar char="•"/>
                 </a:pPr>
                 <a:r>
-                  <a:rPr sz="1000" b="0" i="0" baseline="0" dirty="0">
-                    <a:latin typeface="Calibri"/>
-                  </a:rPr>
-                  <a:t>  Left panel: empirical NCAA (real rosters). Right: </a:t>
-                </a:r>
-                <a:r>
-                  <a:rPr lang="en-US" sz="1000" b="0" i="0" baseline="0" dirty="0">
-                    <a:latin typeface="Calibri"/>
-                  </a:rPr>
-                  <a:t>LG</a:t>
-                </a:r>
-                <a:r>
-                  <a:rPr sz="1000" b="0" i="0" baseline="0" dirty="0">
-                    <a:latin typeface="Calibri"/>
-                  </a:rPr>
-                  <a:t> ASSIGN sim.</a:t>
+                  <a:rPr lang="en-US" sz="1000" dirty="0"/>
+                  <a:t>  MBB 2011-2021 · </a:t>
+                </a:r>
+                <a14:m>
+                  <m:oMath xmlns:m="http://schemas.openxmlformats.org/officeDocument/2006/math">
+                    <m:r>
+                      <a:rPr lang="en-US" sz="1000" i="1" dirty="0" smtClean="0">
+                        <a:latin typeface="Cambria Math" panose="02040503050406030204" pitchFamily="18" charset="0"/>
+                      </a:rPr>
+                      <m:t>𝜌</m:t>
+                    </m:r>
+                    <m:r>
+                      <a:rPr lang="en-US" sz="1000" i="0" dirty="0">
+                        <a:latin typeface="Cambria Math" panose="02040503050406030204" pitchFamily="18" charset="0"/>
+                      </a:rPr>
+                      <m:t>=0.5</m:t>
+                    </m:r>
+                  </m:oMath>
+                </a14:m>
+                <a:r>
+                  <a:rPr lang="en-US" sz="1000" dirty="0"/>
+                  <a:t>, </a:t>
+                </a:r>
+                <a14:m>
+                  <m:oMath xmlns:m="http://schemas.openxmlformats.org/officeDocument/2006/math">
+                    <m:r>
+                      <a:rPr lang="en-US" sz="1000" i="1" dirty="0" smtClean="0">
+                        <a:latin typeface="Cambria Math" panose="02040503050406030204" pitchFamily="18" charset="0"/>
+                      </a:rPr>
+                      <m:t>𝛾</m:t>
+                    </m:r>
+                    <m:r>
+                      <a:rPr lang="en-US" sz="1000" i="0" dirty="0">
+                        <a:latin typeface="Cambria Math" panose="02040503050406030204" pitchFamily="18" charset="0"/>
+                      </a:rPr>
+                      <m:t>=0.5</m:t>
+                    </m:r>
+                  </m:oMath>
+                </a14:m>
+                <a:r>
+                  <a:rPr lang="en-US" sz="1000" dirty="0"/>
+                  <a:t>.</a:t>
                 </a:r>
               </a:p>
               <a:p>
@@ -28274,25 +29164,67 @@
                   <a:buChar char="•"/>
                 </a:pPr>
                 <a:r>
-                  <a:rPr sz="1000" b="0" i="0" baseline="0" dirty="0">
-                    <a:latin typeface="Calibri"/>
-                  </a:rPr>
-                  <a:t>  Panel: MBB 2011-2021 · PPM z · min 20 min · poolq winsor </a:t>
-                </a:r>
-                <a14:m>
-                  <m:oMath xmlns:m="http://schemas.openxmlformats.org/officeDocument/2006/math">
-                    <m:r>
-                      <a:rPr lang="en-US" sz="1000" b="0" i="0" baseline="0" dirty="0" smtClean="0">
-                        <a:latin typeface="Cambria Math" panose="02040503050406030204" pitchFamily="18" charset="0"/>
-                      </a:rPr>
-                      <m:t>0.01–0.99</m:t>
-                    </m:r>
-                  </m:oMath>
-                </a14:m>
-                <a:r>
-                  <a:rPr sz="1000" b="0" i="0" baseline="0" dirty="0">
-                    <a:latin typeface="Calibri"/>
-                  </a:rPr>
+                  <a:rPr lang="en-US" sz="1000" dirty="0"/>
+                  <a:t>  NCAA: </a:t>
+                </a:r>
+                <a14:m>
+                  <m:oMath xmlns:m="http://schemas.openxmlformats.org/officeDocument/2006/math">
+                    <m:r>
+                      <a:rPr lang="en-US" sz="1000" i="1" dirty="0" smtClean="0">
+                        <a:latin typeface="Cambria Math" panose="02040503050406030204" pitchFamily="18" charset="0"/>
+                      </a:rPr>
+                      <m:t>𝑛</m:t>
+                    </m:r>
+                    <m:r>
+                      <a:rPr lang="en-US" sz="1000" i="0" dirty="0">
+                        <a:latin typeface="Cambria Math" panose="02040503050406030204" pitchFamily="18" charset="0"/>
+                      </a:rPr>
+                      <m:t>=6,492</m:t>
+                    </m:r>
+                  </m:oMath>
+                </a14:m>
+                <a:r>
+                  <a:rPr lang="en-US" sz="1000" dirty="0"/>
+                  <a:t> · mean </a:t>
+                </a:r>
+                <a14:m>
+                  <m:oMath xmlns:m="http://schemas.openxmlformats.org/officeDocument/2006/math">
+                    <m:r>
+                      <a:rPr lang="en-US" sz="1000" dirty="0" smtClean="0">
+                        <a:latin typeface="Cambria Math" panose="02040503050406030204" pitchFamily="18" charset="0"/>
+                      </a:rPr>
+                      <m:t>=</m:t>
+                    </m:r>
+                    <m:r>
+                      <a:rPr lang="en-US" sz="1000" i="0" dirty="0" smtClean="0">
+                        <a:latin typeface="Cambria Math" panose="02040503050406030204" pitchFamily="18" charset="0"/>
+                      </a:rPr>
+                      <m:t>0.254</m:t>
+                    </m:r>
+                  </m:oMath>
+                </a14:m>
+                <a:r>
+                  <a:rPr lang="en-US" sz="1000" dirty="0"/>
+                  <a:t> · sd </a:t>
+                </a:r>
+                <a14:m>
+                  <m:oMath xmlns:m="http://schemas.openxmlformats.org/officeDocument/2006/math">
+                    <m:r>
+                      <a:rPr lang="en-US" sz="1000" dirty="0" smtClean="0">
+                        <a:latin typeface="Cambria Math" panose="02040503050406030204" pitchFamily="18" charset="0"/>
+                      </a:rPr>
+                      <m:t>=</m:t>
+                    </m:r>
+                    <m:r>
+                      <a:rPr lang="en-US" sz="1000" i="0" dirty="0" smtClean="0">
+                        <a:latin typeface="Cambria Math" panose="02040503050406030204" pitchFamily="18" charset="0"/>
+                      </a:rPr>
+                      <m:t>0.039</m:t>
+                    </m:r>
+                  </m:oMath>
+                </a14:m>
+                <a:r>
+                  <a:rPr lang="en-US" sz="1000" dirty="0"/>
                   <a:t>.</a:t>
                 </a:r>
               </a:p>
@@ -28304,158 +29236,68 @@
                   <a:buChar char="•"/>
                 </a:pPr>
                 <a:r>
-                  <a:rPr sz="1000" b="0" i="0" baseline="0" dirty="0">
-                    <a:latin typeface="Calibri"/>
-                  </a:rPr>
-                  <a:t>  Shared </a:t>
-                </a:r>
-                <a14:m>
-                  <m:oMath xmlns:m="http://schemas.openxmlformats.org/officeDocument/2006/math">
-                    <m:r>
-                      <a:rPr lang="en-US" sz="1000" b="0" i="0" baseline="0" dirty="0" smtClean="0">
-                        <a:latin typeface="Cambria Math" panose="02040503050406030204" pitchFamily="18" charset="0"/>
-                      </a:rPr>
-                      <m:t>𝜃</m:t>
-                    </m:r>
-                    <m:r>
-                      <a:rPr lang="en-US" sz="1000" b="0" i="0" baseline="0" dirty="0" smtClean="0">
+                  <a:rPr lang="en-US" sz="1000" dirty="0"/>
+                  <a:t>  LG empirical caps: </a:t>
+                </a:r>
+                <a14:m>
+                  <m:oMath xmlns:m="http://schemas.openxmlformats.org/officeDocument/2006/math">
+                    <m:r>
+                      <a:rPr lang="en-US" sz="1000" i="1" dirty="0" smtClean="0">
+                        <a:latin typeface="Cambria Math" panose="02040503050406030204" pitchFamily="18" charset="0"/>
+                      </a:rPr>
+                      <m:t>𝑛</m:t>
+                    </m:r>
+                    <m:r>
+                      <a:rPr lang="en-US" sz="1000" i="0" dirty="0">
+                        <a:latin typeface="Cambria Math" panose="02040503050406030204" pitchFamily="18" charset="0"/>
+                      </a:rPr>
+                      <m:t>=6,492</m:t>
+                    </m:r>
+                  </m:oMath>
+                </a14:m>
+                <a:r>
+                  <a:rPr lang="en-US" sz="1000" dirty="0"/>
+                  <a:t> · mean </a:t>
+                </a:r>
+                <a14:m>
+                  <m:oMath xmlns:m="http://schemas.openxmlformats.org/officeDocument/2006/math">
+                    <m:r>
+                      <a:rPr lang="en-US" sz="1000" dirty="0" smtClean="0">
                         <a:latin typeface="Cambria Math" panose="02040503050406030204" pitchFamily="18" charset="0"/>
                       </a:rPr>
                       <m:t>=</m:t>
                     </m:r>
-                    <m:sSubSup>
-                      <m:sSubSupPr>
-                        <m:ctrlPr>
-                          <a:rPr lang="en-US" sz="1000" b="0" i="0" baseline="0" dirty="0">
-                            <a:latin typeface="Cambria Math" panose="02040503050406030204" pitchFamily="18" charset="0"/>
-                          </a:rPr>
-                        </m:ctrlPr>
-                      </m:sSubSupPr>
-                      <m:e>
-                        <m:r>
-                          <a:rPr lang="en-US" sz="1000" b="0" i="0" baseline="0" dirty="0">
-                            <a:latin typeface="Cambria Math" panose="02040503050406030204" pitchFamily="18" charset="0"/>
-                          </a:rPr>
-                          <m:t>𝐹</m:t>
-                        </m:r>
-                      </m:e>
-                      <m:sub>
-                        <m:acc>
-                          <m:accPr>
-                            <m:chr m:val="ˆ"/>
-                            <m:ctrlPr>
-                              <a:rPr lang="en-US" sz="1000" b="0" i="0" baseline="0" dirty="0">
-                                <a:latin typeface="Cambria Math" panose="02040503050406030204" pitchFamily="18" charset="0"/>
-                              </a:rPr>
-                            </m:ctrlPr>
-                          </m:accPr>
-                          <m:e>
-                            <m:r>
-                              <a:rPr lang="en-US" sz="1000" b="0" i="0" baseline="0" dirty="0">
-                                <a:latin typeface="Cambria Math" panose="02040503050406030204" pitchFamily="18" charset="0"/>
-                              </a:rPr>
-                              <m:t>𝐴</m:t>
-                            </m:r>
-                          </m:e>
-                        </m:acc>
-                      </m:sub>
-                      <m:sup>
-                        <m:r>
-                          <a:rPr lang="en-US" sz="1000" b="0" i="0" baseline="0" dirty="0">
-                            <a:latin typeface="Cambria Math" panose="02040503050406030204" pitchFamily="18" charset="0"/>
-                          </a:rPr>
-                          <m:t>−1</m:t>
-                        </m:r>
-                      </m:sup>
-                    </m:sSubSup>
-                    <m:d>
-                      <m:dPr>
-                        <m:ctrlPr>
-                          <a:rPr lang="en-US" sz="1000" b="0" i="0" baseline="0" dirty="0">
-                            <a:latin typeface="Cambria Math" panose="02040503050406030204" pitchFamily="18" charset="0"/>
-                          </a:rPr>
-                        </m:ctrlPr>
-                      </m:dPr>
-                      <m:e>
-                        <m:r>
-                          <a:rPr lang="en-US" sz="1000" b="0" i="0" baseline="0" dirty="0">
-                            <a:latin typeface="Cambria Math" panose="02040503050406030204" pitchFamily="18" charset="0"/>
-                          </a:rPr>
-                          <m:t>1−</m:t>
-                        </m:r>
-                        <m:r>
-                          <a:rPr lang="en-US" sz="1000" b="0" i="0" baseline="0" dirty="0">
-                            <a:latin typeface="Cambria Math" panose="02040503050406030204" pitchFamily="18" charset="0"/>
-                          </a:rPr>
-                          <m:t>𝐾</m:t>
-                        </m:r>
-                        <m:r>
-                          <a:rPr lang="en-US" sz="1000" b="0" i="0" baseline="0" dirty="0">
-                            <a:latin typeface="Cambria Math" panose="02040503050406030204" pitchFamily="18" charset="0"/>
-                          </a:rPr>
-                          <m:t>/</m:t>
-                        </m:r>
-                        <m:r>
-                          <a:rPr lang="en-US" sz="1000" b="0" i="0" baseline="0" dirty="0">
-                            <a:latin typeface="Cambria Math" panose="02040503050406030204" pitchFamily="18" charset="0"/>
-                          </a:rPr>
-                          <m:t>𝑁</m:t>
-                        </m:r>
-                      </m:e>
-                    </m:d>
-                    <m:r>
-                      <a:rPr lang="en-US" sz="1000" b="0" i="0" baseline="0" dirty="0">
-                        <a:latin typeface="Cambria Math" panose="02040503050406030204" pitchFamily="18" charset="0"/>
-                      </a:rPr>
-                      <m:t>=2.295</m:t>
-                    </m:r>
-                    <m:r>
-                      <a:rPr lang="en-US" sz="1000" b="0" i="0" baseline="0" dirty="0">
-                        <a:latin typeface="Cambria Math" panose="02040503050406030204" pitchFamily="18" charset="0"/>
-                      </a:rPr>
-                      <m:t>𝑧</m:t>
-                    </m:r>
-                  </m:oMath>
-                </a14:m>
-                <a:r>
-                  <a:rPr sz="1000" b="0" i="0" baseline="0" dirty="0">
-                    <a:latin typeface="Calibri"/>
-                  </a:rPr>
-                  <a:t> (</a:t>
-                </a:r>
-                <a14:m>
-                  <m:oMath xmlns:m="http://schemas.openxmlformats.org/officeDocument/2006/math">
-                    <m:r>
-                      <a:rPr lang="en-US" sz="1000" b="0" i="0" baseline="0" dirty="0" smtClean="0">
-                        <a:latin typeface="Cambria Math" panose="02040503050406030204" pitchFamily="18" charset="0"/>
-                      </a:rPr>
-                      <m:t>𝐾</m:t>
-                    </m:r>
-                    <m:r>
-                      <a:rPr lang="en-US" sz="1000" b="0" i="0" baseline="0" dirty="0" smtClean="0">
-                        <a:latin typeface="Cambria Math" panose="02040503050406030204" pitchFamily="18" charset="0"/>
-                      </a:rPr>
-                      <m:t>/</m:t>
-                    </m:r>
-                    <m:r>
-                      <a:rPr lang="en-US" sz="1000" b="0" i="0" baseline="0" dirty="0" smtClean="0">
-                        <a:latin typeface="Cambria Math" panose="02040503050406030204" pitchFamily="18" charset="0"/>
-                      </a:rPr>
-                      <m:t>𝑁</m:t>
-                    </m:r>
-                    <m:r>
-                      <a:rPr lang="en-US" sz="1000" b="0" i="0" baseline="0" dirty="0" smtClean="0">
-                        <a:latin typeface="Cambria Math" panose="02040503050406030204" pitchFamily="18" charset="0"/>
-                      </a:rPr>
-                      <m:t>=0.0182</m:t>
-                    </m:r>
-                  </m:oMath>
-                </a14:m>
-                <a:r>
-                  <a:rPr sz="1000" b="0" i="0" baseline="0" dirty="0">
-                    <a:latin typeface="Calibri"/>
-                  </a:rPr>
-                  <a:t>).</a:t>
+                    <m:r>
+                      <a:rPr lang="en-US" sz="1000" i="0" dirty="0" smtClean="0">
+                        <a:latin typeface="Cambria Math" panose="02040503050406030204" pitchFamily="18" charset="0"/>
+                      </a:rPr>
+                      <m:t>0.251</m:t>
+                    </m:r>
+                  </m:oMath>
+                </a14:m>
+                <a:r>
+                  <a:rPr lang="en-US" sz="1000" dirty="0"/>
+                  <a:t> · sd </a:t>
+                </a:r>
+                <a14:m>
+                  <m:oMath xmlns:m="http://schemas.openxmlformats.org/officeDocument/2006/math">
+                    <m:r>
+                      <a:rPr lang="en-US" sz="1000" dirty="0" smtClean="0">
+                        <a:latin typeface="Cambria Math" panose="02040503050406030204" pitchFamily="18" charset="0"/>
+                      </a:rPr>
+                      <m:t>=</m:t>
+                    </m:r>
+                    <m:r>
+                      <a:rPr lang="en-US" sz="1000" i="0" dirty="0" smtClean="0">
+                        <a:latin typeface="Cambria Math" panose="02040503050406030204" pitchFamily="18" charset="0"/>
+                      </a:rPr>
+                      <m:t>0.045</m:t>
+                    </m:r>
+                  </m:oMath>
+                </a14:m>
+                <a:r>
+                  <a:rPr lang="en-US" sz="1000" dirty="0"/>
+                  <a:t>.</a:t>
                 </a:r>
               </a:p>
               <a:p>
@@ -28466,32 +29308,68 @@
                   <a:buChar char="•"/>
                 </a:pPr>
                 <a:r>
-                  <a:rPr sz="1000" b="0" i="0" baseline="0" dirty="0">
-                    <a:latin typeface="Calibri"/>
-                  </a:rPr>
-                  <a:t>  </a:t>
-                </a:r>
-                <a14:m>
-                  <m:oMath xmlns:m="http://schemas.openxmlformats.org/officeDocument/2006/math">
-                    <m:r>
-                      <a:rPr lang="en-US" sz="1000" b="0" i="0" baseline="0" dirty="0" smtClean="0">
-                        <a:latin typeface="Cambria Math" panose="02040503050406030204" pitchFamily="18" charset="0"/>
-                      </a:rPr>
-                      <m:t>𝛾</m:t>
-                    </m:r>
-                    <m:r>
-                      <a:rPr lang="en-US" sz="1000" b="0" i="0" baseline="0" dirty="0" smtClean="0">
-                        <a:latin typeface="Cambria Math" panose="02040503050406030204" pitchFamily="18" charset="0"/>
-                      </a:rPr>
-                      <m:t>=0.5</m:t>
-                    </m:r>
-                  </m:oMath>
-                </a14:m>
-                <a:r>
-                  <a:rPr sz="1000" b="0" i="0" baseline="0" dirty="0">
-                    <a:latin typeface="Calibri"/>
-                  </a:rPr>
-                  <a:t> (HAND17 slide-4 default; 539 placeholder).</a:t>
+                  <a:rPr lang="en-US" sz="1000" dirty="0"/>
+                  <a:t>  Team count now aligned (</a:t>
+                </a:r>
+                <a14:m>
+                  <m:oMath xmlns:m="http://schemas.openxmlformats.org/officeDocument/2006/math">
+                    <m:r>
+                      <a:rPr lang="en-US" sz="1000" dirty="0" smtClean="0">
+                        <a:latin typeface="Cambria Math" panose="02040503050406030204" pitchFamily="18" charset="0"/>
+                      </a:rPr>
+                      <m:t>6</m:t>
+                    </m:r>
+                    <m:r>
+                      <a:rPr lang="en-US" sz="1000" i="0" dirty="0">
+                        <a:latin typeface="Cambria Math" panose="02040503050406030204" pitchFamily="18" charset="0"/>
+                      </a:rPr>
+                      <m:t>,492</m:t>
+                    </m:r>
+                  </m:oMath>
+                </a14:m>
+                <a:r>
+                  <a:rPr lang="en-US" sz="1000" dirty="0"/>
+                  <a:t>) — fixed </a:t>
+                </a:r>
+                <a14:m>
+                  <m:oMath xmlns:m="http://schemas.openxmlformats.org/officeDocument/2006/math">
+                    <m:r>
+                      <a:rPr lang="en-US" sz="1000" i="1" dirty="0" smtClean="0">
+                        <a:latin typeface="Cambria Math" panose="02040503050406030204" pitchFamily="18" charset="0"/>
+                      </a:rPr>
+                      <m:t>𝐶</m:t>
+                    </m:r>
+                    <m:r>
+                      <a:rPr lang="en-US" sz="1000" i="0" dirty="0">
+                        <a:latin typeface="Cambria Math" panose="02040503050406030204" pitchFamily="18" charset="0"/>
+                      </a:rPr>
+                      <m:t>=15</m:t>
+                    </m:r>
+                  </m:oMath>
+                </a14:m>
+                <a:r>
+                  <a:rPr lang="en-US" sz="1000" dirty="0"/>
+                  <a:t> had only </a:t>
+                </a:r>
+                <a14:m>
+                  <m:oMath xmlns:m="http://schemas.openxmlformats.org/officeDocument/2006/math">
+                    <m:r>
+                      <a:rPr lang="en-US" sz="1000" dirty="0" smtClean="0">
+                        <a:latin typeface="Cambria Math" panose="02040503050406030204" pitchFamily="18" charset="0"/>
+                      </a:rPr>
+                      <m:t>4</m:t>
+                    </m:r>
+                    <m:r>
+                      <a:rPr lang="en-US" sz="1000" i="0" dirty="0">
+                        <a:latin typeface="Cambria Math" panose="02040503050406030204" pitchFamily="18" charset="0"/>
+                      </a:rPr>
+                      <m:t>,140</m:t>
+                    </m:r>
+                  </m:oMath>
+                </a14:m>
+                <a:r>
+                  <a:rPr lang="en-US" sz="1000" dirty="0"/>
+                  <a:t> teams.</a:t>
                 </a:r>
               </a:p>
               <a:p>
@@ -28502,24 +29380,22 @@
                   <a:buChar char="•"/>
                 </a:pPr>
                 <a:r>
-                  <a:rPr sz="1000" b="0" i="0" baseline="0" dirty="0">
-                    <a:latin typeface="Calibri"/>
-                  </a:rPr>
-                  <a:t>  Empirical: mean </a:t>
+                  <a:rPr lang="en-US" sz="1000" dirty="0"/>
+                  <a:t>  </a:t>
                 </a:r>
                 <a14:m>
                   <m:oMath xmlns:m="http://schemas.openxmlformats.org/officeDocument/2006/math">
                     <m:sSub>
                       <m:sSubPr>
                         <m:ctrlPr>
-                          <a:rPr lang="en-US" sz="1000" b="0" i="0" baseline="0" dirty="0">
+                          <a:rPr lang="en-US" sz="1000" i="1" dirty="0" smtClean="0">
                             <a:latin typeface="Cambria Math" panose="02040503050406030204" pitchFamily="18" charset="0"/>
                           </a:rPr>
                         </m:ctrlPr>
                       </m:sSubPr>
                       <m:e>
                         <m:r>
-                          <a:rPr lang="en-US" sz="1000" b="0" i="0" baseline="0" dirty="0">
+                          <a:rPr lang="en-US" sz="1000" i="1" dirty="0" smtClean="0">
                             <a:latin typeface="Cambria Math" panose="02040503050406030204" pitchFamily="18" charset="0"/>
                           </a:rPr>
                           <m:t>𝐿</m:t>
@@ -28527,58 +29403,18 @@
                       </m:e>
                       <m:sub>
                         <m:r>
-                          <a:rPr lang="en-US" sz="1000" b="0" i="0" baseline="0" dirty="0">
+                          <a:rPr lang="en-US" sz="1000" i="1" dirty="0" smtClean="0">
                             <a:latin typeface="Cambria Math" panose="02040503050406030204" pitchFamily="18" charset="0"/>
                           </a:rPr>
                           <m:t>𝐶</m:t>
                         </m:r>
                       </m:sub>
                     </m:sSub>
-                    <m:r>
-                      <a:rPr lang="en-US" sz="1000" b="0" i="0" baseline="0" dirty="0">
-                        <a:latin typeface="Cambria Math" panose="02040503050406030204" pitchFamily="18" charset="0"/>
-                      </a:rPr>
-                      <m:t>=0.254</m:t>
-                    </m:r>
-                  </m:oMath>
-                </a14:m>
-                <a:r>
-                  <a:rPr sz="1000" b="0" i="0" baseline="0" dirty="0">
-                    <a:latin typeface="Calibri"/>
-                  </a:rPr>
-                  <a:t>, sd</a:t>
-                </a:r>
-                <a14:m>
-                  <m:oMath xmlns:m="http://schemas.openxmlformats.org/officeDocument/2006/math">
-                    <m:r>
-                      <a:rPr lang="en-US" sz="1000" b="0" i="0" baseline="0" dirty="0" smtClean="0">
-                        <a:latin typeface="Cambria Math" panose="02040503050406030204" pitchFamily="18" charset="0"/>
-                      </a:rPr>
-                      <m:t>=0.039</m:t>
-                    </m:r>
-                  </m:oMath>
-                </a14:m>
-                <a:r>
-                  <a:rPr sz="1000" b="0" i="0" baseline="0" dirty="0">
-                    <a:latin typeface="Calibri"/>
-                  </a:rPr>
-                  <a:t> (</a:t>
-                </a:r>
-                <a14:m>
-                  <m:oMath xmlns:m="http://schemas.openxmlformats.org/officeDocument/2006/math">
-                    <m:r>
-                      <a:rPr lang="en-US" sz="1000" b="0" i="0" baseline="0" dirty="0" smtClean="0">
-                        <a:latin typeface="Cambria Math" panose="02040503050406030204" pitchFamily="18" charset="0"/>
-                      </a:rPr>
-                      <m:t>6,492</m:t>
-                    </m:r>
-                  </m:oMath>
-                </a14:m>
-                <a:r>
-                  <a:rPr sz="1000" b="0" i="0" baseline="0" dirty="0">
-                    <a:latin typeface="Calibri"/>
-                  </a:rPr>
-                  <a:t> team-seasons).</a:t>
+                  </m:oMath>
+                </a14:m>
+                <a:r>
+                  <a:rPr lang="en-US" sz="1000" dirty="0"/>
+                  <a:t> first moment still matches; slightly wider LG tail (assign noise).</a:t>
                 </a:r>
               </a:p>
               <a:p>
@@ -28589,117 +29425,8 @@
                   <a:buChar char="•"/>
                 </a:pPr>
                 <a:r>
-                  <a:rPr sz="1000" b="0" i="0" baseline="0" dirty="0">
-                    <a:latin typeface="Calibri"/>
-                  </a:rPr>
-                  <a:t>  </a:t>
-                </a:r>
-                <a:r>
-                  <a:rPr lang="en-US" sz="1000" b="0" i="0" baseline="0" dirty="0">
-                    <a:latin typeface="Calibri"/>
-                  </a:rPr>
-                  <a:t>LG</a:t>
-                </a:r>
-                <a:r>
-                  <a:rPr sz="1000" b="0" i="0" baseline="0" dirty="0">
-                    <a:latin typeface="Calibri"/>
-                  </a:rPr>
-                  <a:t> (</a:t>
-                </a:r>
-                <a14:m>
-                  <m:oMath xmlns:m="http://schemas.openxmlformats.org/officeDocument/2006/math">
-                    <m:r>
-                      <a:rPr lang="en-US" sz="1000" b="0" i="0" baseline="0" dirty="0" smtClean="0">
-                        <a:latin typeface="Cambria Math" panose="02040503050406030204" pitchFamily="18" charset="0"/>
-                      </a:rPr>
-                      <m:t>𝜌</m:t>
-                    </m:r>
-                    <m:r>
-                      <a:rPr lang="en-US" sz="1000" b="0" i="0" baseline="0" dirty="0" smtClean="0">
-                        <a:latin typeface="Cambria Math" panose="02040503050406030204" pitchFamily="18" charset="0"/>
-                      </a:rPr>
-                      <m:t>=0.5</m:t>
-                    </m:r>
-                  </m:oMath>
-                </a14:m>
-                <a:r>
-                  <a:rPr sz="1000" b="0" i="0" baseline="0" dirty="0">
-                    <a:latin typeface="Calibri"/>
-                  </a:rPr>
-                  <a:t>): mean </a:t>
-                </a:r>
-                <a14:m>
-                  <m:oMath xmlns:m="http://schemas.openxmlformats.org/officeDocument/2006/math">
-                    <m:sSub>
-                      <m:sSubPr>
-                        <m:ctrlPr>
-                          <a:rPr lang="en-US" sz="1000" b="0" i="0" baseline="0" dirty="0">
-                            <a:latin typeface="Cambria Math" panose="02040503050406030204" pitchFamily="18" charset="0"/>
-                          </a:rPr>
-                        </m:ctrlPr>
-                      </m:sSubPr>
-                      <m:e>
-                        <m:r>
-                          <a:rPr lang="en-US" sz="1000" b="0" i="0" baseline="0" dirty="0">
-                            <a:latin typeface="Cambria Math" panose="02040503050406030204" pitchFamily="18" charset="0"/>
-                          </a:rPr>
-                          <m:t>𝐿</m:t>
-                        </m:r>
-                      </m:e>
-                      <m:sub>
-                        <m:r>
-                          <a:rPr lang="en-US" sz="1000" b="0" i="0" baseline="0" dirty="0">
-                            <a:latin typeface="Cambria Math" panose="02040503050406030204" pitchFamily="18" charset="0"/>
-                          </a:rPr>
-                          <m:t>𝐶</m:t>
-                        </m:r>
-                      </m:sub>
-                    </m:sSub>
-                    <m:r>
-                      <a:rPr lang="en-US" sz="1000" b="0" i="0" baseline="0" dirty="0">
-                        <a:latin typeface="Cambria Math" panose="02040503050406030204" pitchFamily="18" charset="0"/>
-                      </a:rPr>
-                      <m:t>=0.251</m:t>
-                    </m:r>
-                  </m:oMath>
-                </a14:m>
-                <a:r>
-                  <a:rPr sz="1000" b="0" i="0" baseline="0" dirty="0">
-                    <a:latin typeface="Calibri"/>
-                  </a:rPr>
-                  <a:t>, sd</a:t>
-                </a:r>
-                <a14:m>
-                  <m:oMath xmlns:m="http://schemas.openxmlformats.org/officeDocument/2006/math">
-                    <m:r>
-                      <a:rPr lang="en-US" sz="1000" b="0" i="0" baseline="0" dirty="0" smtClean="0">
-                        <a:latin typeface="Cambria Math" panose="02040503050406030204" pitchFamily="18" charset="0"/>
-                      </a:rPr>
-                      <m:t>=0.036</m:t>
-                    </m:r>
-                  </m:oMath>
-                </a14:m>
-                <a:r>
-                  <a:rPr sz="1000" b="0" i="0" baseline="0" dirty="0">
-                    <a:latin typeface="Calibri"/>
-                  </a:rPr>
-                  <a:t> (</a:t>
-                </a:r>
-                <a14:m>
-                  <m:oMath xmlns:m="http://schemas.openxmlformats.org/officeDocument/2006/math">
-                    <m:r>
-                      <a:rPr lang="en-US" sz="1000" b="0" i="0" baseline="0" dirty="0" smtClean="0">
-                        <a:latin typeface="Cambria Math" panose="02040503050406030204" pitchFamily="18" charset="0"/>
-                      </a:rPr>
-                      <m:t>4,140</m:t>
-                    </m:r>
-                  </m:oMath>
-                </a14:m>
-                <a:r>
-                  <a:rPr sz="1000" b="0" i="0" baseline="0" dirty="0">
-                    <a:latin typeface="Calibri"/>
-                  </a:rPr>
-                  <a:t> team-seasons).</a:t>
+                  <a:rPr lang="en-US" sz="1000" dirty="0"/>
+                  <a:t>  Input comparability fixed; SCORE/SELECT shape is a separate question.</a:t>
                 </a:r>
               </a:p>
               <a:p>
@@ -28707,114 +29434,15 @@
                   <a:lnSpc>
                     <a:spcPct val="150000"/>
                   </a:lnSpc>
-                  <a:buChar char="•"/>
                 </a:pPr>
-                <a:r>
-                  <a:rPr sz="1000" b="0" i="0" baseline="0" dirty="0">
-                    <a:latin typeface="Calibri"/>
-                  </a:rPr>
-                  <a:t>  Sim: one </a:t>
-                </a:r>
-                <a:r>
-                  <a:rPr lang="en-US" sz="1000" b="0" i="0" baseline="0" dirty="0">
-                    <a:latin typeface="Calibri"/>
-                  </a:rPr>
-                  <a:t>LG</a:t>
-                </a:r>
-                <a:r>
-                  <a:rPr sz="1000" b="0" i="0" baseline="0" dirty="0">
-                    <a:latin typeface="Calibri"/>
-                  </a:rPr>
-                  <a:t> league per season (</a:t>
-                </a:r>
-                <a14:m>
-                  <m:oMath xmlns:m="http://schemas.openxmlformats.org/officeDocument/2006/math">
-                    <m:r>
-                      <a:rPr lang="en-US" sz="1000" b="0" i="0" baseline="0" dirty="0" smtClean="0">
-                        <a:latin typeface="Cambria Math" panose="02040503050406030204" pitchFamily="18" charset="0"/>
-                      </a:rPr>
-                      <m:t>𝐽</m:t>
-                    </m:r>
-                    <m:r>
-                      <a:rPr lang="en-US" sz="1000" b="0" i="0" baseline="0" dirty="0" smtClean="0">
-                        <a:latin typeface="Cambria Math" panose="02040503050406030204" pitchFamily="18" charset="0"/>
-                      </a:rPr>
-                      <m:t>=</m:t>
-                    </m:r>
-                    <m:r>
-                      <a:rPr lang="en-US" sz="1000" b="0" i="0" baseline="0" dirty="0" smtClean="0">
-                        <a:latin typeface="Cambria Math" panose="02040503050406030204" pitchFamily="18" charset="0"/>
-                      </a:rPr>
-                      <m:t>𝑁</m:t>
-                    </m:r>
-                    <m:r>
-                      <a:rPr lang="en-US" sz="1000" b="0" i="0" baseline="0" dirty="0" smtClean="0">
-                        <a:latin typeface="Cambria Math" panose="02040503050406030204" pitchFamily="18" charset="0"/>
-                      </a:rPr>
-                      <m:t>/15</m:t>
-                    </m:r>
-                  </m:oMath>
-                </a14:m>
-                <a:r>
-                  <a:rPr sz="1000" b="0" i="0" baseline="0" dirty="0">
-                    <a:latin typeface="Calibri"/>
-                  </a:rPr>
-                  <a:t>), stacked team-seasons.</a:t>
-                </a:r>
-              </a:p>
-              <a:p>
-                <a:pPr>
-                  <a:lnSpc>
-                    <a:spcPct val="150000"/>
-                  </a:lnSpc>
-                  <a:buChar char="•"/>
-                </a:pPr>
-                <a:r>
-                  <a:rPr sz="1000" b="0" i="0" baseline="0" dirty="0">
-                    <a:latin typeface="Calibri"/>
-                  </a:rPr>
-                  <a:t>  ASSIGN shapes rosters; </a:t>
-                </a:r>
-                <a14:m>
-                  <m:oMath xmlns:m="http://schemas.openxmlformats.org/officeDocument/2006/math">
-                    <m:sSub>
-                      <m:sSubPr>
-                        <m:ctrlPr>
-                          <a:rPr lang="en-US" sz="1000" b="0" i="0" baseline="0" dirty="0">
-                            <a:latin typeface="Cambria Math" panose="02040503050406030204" pitchFamily="18" charset="0"/>
-                          </a:rPr>
-                        </m:ctrlPr>
-                      </m:sSubPr>
-                      <m:e>
-                        <m:r>
-                          <a:rPr lang="en-US" sz="1000" b="0" i="0" baseline="0" dirty="0">
-                            <a:latin typeface="Cambria Math" panose="02040503050406030204" pitchFamily="18" charset="0"/>
-                          </a:rPr>
-                          <m:t>𝐿</m:t>
-                        </m:r>
-                      </m:e>
-                      <m:sub>
-                        <m:r>
-                          <a:rPr lang="en-US" sz="1000" b="0" i="0" baseline="0" dirty="0">
-                            <a:latin typeface="Cambria Math" panose="02040503050406030204" pitchFamily="18" charset="0"/>
-                          </a:rPr>
-                          <m:t>𝐶</m:t>
-                        </m:r>
-                      </m:sub>
-                    </m:sSub>
-                  </m:oMath>
-                </a14:m>
-                <a:r>
-                  <a:rPr sz="1000" b="0" i="0" baseline="0" dirty="0">
-                    <a:latin typeface="Calibri"/>
-                  </a:rPr>
-                  <a:t> is score-side input — computed after assign.</a:t>
-                </a:r>
+                <a:endParaRPr sz="1000" b="0" i="0" baseline="0" dirty="0">
+                  <a:latin typeface="Calibri"/>
+                </a:endParaRPr>
               </a:p>
             </p:txBody>
           </p:sp>
         </mc:Choice>
-        <mc:Fallback xmlns="">
+        <mc:Fallback>
           <p:sp>
             <p:nvSpPr>
               <p:cNvPr id="5" name="TextBox 4"/>
@@ -28826,15 +29454,15 @@
             <p:spPr>
               <a:xfrm>
                 <a:off x="384048" y="1053119"/>
-                <a:ext cx="10605228" cy="1289028"/>
+                <a:ext cx="10605228" cy="973908"/>
               </a:xfrm>
               <a:prstGeom prst="rect">
                 <a:avLst/>
               </a:prstGeom>
               <a:blipFill>
-                <a:blip r:embed="rId5"/>
+                <a:blip r:embed="rId4"/>
                 <a:stretch>
-                  <a:fillRect/>
+                  <a:fillRect b="-5195"/>
                 </a:stretch>
               </a:blipFill>
             </p:spPr>
@@ -28853,232 +29481,35 @@
           </p:sp>
         </mc:Fallback>
       </mc:AlternateContent>
-      <mc:AlternateContent xmlns:mc="http://schemas.openxmlformats.org/markup-compatibility/2006" xmlns:a14="http://schemas.microsoft.com/office/drawing/2010/main">
-        <mc:Choice Requires="a14">
-          <p:sp>
-            <p:nvSpPr>
-              <p:cNvPr id="6" name="TextBox 5"/>
-              <p:cNvSpPr txBox="1"/>
-              <p:nvPr/>
-            </p:nvSpPr>
-            <p:spPr>
-              <a:xfrm>
-                <a:off x="384048" y="6053328"/>
-                <a:ext cx="11423599" cy="345672"/>
-              </a:xfrm>
-              <a:prstGeom prst="rect">
-                <a:avLst/>
-              </a:prstGeom>
-              <a:noFill/>
-            </p:spPr>
-            <p:txBody>
-              <a:bodyPr wrap="square">
-                <a:spAutoFit/>
-              </a:bodyPr>
-              <a:lstStyle/>
-              <a:p>
-                <a:pPr algn="l"/>
-                <a:r>
-                  <a:rPr sz="1100" b="1" i="0" baseline="0" dirty="0">
-                    <a:latin typeface="Calibri"/>
-                  </a:rPr>
-                  <a:t>Claim (PD17 / </a:t>
-                </a:r>
-                <a:r>
-                  <a:rPr lang="en-US" sz="1100" b="1" i="0" baseline="0" dirty="0">
-                    <a:latin typeface="Calibri"/>
-                  </a:rPr>
-                  <a:t>LG</a:t>
-                </a:r>
-                <a:r>
-                  <a:rPr sz="1100" b="1" i="0" baseline="0" dirty="0">
-                    <a:latin typeface="Calibri"/>
-                  </a:rPr>
-                  <a:t>): Team smooth </a:t>
-                </a:r>
-                <a14:m>
-                  <m:oMath xmlns:m="http://schemas.openxmlformats.org/officeDocument/2006/math">
-                    <m:sSub>
-                      <m:sSubPr>
-                        <m:ctrlPr>
-                          <a:rPr lang="en-US" sz="1100" b="1" i="0" baseline="0" dirty="0">
-                            <a:latin typeface="Cambria Math" panose="02040503050406030204" pitchFamily="18" charset="0"/>
-                          </a:rPr>
-                        </m:ctrlPr>
-                      </m:sSubPr>
-                      <m:e>
-                        <m:r>
-                          <a:rPr lang="en-US" sz="1100" b="1" i="0" baseline="0" dirty="0">
-                            <a:latin typeface="Cambria Math" panose="02040503050406030204" pitchFamily="18" charset="0"/>
-                          </a:rPr>
-                          <m:t>𝐿</m:t>
-                        </m:r>
-                      </m:e>
-                      <m:sub>
-                        <m:r>
-                          <a:rPr lang="en-US" sz="1100" b="1" i="0" baseline="0" dirty="0">
-                            <a:latin typeface="Cambria Math" panose="02040503050406030204" pitchFamily="18" charset="0"/>
-                          </a:rPr>
-                          <m:t>𝐶</m:t>
-                        </m:r>
-                      </m:sub>
-                    </m:sSub>
-                  </m:oMath>
-                </a14:m>
-                <a:r>
-                  <a:rPr sz="1100" b="1" i="0" baseline="0" dirty="0">
-                    <a:latin typeface="Calibri"/>
-                  </a:rPr>
-                  <a:t> on real rosters vs </a:t>
-                </a:r>
-                <a:r>
-                  <a:rPr lang="en-US" sz="1100" b="1" i="0" baseline="0" dirty="0">
-                    <a:latin typeface="Calibri"/>
-                  </a:rPr>
-                  <a:t>LG</a:t>
-                </a:r>
-                <a:r>
-                  <a:rPr sz="1100" b="1" i="0" baseline="0" dirty="0">
-                    <a:latin typeface="Calibri"/>
-                  </a:rPr>
-                  <a:t> sim — same </a:t>
-                </a:r>
-                <a14:m>
-                  <m:oMath xmlns:m="http://schemas.openxmlformats.org/officeDocument/2006/math">
-                    <m:r>
-                      <a:rPr lang="en-US" sz="1100" b="1" i="0" baseline="0" dirty="0" smtClean="0">
-                        <a:latin typeface="Cambria Math" panose="02040503050406030204" pitchFamily="18" charset="0"/>
-                      </a:rPr>
-                      <m:t>𝜎</m:t>
-                    </m:r>
-                    <m:d>
-                      <m:dPr>
-                        <m:ctrlPr>
-                          <a:rPr lang="en-US" sz="1100" b="1" i="0" baseline="0" dirty="0" smtClean="0">
-                            <a:latin typeface="Cambria Math" panose="02040503050406030204" pitchFamily="18" charset="0"/>
-                          </a:rPr>
-                        </m:ctrlPr>
-                      </m:dPr>
-                      <m:e>
-                        <m:r>
-                          <a:rPr lang="en-US" sz="1100" b="1" i="0" baseline="0" dirty="0" smtClean="0">
-                            <a:latin typeface="Cambria Math" panose="02040503050406030204" pitchFamily="18" charset="0"/>
-                          </a:rPr>
-                          <m:t>𝛾</m:t>
-                        </m:r>
-                        <m:d>
-                          <m:dPr>
-                            <m:ctrlPr>
-                              <a:rPr lang="en-US" sz="1100" b="1" i="1" baseline="0" dirty="0" smtClean="0">
-                                <a:latin typeface="Cambria Math" panose="02040503050406030204" pitchFamily="18" charset="0"/>
-                              </a:rPr>
-                            </m:ctrlPr>
-                          </m:dPr>
-                          <m:e>
-                            <m:sSub>
-                              <m:sSubPr>
-                                <m:ctrlPr>
-                                  <a:rPr lang="en-US" sz="1100" b="1" i="1" baseline="0" dirty="0" smtClean="0">
-                                    <a:latin typeface="Cambria Math" panose="02040503050406030204" pitchFamily="18" charset="0"/>
-                                  </a:rPr>
-                                </m:ctrlPr>
-                              </m:sSubPr>
-                              <m:e>
-                                <m:acc>
-                                  <m:accPr>
-                                    <m:chr m:val="ˆ"/>
-                                    <m:ctrlPr>
-                                      <a:rPr lang="en-US" sz="1100" b="1" i="0" baseline="0" dirty="0" smtClean="0">
-                                        <a:latin typeface="Cambria Math" panose="02040503050406030204" pitchFamily="18" charset="0"/>
-                                      </a:rPr>
-                                    </m:ctrlPr>
-                                  </m:accPr>
-                                  <m:e>
-                                    <m:r>
-                                      <a:rPr lang="en-US" sz="1100" b="1" i="0" baseline="0" dirty="0" smtClean="0">
-                                        <a:latin typeface="Cambria Math" panose="02040503050406030204" pitchFamily="18" charset="0"/>
-                                      </a:rPr>
-                                      <m:t>𝐴</m:t>
-                                    </m:r>
-                                  </m:e>
-                                </m:acc>
-                              </m:e>
-                              <m:sub>
-                                <m:r>
-                                  <a:rPr lang="en-US" sz="1100" b="1" i="0" baseline="0" dirty="0" smtClean="0">
-                                    <a:latin typeface="Cambria Math" panose="02040503050406030204" pitchFamily="18" charset="0"/>
-                                  </a:rPr>
-                                  <m:t>𝑗</m:t>
-                                </m:r>
-                              </m:sub>
-                            </m:sSub>
-                            <m:r>
-                              <a:rPr lang="en-US" sz="1100" b="1" i="0" baseline="0" dirty="0" smtClean="0">
-                                <a:latin typeface="Cambria Math" panose="02040503050406030204" pitchFamily="18" charset="0"/>
-                              </a:rPr>
-                              <m:t>−</m:t>
-                            </m:r>
-                            <m:r>
-                              <a:rPr lang="en-US" sz="1100" b="1" i="0" baseline="0" dirty="0" smtClean="0">
-                                <a:latin typeface="Cambria Math" panose="02040503050406030204" pitchFamily="18" charset="0"/>
-                              </a:rPr>
-                              <m:t>𝜃</m:t>
-                            </m:r>
-                          </m:e>
-                        </m:d>
-                      </m:e>
-                    </m:d>
-                  </m:oMath>
-                </a14:m>
-                <a:r>
-                  <a:rPr sz="1100" b="1" i="0" baseline="0" dirty="0">
-                    <a:latin typeface="Calibri"/>
-                  </a:rPr>
-                  <a:t> formula; compare distribution shape before SCORE.</a:t>
-                </a:r>
-              </a:p>
-            </p:txBody>
-          </p:sp>
-        </mc:Choice>
-        <mc:Fallback xmlns="">
-          <p:sp>
-            <p:nvSpPr>
-              <p:cNvPr id="6" name="TextBox 5"/>
-              <p:cNvSpPr txBox="1">
-                <a:spLocks noRot="1" noChangeAspect="1" noMove="1" noResize="1" noEditPoints="1" noAdjustHandles="1" noChangeArrowheads="1" noChangeShapeType="1" noTextEdit="1"/>
-              </p:cNvSpPr>
-              <p:nvPr/>
-            </p:nvSpPr>
-            <p:spPr>
-              <a:xfrm>
-                <a:off x="384048" y="6053328"/>
-                <a:ext cx="11423599" cy="345672"/>
-              </a:xfrm>
-              <a:prstGeom prst="rect">
-                <a:avLst/>
-              </a:prstGeom>
-              <a:blipFill>
-                <a:blip r:embed="rId6"/>
-                <a:stretch>
-                  <a:fillRect/>
-                </a:stretch>
-              </a:blipFill>
-            </p:spPr>
-            <p:txBody>
-              <a:bodyPr/>
-              <a:lstStyle/>
-              <a:p>
-                <a:r>
-                  <a:rPr lang="en-US">
-                    <a:noFill/>
-                  </a:rPr>
-                  <a:t> </a:t>
-                </a:r>
-              </a:p>
-            </p:txBody>
-          </p:sp>
-        </mc:Fallback>
-      </mc:AlternateContent>
+      <p:sp>
+        <p:nvSpPr>
+          <p:cNvPr id="6" name="TextBox 5"/>
+          <p:cNvSpPr txBox="1"/>
+          <p:nvPr/>
+        </p:nvSpPr>
+        <p:spPr>
+          <a:xfrm>
+            <a:off x="384048" y="6142847"/>
+            <a:ext cx="11423599" cy="261610"/>
+          </a:xfrm>
+          <a:prstGeom prst="rect">
+            <a:avLst/>
+          </a:prstGeom>
+          <a:noFill/>
+        </p:spPr>
+        <p:txBody>
+          <a:bodyPr wrap="square">
+            <a:spAutoFit/>
+          </a:bodyPr>
+          <a:lstStyle/>
+          <a:p>
+            <a:r>
+              <a:rPr lang="en-US" sz="1100" b="1" dirty="0"/>
+              <a:t>Talking point: comparability achieved — same team count and L_C mean; assignment layer is now apples-to-apples on roster geometry.</a:t>
+            </a:r>
+          </a:p>
+        </p:txBody>
+      </p:sp>
     </p:spTree>
   </p:cSld>
   <p:clrMapOvr>

--- a/3-Master_Plan/re_entry/HEROs_and_PASSes/slides/CHAR_PD17_HAND.pptx
+++ b/3-Master_Plan/re_entry/HEROs_and_PASSes/slides/CHAR_PD17_HAND.pptx
@@ -5917,8 +5917,8 @@
             </p:nvSpPr>
             <p:spPr>
               <a:xfrm>
-                <a:off x="6984337" y="1264044"/>
-                <a:ext cx="4411913" cy="5146794"/>
+                <a:off x="6908535" y="1393171"/>
+                <a:ext cx="4411913" cy="4089196"/>
               </a:xfrm>
               <a:prstGeom prst="rect">
                 <a:avLst/>
@@ -5931,43 +5931,30 @@
               </a:bodyPr>
               <a:lstStyle/>
               <a:p>
-                <a:pPr>
-                  <a:lnSpc>
-                    <a:spcPct val="150000"/>
-                  </a:lnSpc>
-                </a:pPr>
-                <a:r>
-                  <a:rPr lang="en-US" sz="1000" b="0" i="0" baseline="0" dirty="0">
-                    <a:latin typeface="Calibri"/>
-                  </a:rPr>
+                <a:r>
+                  <a:rPr lang="en-US" sz="1100" b="1" dirty="0"/>
                   <a:t>Block A — Empirical inputs &amp; overlap</a:t>
                 </a:r>
-              </a:p>
-              <a:p>
-                <a:pPr lvl="1">
-                  <a:lnSpc>
-                    <a:spcPct val="150000"/>
-                  </a:lnSpc>
-                </a:pPr>
-                <a:r>
-                  <a:rPr lang="en-US" sz="1000" b="0" i="0" baseline="0" dirty="0">
-                    <a:latin typeface="Calibri"/>
-                  </a:rPr>
-                  <a:t>Slide 2 — </a:t>
+                <a:br>
+                  <a:rPr lang="en-US" sz="1100" dirty="0"/>
+                </a:br>
+                <a:r>
+                  <a:rPr lang="en-US" sz="1100" dirty="0"/>
+                  <a:t>	2 · </a:t>
                 </a:r>
                 <a14:m>
                   <m:oMath xmlns:m="http://schemas.openxmlformats.org/officeDocument/2006/math">
                     <m:sSub>
                       <m:sSubPr>
                         <m:ctrlPr>
-                          <a:rPr lang="en-US" sz="1000" b="0" i="0" baseline="0" dirty="0" err="1" smtClean="0">
+                          <a:rPr lang="en-US" sz="1100" i="1" dirty="0" smtClean="0">
                             <a:latin typeface="Cambria Math" panose="02040503050406030204" pitchFamily="18" charset="0"/>
                           </a:rPr>
                         </m:ctrlPr>
                       </m:sSubPr>
                       <m:e>
                         <m:r>
-                          <a:rPr lang="en-US" sz="1000" b="0" i="0" baseline="0" dirty="0" err="1" smtClean="0">
+                          <a:rPr lang="en-US" sz="1100" i="1" dirty="0" smtClean="0">
                             <a:latin typeface="Cambria Math" panose="02040503050406030204" pitchFamily="18" charset="0"/>
                           </a:rPr>
                           <m:t>Â</m:t>
@@ -5975,40 +5962,622 @@
                       </m:e>
                       <m:sub>
                         <m:r>
-                          <a:rPr lang="en-US" sz="1000" b="0" i="0" baseline="0" dirty="0" err="1" smtClean="0">
+                          <a:rPr lang="en-US" sz="1100" i="1" dirty="0" smtClean="0">
                             <a:latin typeface="Cambria Math" panose="02040503050406030204" pitchFamily="18" charset="0"/>
                           </a:rPr>
                           <m:t>𝑖</m:t>
                         </m:r>
                       </m:sub>
                     </m:sSub>
-                  </m:oMath>
-                </a14:m>
-                <a:r>
-                  <a:rPr lang="en-US" sz="1000" b="0" i="0" baseline="0" dirty="0">
-                    <a:latin typeface="Calibri"/>
-                  </a:rPr>
-                  <a:t>, </a:t>
-                </a:r>
-                <a14:m>
-                  <m:oMath xmlns:m="http://schemas.openxmlformats.org/officeDocument/2006/math">
-                    <m:r>
-                      <a:rPr lang="en-US" sz="1000" b="0" i="0" baseline="0" dirty="0" smtClean="0">
-                        <a:latin typeface="Cambria Math" panose="02040503050406030204" pitchFamily="18" charset="0"/>
-                      </a:rPr>
-                      <m:t>𝑇</m:t>
+                    <m:r>
+                      <a:rPr lang="en-US" sz="1100" i="1" dirty="0" smtClean="0">
+                        <a:latin typeface="Cambria Math" panose="02040503050406030204" pitchFamily="18" charset="0"/>
+                      </a:rPr>
+                      <m:t>, </m:t>
                     </m:r>
                     <m:sSub>
                       <m:sSubPr>
                         <m:ctrlPr>
-                          <a:rPr lang="en-US" sz="1000" b="0" i="0" baseline="0" dirty="0" err="1" smtClean="0">
+                          <a:rPr lang="en-US" sz="1100" i="1" dirty="0" err="1" smtClean="0">
+                            <a:latin typeface="Cambria Math" panose="02040503050406030204" pitchFamily="18" charset="0"/>
+                          </a:rPr>
+                        </m:ctrlPr>
+                      </m:sSubPr>
+                      <m:e>
+                        <m:acc>
+                          <m:accPr>
+                            <m:chr m:val="̂"/>
+                            <m:ctrlPr>
+                              <a:rPr lang="en-US" sz="1100" i="1" dirty="0" err="1" smtClean="0">
+                                <a:latin typeface="Cambria Math" panose="02040503050406030204" pitchFamily="18" charset="0"/>
+                              </a:rPr>
+                            </m:ctrlPr>
+                          </m:accPr>
+                          <m:e>
+                            <m:r>
+                              <a:rPr lang="en-US" sz="1100" i="1" dirty="0" err="1" smtClean="0">
+                                <a:latin typeface="Cambria Math" panose="02040503050406030204" pitchFamily="18" charset="0"/>
+                              </a:rPr>
+                              <m:t>𝑇</m:t>
+                            </m:r>
+                          </m:e>
+                        </m:acc>
+                      </m:e>
+                      <m:sub>
+                        <m:r>
+                          <a:rPr lang="en-US" sz="1100" i="1" dirty="0" err="1" smtClean="0">
+                            <a:latin typeface="Cambria Math" panose="02040503050406030204" pitchFamily="18" charset="0"/>
+                          </a:rPr>
+                          <m:t>𝑗</m:t>
+                        </m:r>
+                      </m:sub>
+                    </m:sSub>
+                  </m:oMath>
+                </a14:m>
+                <a:r>
+                  <a:rPr lang="en-US" sz="1100" dirty="0"/>
+                  <a:t>inputs (2011–2021)</a:t>
+                </a:r>
+                <a:br>
+                  <a:rPr lang="en-US" sz="1100" dirty="0"/>
+                </a:br>
+                <a:r>
+                  <a:rPr lang="en-US" sz="1100" dirty="0"/>
+                  <a:t>	3 · NCAA interval overlap (full panel)</a:t>
+                </a:r>
+                <a:br>
+                  <a:rPr lang="en-US" sz="1100" dirty="0"/>
+                </a:br>
+                <a:r>
+                  <a:rPr lang="en-US" sz="1100" dirty="0"/>
+                  <a:t>	4–5 · NCAA vs LG intervals (2015–2019 window)</a:t>
+                </a:r>
+              </a:p>
+              <a:p>
+                <a:r>
+                  <a:rPr lang="en-US" sz="1100" b="1" dirty="0"/>
+                  <a:t>Block B — LG </a:t>
+                </a:r>
+                <a14:m>
+                  <m:oMath xmlns:m="http://schemas.openxmlformats.org/officeDocument/2006/math">
+                    <m:r>
+                      <a:rPr lang="en-US" sz="1100" b="1" i="1" dirty="0" smtClean="0">
+                        <a:latin typeface="Cambria Math" panose="02040503050406030204" pitchFamily="18" charset="0"/>
+                      </a:rPr>
+                      <m:t>𝜌</m:t>
+                    </m:r>
+                  </m:oMath>
+                </a14:m>
+                <a:r>
+                  <a:rPr lang="en-US" sz="1100" b="1" dirty="0"/>
+                  <a:t> validation (ASSIGN)</a:t>
+                </a:r>
+                <a:br>
+                  <a:rPr lang="en-US" sz="1100" dirty="0"/>
+                </a:br>
+                <a:r>
+                  <a:rPr lang="en-US" sz="1100" dirty="0"/>
+                  <a:t>	6 · global_wss vs </a:t>
+                </a:r>
+                <a14:m>
+                  <m:oMath xmlns:m="http://schemas.openxmlformats.org/officeDocument/2006/math">
+                    <m:r>
+                      <a:rPr lang="en-US" sz="1100" i="1" dirty="0" smtClean="0">
+                        <a:latin typeface="Cambria Math" panose="02040503050406030204" pitchFamily="18" charset="0"/>
+                      </a:rPr>
+                      <m:t>𝜌</m:t>
+                    </m:r>
+                  </m:oMath>
+                </a14:m>
+                <a:r>
+                  <a:rPr lang="en-US" sz="1100" dirty="0"/>
+                  <a:t> (primary)</a:t>
+                </a:r>
+                <a:br>
+                  <a:rPr lang="en-US" sz="1100" dirty="0"/>
+                </a:br>
+                <a:r>
+                  <a:rPr lang="en-US" sz="1100" dirty="0"/>
+                  <a:t>	7 · </a:t>
+                </a:r>
+                <a14:m>
+                  <m:oMath xmlns:m="http://schemas.openxmlformats.org/officeDocument/2006/math">
+                    <m:sSub>
+                      <m:sSubPr>
+                        <m:ctrlPr>
+                          <a:rPr lang="en-US" sz="1100" i="1" dirty="0" smtClean="0">
                             <a:latin typeface="Cambria Math" panose="02040503050406030204" pitchFamily="18" charset="0"/>
                           </a:rPr>
                         </m:ctrlPr>
                       </m:sSubPr>
                       <m:e>
                         <m:r>
-                          <a:rPr lang="en-US" sz="1000" b="0" i="0" baseline="0" dirty="0" err="1" smtClean="0">
+                          <a:rPr lang="en-US" sz="1100" i="1" dirty="0" smtClean="0">
+                            <a:latin typeface="Cambria Math" panose="02040503050406030204" pitchFamily="18" charset="0"/>
+                          </a:rPr>
+                          <m:t>𝐻</m:t>
+                        </m:r>
+                      </m:e>
+                      <m:sub>
+                        <m:r>
+                          <a:rPr lang="en-US" sz="1100" i="1" dirty="0" smtClean="0">
+                            <a:latin typeface="Cambria Math" panose="02040503050406030204" pitchFamily="18" charset="0"/>
+                          </a:rPr>
+                          <m:t>𝑠𝑜𝑟𝑡</m:t>
+                        </m:r>
+                      </m:sub>
+                    </m:sSub>
+                  </m:oMath>
+                </a14:m>
+                <a:r>
+                  <a:rPr lang="en-US" sz="1100" dirty="0"/>
+                  <a:t> glossary + </a:t>
+                </a:r>
+                <a14:m>
+                  <m:oMath xmlns:m="http://schemas.openxmlformats.org/officeDocument/2006/math">
+                    <m:r>
+                      <a:rPr lang="en-US" sz="1100" i="1" dirty="0" smtClean="0">
+                        <a:latin typeface="Cambria Math" panose="02040503050406030204" pitchFamily="18" charset="0"/>
+                      </a:rPr>
+                      <m:t>𝜌</m:t>
+                    </m:r>
+                  </m:oMath>
+                </a14:m>
+                <a:r>
+                  <a:rPr lang="en-US" sz="1100" dirty="0"/>
+                  <a:t> inset</a:t>
+                </a:r>
+              </a:p>
+              <a:p>
+                <a:r>
+                  <a:rPr lang="en-US" sz="1100" b="1" dirty="0"/>
+                  <a:t>Block C — Team </a:t>
+                </a:r>
+                <a14:m>
+                  <m:oMath xmlns:m="http://schemas.openxmlformats.org/officeDocument/2006/math">
+                    <m:sSub>
+                      <m:sSubPr>
+                        <m:ctrlPr>
+                          <a:rPr lang="en-US" sz="1100" b="1" i="1" dirty="0" smtClean="0">
+                            <a:latin typeface="Cambria Math" panose="02040503050406030204" pitchFamily="18" charset="0"/>
+                          </a:rPr>
+                        </m:ctrlPr>
+                      </m:sSubPr>
+                      <m:e>
+                        <m:r>
+                          <a:rPr lang="en-US" sz="1100" b="1" i="1" dirty="0" smtClean="0">
+                            <a:latin typeface="Cambria Math" panose="02040503050406030204" pitchFamily="18" charset="0"/>
+                          </a:rPr>
+                          <m:t>𝑳</m:t>
+                        </m:r>
+                      </m:e>
+                      <m:sub>
+                        <m:r>
+                          <a:rPr lang="en-US" sz="1100" b="1" i="1" dirty="0" smtClean="0">
+                            <a:latin typeface="Cambria Math" panose="02040503050406030204" pitchFamily="18" charset="0"/>
+                          </a:rPr>
+                          <m:t>𝑪</m:t>
+                        </m:r>
+                      </m:sub>
+                    </m:sSub>
+                  </m:oMath>
+                </a14:m>
+                <a:r>
+                  <a:rPr lang="en-US" sz="1100" b="1" dirty="0"/>
+                  <a:t> on real rosters (SCORE input)</a:t>
+                </a:r>
+                <a:br>
+                  <a:rPr lang="en-US" sz="1100" dirty="0"/>
+                </a:br>
+                <a:r>
+                  <a:rPr lang="en-US" sz="1100" dirty="0"/>
+                  <a:t>	8 · Empirical team </a:t>
+                </a:r>
+                <a14:m>
+                  <m:oMath xmlns:m="http://schemas.openxmlformats.org/officeDocument/2006/math">
+                    <m:sSub>
+                      <m:sSubPr>
+                        <m:ctrlPr>
+                          <a:rPr lang="en-US" sz="1100" i="1" dirty="0" smtClean="0">
+                            <a:latin typeface="Cambria Math" panose="02040503050406030204" pitchFamily="18" charset="0"/>
+                          </a:rPr>
+                        </m:ctrlPr>
+                      </m:sSubPr>
+                      <m:e>
+                        <m:r>
+                          <a:rPr lang="en-US" sz="1100" i="1" dirty="0" smtClean="0">
+                            <a:latin typeface="Cambria Math" panose="02040503050406030204" pitchFamily="18" charset="0"/>
+                          </a:rPr>
+                          <m:t>𝐿</m:t>
+                        </m:r>
+                      </m:e>
+                      <m:sub>
+                        <m:r>
+                          <a:rPr lang="en-US" sz="1100" i="1" dirty="0" smtClean="0">
+                            <a:latin typeface="Cambria Math" panose="02040503050406030204" pitchFamily="18" charset="0"/>
+                          </a:rPr>
+                          <m:t>𝐶</m:t>
+                        </m:r>
+                      </m:sub>
+                    </m:sSub>
+                    <m:d>
+                      <m:dPr>
+                        <m:ctrlPr>
+                          <a:rPr lang="en-US" sz="1100" i="1" dirty="0" smtClean="0">
+                            <a:latin typeface="Cambria Math" panose="02040503050406030204" pitchFamily="18" charset="0"/>
+                          </a:rPr>
+                        </m:ctrlPr>
+                      </m:dPr>
+                      <m:e>
+                        <m:r>
+                          <a:rPr lang="en-US" sz="1100" i="1" dirty="0" smtClean="0">
+                            <a:latin typeface="Cambria Math" panose="02040503050406030204" pitchFamily="18" charset="0"/>
+                          </a:rPr>
+                          <m:t>𝛾</m:t>
+                        </m:r>
+                        <m:r>
+                          <a:rPr lang="en-US" sz="1100" i="1" dirty="0" smtClean="0">
+                            <a:latin typeface="Cambria Math" panose="02040503050406030204" pitchFamily="18" charset="0"/>
+                          </a:rPr>
+                          <m:t>=0.5</m:t>
+                        </m:r>
+                      </m:e>
+                    </m:d>
+                  </m:oMath>
+                </a14:m>
+                <a:endParaRPr lang="en-US" sz="1100" b="1" dirty="0"/>
+              </a:p>
+              <a:p>
+                <a:r>
+                  <a:rPr lang="en-US" sz="1100" b="1" dirty="0"/>
+                  <a:t>Block D — LG input comparability (empirical caps, </a:t>
+                </a:r>
+                <a14:m>
+                  <m:oMath xmlns:m="http://schemas.openxmlformats.org/officeDocument/2006/math">
+                    <m:r>
+                      <a:rPr lang="en-US" sz="1100" b="1" i="1" dirty="0" smtClean="0">
+                        <a:latin typeface="Cambria Math" panose="02040503050406030204" pitchFamily="18" charset="0"/>
+                      </a:rPr>
+                      <m:t>𝜌</m:t>
+                    </m:r>
+                    <m:r>
+                      <a:rPr lang="en-US" sz="1100" b="1" i="0" dirty="0" err="1">
+                        <a:latin typeface="Cambria Math" panose="02040503050406030204" pitchFamily="18" charset="0"/>
+                      </a:rPr>
+                      <m:t>=0.5</m:t>
+                    </m:r>
+                  </m:oMath>
+                </a14:m>
+                <a:r>
+                  <a:rPr lang="en-US" sz="1100" b="1" dirty="0"/>
+                  <a:t>)</a:t>
+                </a:r>
+                <a:br>
+                  <a:rPr lang="en-US" sz="1100" dirty="0"/>
+                </a:br>
+                <a:r>
+                  <a:rPr lang="en-US" sz="1100" dirty="0"/>
+                  <a:t>	9 · Roster-size multiset (Alex caps fix)</a:t>
+                </a:r>
+                <a:br>
+                  <a:rPr lang="en-US" sz="1100" dirty="0"/>
+                </a:br>
+                <a:r>
+                  <a:rPr lang="en-US" sz="1100" dirty="0"/>
+                  <a:t>	10 · Team </a:t>
+                </a:r>
+                <a14:m>
+                  <m:oMath xmlns:m="http://schemas.openxmlformats.org/officeDocument/2006/math">
+                    <m:sSub>
+                      <m:sSubPr>
+                        <m:ctrlPr>
+                          <a:rPr lang="en-US" sz="1100" i="1" dirty="0">
+                            <a:latin typeface="Cambria Math" panose="02040503050406030204" pitchFamily="18" charset="0"/>
+                          </a:rPr>
+                        </m:ctrlPr>
+                      </m:sSubPr>
+                      <m:e>
+                        <m:r>
+                          <a:rPr lang="en-US" sz="1100" i="1" dirty="0">
+                            <a:latin typeface="Cambria Math" panose="02040503050406030204" pitchFamily="18" charset="0"/>
+                          </a:rPr>
+                          <m:t>𝐿</m:t>
+                        </m:r>
+                      </m:e>
+                      <m:sub>
+                        <m:r>
+                          <a:rPr lang="en-US" sz="1100" i="1" dirty="0">
+                            <a:latin typeface="Cambria Math" panose="02040503050406030204" pitchFamily="18" charset="0"/>
+                          </a:rPr>
+                          <m:t>𝐶</m:t>
+                        </m:r>
+                      </m:sub>
+                    </m:sSub>
+                  </m:oMath>
+                </a14:m>
+                <a:r>
+                  <a:rPr lang="en-US" sz="1100" dirty="0"/>
+                  <a:t> vs NCAA (</a:t>
+                </a:r>
+                <a14:m>
+                  <m:oMath xmlns:m="http://schemas.openxmlformats.org/officeDocument/2006/math">
+                    <m:r>
+                      <a:rPr lang="en-US" sz="1100" dirty="0" smtClean="0">
+                        <a:latin typeface="Cambria Math" panose="02040503050406030204" pitchFamily="18" charset="0"/>
+                      </a:rPr>
+                      <m:t>6</m:t>
+                    </m:r>
+                    <m:r>
+                      <a:rPr lang="en-US" sz="1100" i="0" dirty="0">
+                        <a:latin typeface="Cambria Math" panose="02040503050406030204" pitchFamily="18" charset="0"/>
+                      </a:rPr>
+                      <m:t>,492</m:t>
+                    </m:r>
+                  </m:oMath>
+                </a14:m>
+                <a:r>
+                  <a:rPr lang="en-US" sz="1100" dirty="0"/>
+                  <a:t> team-seasons)</a:t>
+                </a:r>
+                <a:br>
+                  <a:rPr lang="en-US" sz="1100" dirty="0"/>
+                </a:br>
+                <a:r>
+                  <a:rPr lang="en-US" sz="1100" dirty="0"/>
+                  <a:t>	11 · SELECT vs Hero — caps alone ≠ inverted-U → </a:t>
+                </a:r>
+                <a14:m>
+                  <m:oMath xmlns:m="http://schemas.openxmlformats.org/officeDocument/2006/math">
+                    <m:r>
+                      <a:rPr lang="en-US" sz="1100" i="1" dirty="0" smtClean="0">
+                        <a:latin typeface="Cambria Math" panose="02040503050406030204" pitchFamily="18" charset="0"/>
+                      </a:rPr>
+                      <m:t>𝜆</m:t>
+                    </m:r>
+                  </m:oMath>
+                </a14:m>
+                <a:r>
+                  <a:rPr lang="en-US" sz="1100" dirty="0"/>
+                  <a:t> sweep</a:t>
+                </a:r>
+              </a:p>
+              <a:p>
+                <a:r>
+                  <a:rPr lang="en-US" sz="1100" b="1" dirty="0"/>
+                  <a:t>Block E — Hero &amp; sensitivity (empirical)</a:t>
+                </a:r>
+                <a:br>
+                  <a:rPr lang="en-US" sz="1100" dirty="0"/>
+                </a:br>
+                <a:r>
+                  <a:rPr lang="en-US" sz="1100" dirty="0"/>
+                  <a:t>	12 · NCAA roster sizes vs fixed </a:t>
+                </a:r>
+                <a14:m>
+                  <m:oMath xmlns:m="http://schemas.openxmlformats.org/officeDocument/2006/math">
+                    <m:r>
+                      <a:rPr lang="en-US" sz="1100" i="1" dirty="0" smtClean="0">
+                        <a:latin typeface="Cambria Math" panose="02040503050406030204" pitchFamily="18" charset="0"/>
+                      </a:rPr>
+                      <m:t>𝐶</m:t>
+                    </m:r>
+                    <m:r>
+                      <a:rPr lang="en-US" sz="1100" i="0" dirty="0">
+                        <a:latin typeface="Cambria Math" panose="02040503050406030204" pitchFamily="18" charset="0"/>
+                      </a:rPr>
+                      <m:t>=15</m:t>
+                    </m:r>
+                  </m:oMath>
+                </a14:m>
+                <a:br>
+                  <a:rPr lang="en-US" sz="1100" dirty="0"/>
+                </a:br>
+                <a:r>
+                  <a:rPr lang="en-US" sz="1100" dirty="0"/>
+                  <a:t>	13–14 · min_minutes ladder (Hero robustness)</a:t>
+                </a:r>
+                <a:br>
+                  <a:rPr lang="en-US" sz="1100" dirty="0"/>
+                </a:br>
+                <a:r>
+                  <a:rPr lang="en-US" sz="1100" dirty="0"/>
+                  <a:t>	15–16 · LG </a:t>
+                </a:r>
+                <a14:m>
+                  <m:oMath xmlns:m="http://schemas.openxmlformats.org/officeDocument/2006/math">
+                    <m:r>
+                      <a:rPr lang="en-US" sz="1100" i="1" dirty="0" smtClean="0">
+                        <a:latin typeface="Cambria Math" panose="02040503050406030204" pitchFamily="18" charset="0"/>
+                      </a:rPr>
+                      <m:t>𝐶</m:t>
+                    </m:r>
+                  </m:oMath>
+                </a14:m>
+                <a:r>
+                  <a:rPr lang="en-US" sz="1100" dirty="0"/>
+                  <a:t> sweep (</a:t>
+                </a:r>
+                <a14:m>
+                  <m:oMath xmlns:m="http://schemas.openxmlformats.org/officeDocument/2006/math">
+                    <m:sSub>
+                      <m:sSubPr>
+                        <m:ctrlPr>
+                          <a:rPr lang="en-US" sz="1100" i="1" dirty="0">
+                            <a:latin typeface="Cambria Math" panose="02040503050406030204" pitchFamily="18" charset="0"/>
+                          </a:rPr>
+                        </m:ctrlPr>
+                      </m:sSubPr>
+                      <m:e>
+                        <m:r>
+                          <a:rPr lang="en-US" sz="1100" i="1" dirty="0">
+                            <a:latin typeface="Cambria Math" panose="02040503050406030204" pitchFamily="18" charset="0"/>
+                          </a:rPr>
+                          <m:t>𝐿</m:t>
+                        </m:r>
+                      </m:e>
+                      <m:sub>
+                        <m:r>
+                          <a:rPr lang="en-US" sz="1100" i="1" dirty="0">
+                            <a:latin typeface="Cambria Math" panose="02040503050406030204" pitchFamily="18" charset="0"/>
+                          </a:rPr>
+                          <m:t>𝐶</m:t>
+                        </m:r>
+                      </m:sub>
+                    </m:sSub>
+                  </m:oMath>
+                </a14:m>
+                <a:r>
+                  <a:rPr lang="en-US" sz="1100" dirty="0"/>
+                  <a:t> + SELECT; monotone)</a:t>
+                </a:r>
+              </a:p>
+              <a:p>
+                <a:r>
+                  <a:rPr lang="en-US" sz="1100" b="1" dirty="0"/>
+                  <a:t>Block F — </a:t>
+                </a:r>
+                <a14:m>
+                  <m:oMath xmlns:m="http://schemas.openxmlformats.org/officeDocument/2006/math">
+                    <m:r>
+                      <a:rPr lang="en-US" sz="1100" b="1" i="1" dirty="0" smtClean="0">
+                        <a:latin typeface="Cambria Math" panose="02040503050406030204" pitchFamily="18" charset="0"/>
+                      </a:rPr>
+                      <m:t>𝜆</m:t>
+                    </m:r>
+                  </m:oMath>
+                </a14:m>
+                <a:r>
+                  <a:rPr lang="en-US" sz="1100" b="1" dirty="0"/>
+                  <a:t> in SCORE (LG, empirical caps held fixed)</a:t>
+                </a:r>
+                <a:br>
+                  <a:rPr lang="en-US" sz="1100" dirty="0"/>
+                </a:br>
+                <a:r>
+                  <a:rPr lang="en-US" sz="1100" dirty="0"/>
+                  <a:t>	20 · </a:t>
+                </a:r>
+                <a14:m>
+                  <m:oMath xmlns:m="http://schemas.openxmlformats.org/officeDocument/2006/math">
+                    <m:r>
+                      <a:rPr lang="en-US" sz="1100" i="1" dirty="0" smtClean="0">
+                        <a:latin typeface="Cambria Math" panose="02040503050406030204" pitchFamily="18" charset="0"/>
+                      </a:rPr>
+                      <m:t>𝜆</m:t>
+                    </m:r>
+                  </m:oMath>
+                </a14:m>
+                <a:r>
+                  <a:rPr lang="en-US" sz="1100" dirty="0"/>
+                  <a:t> fine grid (flip </a:t>
+                </a:r>
+                <a14:m>
+                  <m:oMath xmlns:m="http://schemas.openxmlformats.org/officeDocument/2006/math">
+                    <m:r>
+                      <a:rPr lang="en-US" sz="1100" dirty="0" smtClean="0">
+                        <a:latin typeface="Cambria Math" panose="02040503050406030204" pitchFamily="18" charset="0"/>
+                      </a:rPr>
+                      <m:t>1.25</m:t>
+                    </m:r>
+                    <m:r>
+                      <a:rPr lang="en-US" sz="1100" i="0" dirty="0">
+                        <a:latin typeface="Cambria Math" panose="02040503050406030204" pitchFamily="18" charset="0"/>
+                      </a:rPr>
+                      <m:t>→1.5</m:t>
+                    </m:r>
+                  </m:oMath>
+                </a14:m>
+                <a:r>
+                  <a:rPr lang="en-US" sz="1100" dirty="0"/>
+                  <a:t>; peak bin </a:t>
+                </a:r>
+                <a14:m>
+                  <m:oMath xmlns:m="http://schemas.openxmlformats.org/officeDocument/2006/math">
+                    <m:r>
+                      <a:rPr lang="en-US" sz="1100" dirty="0" smtClean="0">
+                        <a:latin typeface="Cambria Math" panose="02040503050406030204" pitchFamily="18" charset="0"/>
+                      </a:rPr>
+                      <m:t>11</m:t>
+                    </m:r>
+                  </m:oMath>
+                </a14:m>
+                <a:r>
+                  <a:rPr lang="en-US" sz="1100" dirty="0"/>
+                  <a:t> at </a:t>
+                </a:r>
+                <a14:m>
+                  <m:oMath xmlns:m="http://schemas.openxmlformats.org/officeDocument/2006/math">
+                    <m:r>
+                      <a:rPr lang="en-US" sz="1100" i="1" dirty="0" smtClean="0">
+                        <a:latin typeface="Cambria Math" panose="02040503050406030204" pitchFamily="18" charset="0"/>
+                      </a:rPr>
+                      <m:t>𝜆</m:t>
+                    </m:r>
+                    <m:r>
+                      <a:rPr lang="en-US" sz="1100" i="0" dirty="0" err="1">
+                        <a:latin typeface="Cambria Math" panose="02040503050406030204" pitchFamily="18" charset="0"/>
+                      </a:rPr>
+                      <m:t>≈2–3</m:t>
+                    </m:r>
+                  </m:oMath>
+                </a14:m>
+                <a:r>
+                  <a:rPr lang="en-US" sz="1100" dirty="0"/>
+                  <a:t>)</a:t>
+                </a:r>
+                <a:br>
+                  <a:rPr lang="en-US" sz="1100" dirty="0"/>
+                </a:br>
+                <a:r>
+                  <a:rPr lang="en-US" sz="1100" dirty="0"/>
+                  <a:t>	21 · </a:t>
+                </a:r>
+                <a14:m>
+                  <m:oMath xmlns:m="http://schemas.openxmlformats.org/officeDocument/2006/math">
+                    <m:r>
+                      <a:rPr lang="en-US" sz="1100" i="1" dirty="0" smtClean="0">
+                        <a:latin typeface="Cambria Math" panose="02040503050406030204" pitchFamily="18" charset="0"/>
+                      </a:rPr>
+                      <m:t>𝜆</m:t>
+                    </m:r>
+                  </m:oMath>
+                </a14:m>
+                <a:r>
+                  <a:rPr lang="en-US" sz="1100" dirty="0"/>
+                  <a:t> extended grid</a:t>
+                </a:r>
+              </a:p>
+              <a:p>
+                <a:r>
+                  <a:rPr lang="en-US" sz="1100" b="1" dirty="0"/>
+                  <a:t>Block G — Empirical SCORE diagnostics (PD17)</a:t>
+                </a:r>
+                <a:br>
+                  <a:rPr lang="en-US" sz="1100" dirty="0"/>
+                </a:br>
+                <a:r>
+                  <a:rPr lang="en-US" sz="1100" dirty="0"/>
+                  <a:t>	22 · Sketch A: </a:t>
+                </a:r>
+                <a14:m>
+                  <m:oMath xmlns:m="http://schemas.openxmlformats.org/officeDocument/2006/math">
+                    <m:r>
+                      <a:rPr lang="en-US" sz="1100" i="1" dirty="0" smtClean="0">
+                        <a:latin typeface="Cambria Math" panose="02040503050406030204" pitchFamily="18" charset="0"/>
+                      </a:rPr>
+                      <m:t>𝑇</m:t>
+                    </m:r>
+                    <m:sSub>
+                      <m:sSubPr>
+                        <m:ctrlPr>
+                          <a:rPr lang="en-US" sz="1100" i="0" dirty="0" err="1">
+                            <a:latin typeface="Cambria Math" panose="02040503050406030204" pitchFamily="18" charset="0"/>
+                          </a:rPr>
+                        </m:ctrlPr>
+                      </m:sSubPr>
+                      <m:e>
+                        <m:r>
+                          <a:rPr lang="en-US" sz="1100" i="0" dirty="0" err="1">
                             <a:latin typeface="Cambria Math" panose="02040503050406030204" pitchFamily="18" charset="0"/>
                           </a:rPr>
                           <m:t>̂</m:t>
@@ -6016,7 +6585,7 @@
                       </m:e>
                       <m:sub>
                         <m:r>
-                          <a:rPr lang="en-US" sz="1000" b="0" i="0" baseline="0" dirty="0" err="1" smtClean="0">
+                          <a:rPr lang="en-US" sz="1100" i="1" dirty="0" err="1">
                             <a:latin typeface="Cambria Math" panose="02040503050406030204" pitchFamily="18" charset="0"/>
                           </a:rPr>
                           <m:t>𝑗</m:t>
@@ -6026,48 +6595,58 @@
                   </m:oMath>
                 </a14:m>
                 <a:r>
-                  <a:rPr lang="en-US" sz="1000" b="0" i="0" baseline="0" dirty="0">
-                    <a:latin typeface="Calibri"/>
-                  </a:rPr>
-                  <a:t> inputs (2011–2021 panel)</a:t>
-                </a:r>
-              </a:p>
-              <a:p>
-                <a:pPr lvl="1">
-                  <a:lnSpc>
-                    <a:spcPct val="150000"/>
-                  </a:lnSpc>
-                </a:pPr>
-                <a:r>
-                  <a:rPr lang="en-US" sz="1000" b="0" i="0" baseline="0" dirty="0">
-                    <a:latin typeface="Calibri"/>
-                  </a:rPr>
-                  <a:t>Slide 3 — NCAA interval overlap, full panel (</a:t>
-                </a:r>
-                <a:r>
-                  <a:rPr lang="el-GR" sz="1000" b="0" i="0" baseline="0" dirty="0">
-                    <a:latin typeface="Calibri"/>
-                  </a:rPr>
-                  <a:t>ρ </a:t>
-                </a:r>
-                <a:r>
-                  <a:rPr lang="en-US" sz="1000" b="0" i="0" baseline="0" dirty="0">
-                    <a:latin typeface="Calibri"/>
-                  </a:rPr>
-                  <a:t>diagnostic)</a:t>
-                </a:r>
-              </a:p>
-              <a:p>
-                <a:pPr lvl="1">
-                  <a:lnSpc>
-                    <a:spcPct val="150000"/>
-                  </a:lnSpc>
-                </a:pPr>
-                <a:r>
-                  <a:rPr lang="en-US" sz="1000" b="0" i="0" baseline="0" dirty="0">
-                    <a:latin typeface="Calibri"/>
-                  </a:rPr>
-                  <a:t>Slides 4–5 — NCAA vs LG interval pair (2015–2019 window)</a:t>
+                  <a:rPr lang="en-US" sz="1100" dirty="0"/>
+                  <a:t> vs </a:t>
+                </a:r>
+                <a14:m>
+                  <m:oMath xmlns:m="http://schemas.openxmlformats.org/officeDocument/2006/math">
+                    <m:sSub>
+                      <m:sSubPr>
+                        <m:ctrlPr>
+                          <a:rPr lang="en-US" sz="1100" i="1" dirty="0">
+                            <a:latin typeface="Cambria Math" panose="02040503050406030204" pitchFamily="18" charset="0"/>
+                          </a:rPr>
+                        </m:ctrlPr>
+                      </m:sSubPr>
+                      <m:e>
+                        <m:r>
+                          <a:rPr lang="en-US" sz="1100" i="1" dirty="0">
+                            <a:latin typeface="Cambria Math" panose="02040503050406030204" pitchFamily="18" charset="0"/>
+                          </a:rPr>
+                          <m:t>𝐿</m:t>
+                        </m:r>
+                      </m:e>
+                      <m:sub>
+                        <m:r>
+                          <a:rPr lang="en-US" sz="1100" i="1" dirty="0">
+                            <a:latin typeface="Cambria Math" panose="02040503050406030204" pitchFamily="18" charset="0"/>
+                          </a:rPr>
+                          <m:t>𝐶</m:t>
+                        </m:r>
+                      </m:sub>
+                    </m:sSub>
+                  </m:oMath>
+                </a14:m>
+                <a:br>
+                  <a:rPr lang="en-US" sz="1100" dirty="0"/>
+                </a:br>
+                <a:r>
+                  <a:rPr lang="en-US" sz="1100" dirty="0"/>
+                  <a:t>	23 · </a:t>
+                </a:r>
+                <a14:m>
+                  <m:oMath xmlns:m="http://schemas.openxmlformats.org/officeDocument/2006/math">
+                    <m:r>
+                      <a:rPr lang="en-US" sz="1100" i="1" dirty="0" smtClean="0">
+                        <a:latin typeface="Cambria Math" panose="02040503050406030204" pitchFamily="18" charset="0"/>
+                      </a:rPr>
+                      <m:t>𝛾</m:t>
+                    </m:r>
+                  </m:oMath>
+                </a14:m>
+                <a:r>
+                  <a:rPr lang="en-US" sz="1100" dirty="0"/>
+                  <a:t> sweep on real rosters</a:t>
                 </a:r>
               </a:p>
               <a:p>
@@ -6076,602 +6655,7 @@
                     <a:spcPct val="150000"/>
                   </a:lnSpc>
                 </a:pPr>
-                <a:r>
-                  <a:rPr lang="en-US" sz="1000" b="0" i="0" baseline="0" dirty="0">
-                    <a:latin typeface="Calibri"/>
-                  </a:rPr>
-                  <a:t>Block B — LG </a:t>
-                </a:r>
-                <a:r>
-                  <a:rPr lang="el-GR" sz="1000" b="0" i="0" baseline="0" dirty="0">
-                    <a:latin typeface="Calibri"/>
-                  </a:rPr>
-                  <a:t>ρ </a:t>
-                </a:r>
-                <a:r>
-                  <a:rPr lang="en-US" sz="1000" b="0" i="0" baseline="0" dirty="0">
-                    <a:latin typeface="Calibri"/>
-                  </a:rPr>
-                  <a:t>validation (ASSIGN readouts)</a:t>
-                </a:r>
-              </a:p>
-              <a:p>
-                <a:pPr lvl="1">
-                  <a:lnSpc>
-                    <a:spcPct val="150000"/>
-                  </a:lnSpc>
-                </a:pPr>
-                <a:r>
-                  <a:rPr lang="en-US" sz="1000" b="0" i="0" baseline="0" dirty="0">
-                    <a:latin typeface="Calibri"/>
-                  </a:rPr>
-                  <a:t>Slide 6 — LG ASSIGN: </a:t>
-                </a:r>
-                <a:r>
-                  <a:rPr lang="en-US" sz="1000" b="0" i="0" baseline="0" dirty="0" err="1">
-                    <a:latin typeface="Calibri"/>
-                  </a:rPr>
-                  <a:t>global_wss</a:t>
-                </a:r>
-                <a:r>
-                  <a:rPr lang="en-US" sz="1000" b="0" i="0" baseline="0" dirty="0">
-                    <a:latin typeface="Calibri"/>
-                  </a:rPr>
-                  <a:t> vs </a:t>
-                </a:r>
-                <a:r>
-                  <a:rPr lang="el-GR" sz="1000" b="0" i="0" baseline="0" dirty="0">
-                    <a:latin typeface="Calibri"/>
-                  </a:rPr>
-                  <a:t>ρ (</a:t>
-                </a:r>
-                <a:r>
-                  <a:rPr lang="en-US" sz="1000" b="0" i="0" baseline="0" dirty="0">
-                    <a:latin typeface="Calibri"/>
-                  </a:rPr>
-                  <a:t>primary)</a:t>
-                </a:r>
-              </a:p>
-              <a:p>
-                <a:pPr lvl="1">
-                  <a:lnSpc>
-                    <a:spcPct val="150000"/>
-                  </a:lnSpc>
-                </a:pPr>
-                <a:r>
-                  <a:rPr lang="en-US" sz="1000" b="0" i="0" baseline="0" dirty="0">
-                    <a:latin typeface="Calibri"/>
-                  </a:rPr>
-                  <a:t>Slide 7 — </a:t>
-                </a:r>
-                <a14:m>
-                  <m:oMath xmlns:m="http://schemas.openxmlformats.org/officeDocument/2006/math">
-                    <m:sSub>
-                      <m:sSubPr>
-                        <m:ctrlPr>
-                          <a:rPr lang="en-US" sz="1000" b="0" i="0" baseline="0" dirty="0" smtClean="0">
-                            <a:latin typeface="Cambria Math" panose="02040503050406030204" pitchFamily="18" charset="0"/>
-                          </a:rPr>
-                        </m:ctrlPr>
-                      </m:sSubPr>
-                      <m:e>
-                        <m:r>
-                          <a:rPr lang="en-US" sz="1000" b="0" i="0" baseline="0" dirty="0" smtClean="0">
-                            <a:latin typeface="Cambria Math" panose="02040503050406030204" pitchFamily="18" charset="0"/>
-                          </a:rPr>
-                          <m:t>𝐻</m:t>
-                        </m:r>
-                      </m:e>
-                      <m:sub>
-                        <m:r>
-                          <a:rPr lang="en-US" sz="1000" b="0" i="0" baseline="0" dirty="0" smtClean="0">
-                            <a:latin typeface="Cambria Math" panose="02040503050406030204" pitchFamily="18" charset="0"/>
-                          </a:rPr>
-                          <m:t>𝑠𝑜𝑟𝑡</m:t>
-                        </m:r>
-                      </m:sub>
-                    </m:sSub>
-                  </m:oMath>
-                </a14:m>
-                <a:r>
-                  <a:rPr lang="en-US" sz="1000" b="0" i="0" baseline="0" dirty="0">
-                    <a:latin typeface="Calibri"/>
-                  </a:rPr>
-                  <a:t> glossary + </a:t>
-                </a:r>
-                <a:r>
-                  <a:rPr lang="el-GR" sz="1000" b="0" i="0" baseline="0" dirty="0">
-                    <a:latin typeface="Calibri"/>
-                  </a:rPr>
-                  <a:t>ρ </a:t>
-                </a:r>
-                <a:r>
-                  <a:rPr lang="en-US" sz="1000" b="0" i="0" baseline="0" dirty="0">
-                    <a:latin typeface="Calibri"/>
-                  </a:rPr>
-                  <a:t>inset (companion)</a:t>
-                </a:r>
-              </a:p>
-              <a:p>
-                <a:pPr lvl="1">
-                  <a:lnSpc>
-                    <a:spcPct val="150000"/>
-                  </a:lnSpc>
-                </a:pPr>
-                <a:r>
-                  <a:rPr lang="en-US" sz="1000" b="0" i="0" baseline="0" dirty="0">
-                    <a:latin typeface="Calibri"/>
-                  </a:rPr>
-                  <a:t>Block C — Team </a:t>
-                </a:r>
-                <a14:m>
-                  <m:oMath xmlns:m="http://schemas.openxmlformats.org/officeDocument/2006/math">
-                    <m:sSub>
-                      <m:sSubPr>
-                        <m:ctrlPr>
-                          <a:rPr lang="en-US" sz="1000" b="0" i="0" baseline="0" dirty="0" smtClean="0">
-                            <a:latin typeface="Cambria Math" panose="02040503050406030204" pitchFamily="18" charset="0"/>
-                          </a:rPr>
-                        </m:ctrlPr>
-                      </m:sSubPr>
-                      <m:e>
-                        <m:r>
-                          <a:rPr lang="en-US" sz="1000" b="0" i="0" baseline="0" dirty="0" smtClean="0">
-                            <a:latin typeface="Cambria Math" panose="02040503050406030204" pitchFamily="18" charset="0"/>
-                          </a:rPr>
-                          <m:t>𝐿</m:t>
-                        </m:r>
-                      </m:e>
-                      <m:sub>
-                        <m:r>
-                          <a:rPr lang="en-US" sz="1000" b="0" i="0" baseline="0" dirty="0" smtClean="0">
-                            <a:latin typeface="Cambria Math" panose="02040503050406030204" pitchFamily="18" charset="0"/>
-                          </a:rPr>
-                          <m:t>𝐶</m:t>
-                        </m:r>
-                      </m:sub>
-                    </m:sSub>
-                  </m:oMath>
-                </a14:m>
-                <a:r>
-                  <a:rPr lang="en-US" sz="1000" b="0" i="0" baseline="0" dirty="0">
-                    <a:latin typeface="Calibri"/>
-                  </a:rPr>
-                  <a:t> (SCORE-side input, pre-SCORE)</a:t>
-                </a:r>
-              </a:p>
-              <a:p>
-                <a:pPr lvl="1">
-                  <a:lnSpc>
-                    <a:spcPct val="150000"/>
-                  </a:lnSpc>
-                </a:pPr>
-                <a:r>
-                  <a:rPr lang="en-US" sz="1000" b="0" i="0" baseline="0" dirty="0">
-                    <a:latin typeface="Calibri"/>
-                  </a:rPr>
-                  <a:t>Slide 8 — Empirical team </a:t>
-                </a:r>
-                <a14:m>
-                  <m:oMath xmlns:m="http://schemas.openxmlformats.org/officeDocument/2006/math">
-                    <m:sSub>
-                      <m:sSubPr>
-                        <m:ctrlPr>
-                          <a:rPr lang="en-US" sz="1000" b="0" i="0" baseline="0" dirty="0" smtClean="0">
-                            <a:latin typeface="Cambria Math" panose="02040503050406030204" pitchFamily="18" charset="0"/>
-                          </a:rPr>
-                        </m:ctrlPr>
-                      </m:sSubPr>
-                      <m:e>
-                        <m:r>
-                          <a:rPr lang="en-US" sz="1000" b="0" i="0" baseline="0" dirty="0" smtClean="0">
-                            <a:latin typeface="Cambria Math" panose="02040503050406030204" pitchFamily="18" charset="0"/>
-                          </a:rPr>
-                          <m:t>𝐿</m:t>
-                        </m:r>
-                      </m:e>
-                      <m:sub>
-                        <m:r>
-                          <a:rPr lang="en-US" sz="1000" b="0" i="0" baseline="0" dirty="0" smtClean="0">
-                            <a:latin typeface="Cambria Math" panose="02040503050406030204" pitchFamily="18" charset="0"/>
-                          </a:rPr>
-                          <m:t>𝐶</m:t>
-                        </m:r>
-                      </m:sub>
-                    </m:sSub>
-                  </m:oMath>
-                </a14:m>
-                <a:r>
-                  <a:rPr lang="en-US" sz="1000" b="0" i="0" baseline="0" dirty="0">
-                    <a:latin typeface="Calibri"/>
-                  </a:rPr>
-                  <a:t> distribution</a:t>
-                </a:r>
-              </a:p>
-              <a:p>
-                <a:pPr lvl="1">
-                  <a:lnSpc>
-                    <a:spcPct val="150000"/>
-                  </a:lnSpc>
-                </a:pPr>
-                <a:r>
-                  <a:rPr lang="en-US" sz="1000" b="0" i="0" baseline="0" dirty="0">
-                    <a:latin typeface="Calibri"/>
-                  </a:rPr>
-                  <a:t>Slides 9–11 — Empirical vs LG </a:t>
-                </a:r>
-                <a14:m>
-                  <m:oMath xmlns:m="http://schemas.openxmlformats.org/officeDocument/2006/math">
-                    <m:sSub>
-                      <m:sSubPr>
-                        <m:ctrlPr>
-                          <a:rPr lang="en-US" sz="1000" b="0" i="0" baseline="0" dirty="0" smtClean="0">
-                            <a:latin typeface="Cambria Math" panose="02040503050406030204" pitchFamily="18" charset="0"/>
-                          </a:rPr>
-                        </m:ctrlPr>
-                      </m:sSubPr>
-                      <m:e>
-                        <m:r>
-                          <a:rPr lang="en-US" sz="1000" b="0" i="0" baseline="0" dirty="0" smtClean="0">
-                            <a:latin typeface="Cambria Math" panose="02040503050406030204" pitchFamily="18" charset="0"/>
-                          </a:rPr>
-                          <m:t>𝐿</m:t>
-                        </m:r>
-                      </m:e>
-                      <m:sub>
-                        <m:r>
-                          <a:rPr lang="en-US" sz="1000" b="0" i="0" baseline="0" dirty="0" smtClean="0">
-                            <a:latin typeface="Cambria Math" panose="02040503050406030204" pitchFamily="18" charset="0"/>
-                          </a:rPr>
-                          <m:t>𝐶</m:t>
-                        </m:r>
-                      </m:sub>
-                    </m:sSub>
-                  </m:oMath>
-                </a14:m>
-                <a:r>
-                  <a:rPr lang="en-US" sz="1000" b="0" i="0" baseline="0" dirty="0">
-                    <a:latin typeface="Calibri"/>
-                  </a:rPr>
-                  <a:t> (raw · normalized · overlay)</a:t>
-                </a:r>
-              </a:p>
-              <a:p>
-                <a:pPr>
-                  <a:lnSpc>
-                    <a:spcPct val="150000"/>
-                  </a:lnSpc>
-                </a:pPr>
-                <a:r>
-                  <a:rPr lang="en-US" sz="1000" b="0" i="0" baseline="0" dirty="0">
-                    <a:latin typeface="Calibri"/>
-                  </a:rPr>
-                  <a:t>Block D — Alex comparability (inputs → SELECT)</a:t>
-                </a:r>
-              </a:p>
-              <a:p>
-                <a:pPr lvl="1">
-                  <a:lnSpc>
-                    <a:spcPct val="150000"/>
-                  </a:lnSpc>
-                </a:pPr>
-                <a:r>
-                  <a:rPr lang="en-US" sz="1000" b="0" i="0" baseline="0" dirty="0">
-                    <a:latin typeface="Calibri"/>
-                  </a:rPr>
-                  <a:t>Slide 12 — NCAA roster sizes vs fixed </a:t>
-                </a:r>
-                <a14:m>
-                  <m:oMath xmlns:m="http://schemas.openxmlformats.org/officeDocument/2006/math">
-                    <m:r>
-                      <a:rPr lang="en-US" sz="1000" b="0" i="0" baseline="0" dirty="0" smtClean="0">
-                        <a:latin typeface="Cambria Math" panose="02040503050406030204" pitchFamily="18" charset="0"/>
-                      </a:rPr>
-                      <m:t>𝐶</m:t>
-                    </m:r>
-                    <m:r>
-                      <a:rPr lang="en-US" sz="1000" b="0" i="0" baseline="0" dirty="0" smtClean="0">
-                        <a:latin typeface="Cambria Math" panose="02040503050406030204" pitchFamily="18" charset="0"/>
-                      </a:rPr>
-                      <m:t>=15</m:t>
-                    </m:r>
-                  </m:oMath>
-                </a14:m>
-                <a:endParaRPr lang="en-US" sz="1000" b="0" i="0" baseline="0" dirty="0">
-                  <a:latin typeface="Calibri"/>
-                </a:endParaRPr>
-              </a:p>
-              <a:p>
-                <a:pPr lvl="1">
-                  <a:lnSpc>
-                    <a:spcPct val="150000"/>
-                  </a:lnSpc>
-                </a:pPr>
-                <a:r>
-                  <a:rPr lang="en-US" sz="1000" b="0" i="0" baseline="0" dirty="0">
-                    <a:latin typeface="Calibri"/>
-                  </a:rPr>
-                  <a:t>Slides 13–14 — Hero min_minutes ladder (empirical inverted-U robust)</a:t>
-                </a:r>
-              </a:p>
-              <a:p>
-                <a:pPr lvl="1">
-                  <a:lnSpc>
-                    <a:spcPct val="150000"/>
-                  </a:lnSpc>
-                </a:pPr>
-                <a:r>
-                  <a:rPr lang="en-US" sz="1000" b="0" i="0" baseline="0" dirty="0">
-                    <a:latin typeface="Calibri"/>
-                  </a:rPr>
-                  <a:t>Slides 15–16 — LG capacity sweep: </a:t>
-                </a:r>
-                <a14:m>
-                  <m:oMath xmlns:m="http://schemas.openxmlformats.org/officeDocument/2006/math">
-                    <m:sSub>
-                      <m:sSubPr>
-                        <m:ctrlPr>
-                          <a:rPr lang="en-US" sz="1000" b="0" i="0" baseline="0" dirty="0" smtClean="0">
-                            <a:latin typeface="Cambria Math" panose="02040503050406030204" pitchFamily="18" charset="0"/>
-                          </a:rPr>
-                        </m:ctrlPr>
-                      </m:sSubPr>
-                      <m:e>
-                        <m:r>
-                          <a:rPr lang="en-US" sz="1000" b="0" i="0" baseline="0" dirty="0" smtClean="0">
-                            <a:latin typeface="Cambria Math" panose="02040503050406030204" pitchFamily="18" charset="0"/>
-                          </a:rPr>
-                          <m:t>𝐿</m:t>
-                        </m:r>
-                      </m:e>
-                      <m:sub>
-                        <m:r>
-                          <a:rPr lang="en-US" sz="1000" b="0" i="0" baseline="0" dirty="0" smtClean="0">
-                            <a:latin typeface="Cambria Math" panose="02040503050406030204" pitchFamily="18" charset="0"/>
-                          </a:rPr>
-                          <m:t>𝐶</m:t>
-                        </m:r>
-                      </m:sub>
-                    </m:sSub>
-                  </m:oMath>
-                </a14:m>
-                <a:r>
-                  <a:rPr lang="en-US" sz="1000" b="0" i="0" baseline="0" dirty="0">
-                    <a:latin typeface="Calibri"/>
-                  </a:rPr>
-                  <a:t> vs NCAA · SELECT vs Hero</a:t>
-                </a:r>
-              </a:p>
-              <a:p>
-                <a:pPr lvl="1">
-                  <a:lnSpc>
-                    <a:spcPct val="150000"/>
-                  </a:lnSpc>
-                </a:pPr>
-                <a:r>
-                  <a:rPr lang="en-US" sz="1000" b="0" i="0" baseline="0" dirty="0">
-                    <a:latin typeface="Calibri"/>
-                  </a:rPr>
-                  <a:t>Slide 17 — Empirical roster-size multiset (Alex caps fix)</a:t>
-                </a:r>
-              </a:p>
-              <a:p>
-                <a:pPr lvl="1">
-                  <a:lnSpc>
-                    <a:spcPct val="150000"/>
-                  </a:lnSpc>
-                </a:pPr>
-                <a:r>
-                  <a:rPr lang="en-US" sz="1000" b="0" i="0" baseline="0" dirty="0">
-                    <a:latin typeface="Calibri"/>
-                  </a:rPr>
-                  <a:t>Slides 18–19 — Empirical caps: </a:t>
-                </a:r>
-                <a14:m>
-                  <m:oMath xmlns:m="http://schemas.openxmlformats.org/officeDocument/2006/math">
-                    <m:sSub>
-                      <m:sSubPr>
-                        <m:ctrlPr>
-                          <a:rPr lang="en-US" sz="1000" b="0" i="0" baseline="0" dirty="0" smtClean="0">
-                            <a:latin typeface="Cambria Math" panose="02040503050406030204" pitchFamily="18" charset="0"/>
-                          </a:rPr>
-                        </m:ctrlPr>
-                      </m:sSubPr>
-                      <m:e>
-                        <m:r>
-                          <a:rPr lang="en-US" sz="1000" b="0" i="0" baseline="0" dirty="0" smtClean="0">
-                            <a:latin typeface="Cambria Math" panose="02040503050406030204" pitchFamily="18" charset="0"/>
-                          </a:rPr>
-                          <m:t>𝐿</m:t>
-                        </m:r>
-                      </m:e>
-                      <m:sub>
-                        <m:r>
-                          <a:rPr lang="en-US" sz="1000" b="0" i="0" baseline="0" dirty="0" smtClean="0">
-                            <a:latin typeface="Cambria Math" panose="02040503050406030204" pitchFamily="18" charset="0"/>
-                          </a:rPr>
-                          <m:t>𝐶</m:t>
-                        </m:r>
-                      </m:sub>
-                    </m:sSub>
-                  </m:oMath>
-                </a14:m>
-                <a:r>
-                  <a:rPr lang="en-US" sz="1000" b="0" i="0" baseline="0" dirty="0">
-                    <a:latin typeface="Calibri"/>
-                  </a:rPr>
-                  <a:t> vs NCAA · SELECT vs Hero</a:t>
-                </a:r>
-              </a:p>
-              <a:p>
-                <a:pPr>
-                  <a:lnSpc>
-                    <a:spcPct val="150000"/>
-                  </a:lnSpc>
-                </a:pPr>
-                <a:r>
-                  <a:rPr lang="en-US" sz="1000" b="0" i="0" baseline="0" dirty="0">
-                    <a:latin typeface="Calibri"/>
-                  </a:rPr>
-                  <a:t>Block E — SCORE-side empirical (PD17)</a:t>
-                </a:r>
-              </a:p>
-              <a:p>
-                <a:pPr lvl="1">
-                  <a:lnSpc>
-                    <a:spcPct val="150000"/>
-                  </a:lnSpc>
-                </a:pPr>
-                <a:r>
-                  <a:rPr lang="en-US" sz="1000" b="0" i="0" baseline="0" dirty="0">
-                    <a:latin typeface="Calibri"/>
-                  </a:rPr>
-                  <a:t>Slide 20 — Sketch A: </a:t>
-                </a:r>
-                <a14:m>
-                  <m:oMath xmlns:m="http://schemas.openxmlformats.org/officeDocument/2006/math">
-                    <m:r>
-                      <a:rPr lang="en-US" sz="1000" b="0" i="0" baseline="0" dirty="0" smtClean="0">
-                        <a:latin typeface="Cambria Math" panose="02040503050406030204" pitchFamily="18" charset="0"/>
-                      </a:rPr>
-                      <m:t>𝑇</m:t>
-                    </m:r>
-                    <m:sSub>
-                      <m:sSubPr>
-                        <m:ctrlPr>
-                          <a:rPr lang="en-US" sz="1000" b="0" i="0" baseline="0" dirty="0" err="1" smtClean="0">
-                            <a:latin typeface="Cambria Math" panose="02040503050406030204" pitchFamily="18" charset="0"/>
-                          </a:rPr>
-                        </m:ctrlPr>
-                      </m:sSubPr>
-                      <m:e>
-                        <m:r>
-                          <a:rPr lang="en-US" sz="1000" b="0" i="0" baseline="0" dirty="0" err="1" smtClean="0">
-                            <a:latin typeface="Cambria Math" panose="02040503050406030204" pitchFamily="18" charset="0"/>
-                          </a:rPr>
-                          <m:t>̂</m:t>
-                        </m:r>
-                      </m:e>
-                      <m:sub>
-                        <m:r>
-                          <a:rPr lang="en-US" sz="1000" b="0" i="0" baseline="0" dirty="0" err="1" smtClean="0">
-                            <a:latin typeface="Cambria Math" panose="02040503050406030204" pitchFamily="18" charset="0"/>
-                          </a:rPr>
-                          <m:t>𝑗</m:t>
-                        </m:r>
-                      </m:sub>
-                    </m:sSub>
-                  </m:oMath>
-                </a14:m>
-                <a:r>
-                  <a:rPr lang="en-US" sz="1000" b="0" i="0" baseline="0" dirty="0">
-                    <a:latin typeface="Calibri"/>
-                  </a:rPr>
-                  <a:t> vs </a:t>
-                </a:r>
-                <a14:m>
-                  <m:oMath xmlns:m="http://schemas.openxmlformats.org/officeDocument/2006/math">
-                    <m:sSub>
-                      <m:sSubPr>
-                        <m:ctrlPr>
-                          <a:rPr lang="en-US" sz="1000" b="0" i="0" baseline="0" dirty="0" smtClean="0">
-                            <a:latin typeface="Cambria Math" panose="02040503050406030204" pitchFamily="18" charset="0"/>
-                          </a:rPr>
-                        </m:ctrlPr>
-                      </m:sSubPr>
-                      <m:e>
-                        <m:r>
-                          <a:rPr lang="en-US" sz="1000" b="0" i="0" baseline="0" dirty="0" smtClean="0">
-                            <a:latin typeface="Cambria Math" panose="02040503050406030204" pitchFamily="18" charset="0"/>
-                          </a:rPr>
-                          <m:t>𝐿</m:t>
-                        </m:r>
-                      </m:e>
-                      <m:sub>
-                        <m:r>
-                          <a:rPr lang="en-US" sz="1000" b="0" i="0" baseline="0" dirty="0" smtClean="0">
-                            <a:latin typeface="Cambria Math" panose="02040503050406030204" pitchFamily="18" charset="0"/>
-                          </a:rPr>
-                          <m:t>𝐶</m:t>
-                        </m:r>
-                      </m:sub>
-                    </m:sSub>
-                  </m:oMath>
-                </a14:m>
-                <a:endParaRPr lang="en-US" sz="1000" b="0" i="0" baseline="0" dirty="0">
-                  <a:latin typeface="Calibri"/>
-                </a:endParaRPr>
-              </a:p>
-              <a:p>
-                <a:pPr lvl="1">
-                  <a:lnSpc>
-                    <a:spcPct val="150000"/>
-                  </a:lnSpc>
-                </a:pPr>
-                <a:r>
-                  <a:rPr lang="en-US" sz="1000" b="0" i="0" baseline="0" dirty="0">
-                    <a:latin typeface="Calibri"/>
-                  </a:rPr>
-                  <a:t>Slide 21 — </a:t>
-                </a:r>
-                <a:r>
-                  <a:rPr lang="el-GR" sz="1000" b="0" i="0" baseline="0" dirty="0">
-                    <a:latin typeface="Calibri"/>
-                  </a:rPr>
-                  <a:t>γ </a:t>
-                </a:r>
-                <a:r>
-                  <a:rPr lang="en-US" sz="1000" b="0" i="0" baseline="0" dirty="0">
-                    <a:latin typeface="Calibri"/>
-                  </a:rPr>
-                  <a:t>sweep on real rosters</a:t>
-                </a:r>
-              </a:p>
-              <a:p>
-                <a:pPr>
-                  <a:lnSpc>
-                    <a:spcPct val="150000"/>
-                  </a:lnSpc>
-                </a:pPr>
-                <a:r>
-                  <a:rPr lang="en-US" sz="1000" b="0" i="0" baseline="0" dirty="0">
-                    <a:latin typeface="Calibri"/>
-                  </a:rPr>
-                  <a:t>Appendix</a:t>
-                </a:r>
-              </a:p>
-              <a:p>
-                <a:pPr lvl="1">
-                  <a:lnSpc>
-                    <a:spcPct val="150000"/>
-                  </a:lnSpc>
-                </a:pPr>
-                <a:r>
-                  <a:rPr lang="en-US" sz="1000" b="0" i="0" baseline="0" dirty="0">
-                    <a:latin typeface="Calibri"/>
-                  </a:rPr>
-                  <a:t>Slide 22 — 539 </a:t>
-                </a:r>
-                <a:r>
-                  <a:rPr lang="el-GR" sz="1000" b="0" i="0" baseline="0" dirty="0">
-                    <a:latin typeface="Calibri"/>
-                  </a:rPr>
-                  <a:t>ρ </a:t>
-                </a:r>
-                <a:r>
-                  <a:rPr lang="en-US" sz="1000" b="0" i="0" baseline="0" dirty="0">
-                    <a:latin typeface="Calibri"/>
-                  </a:rPr>
-                  <a:t>calibration capstone (legacy sim axes)</a:t>
-                </a:r>
-              </a:p>
-              <a:p>
-                <a:pPr>
-                  <a:lnSpc>
-                    <a:spcPct val="150000"/>
-                  </a:lnSpc>
-                </a:pPr>
-                <a:endParaRPr sz="1000" b="0" i="0" baseline="0" dirty="0">
+                <a:endParaRPr sz="500" b="0" i="0" baseline="0" dirty="0">
                   <a:latin typeface="Calibri"/>
                 </a:endParaRPr>
               </a:p>
@@ -6695,8 +6679,8 @@
             </p:nvSpPr>
             <p:spPr>
               <a:xfrm>
-                <a:off x="6984337" y="1264044"/>
-                <a:ext cx="4411913" cy="5146794"/>
+                <a:off x="6908535" y="1393171"/>
+                <a:ext cx="4411913" cy="4089196"/>
               </a:xfrm>
               <a:prstGeom prst="rect">
                 <a:avLst/>
@@ -6723,8 +6707,8 @@
           </p:sp>
         </mc:Fallback>
       </mc:AlternateContent>
-      <mc:AlternateContent xmlns:mc="http://schemas.openxmlformats.org/markup-compatibility/2006" xmlns:a14="http://schemas.microsoft.com/office/drawing/2010/main">
-        <mc:Choice Requires="a14">
+      <mc:AlternateContent xmlns:mc="http://schemas.openxmlformats.org/markup-compatibility/2006">
+        <mc:Choice xmlns:a14="http://schemas.microsoft.com/office/drawing/2010/main" Requires="a14">
           <p:sp>
             <p:nvSpPr>
               <p:cNvPr id="11" name="TextBox 10">
@@ -6753,17 +6737,20 @@
               </a:bodyPr>
               <a:lstStyle/>
               <a:p>
-                <a:pPr algn="l"/>
                 <a:r>
                   <a:rPr sz="1100" b="1" i="0" baseline="0" dirty="0">
                     <a:latin typeface="Calibri"/>
                   </a:rPr>
-                  <a:t>Claim (PD17): Map empirical properties of real rosters — prerequisite for pinning </a:t>
-                </a:r>
-                <a14:m>
-                  <m:oMath xmlns:m="http://schemas.openxmlformats.org/officeDocument/2006/math">
-                    <m:r>
-                      <a:rPr lang="en-US" sz="1100" b="1" i="0" baseline="0" dirty="0" smtClean="0">
+                  <a:t>Claim (PD17): </a:t>
+                </a:r>
+                <a:r>
+                  <a:rPr lang="en-US" sz="1100" dirty="0"/>
+                  <a:t>Map empirical roster geometry; validate </a:t>
+                </a:r>
+                <a14:m>
+                  <m:oMath xmlns:m="http://schemas.openxmlformats.org/officeDocument/2006/math">
+                    <m:r>
+                      <a:rPr lang="en-US" sz="1100" i="1" dirty="0" smtClean="0">
                         <a:latin typeface="Cambria Math" panose="02040503050406030204" pitchFamily="18" charset="0"/>
                       </a:rPr>
                       <m:t>𝜌</m:t>
@@ -6771,47 +6758,17 @@
                   </m:oMath>
                 </a14:m>
                 <a:r>
-                  <a:rPr sz="1100" b="1" i="0" baseline="0" dirty="0">
-                    <a:latin typeface="Calibri"/>
-                  </a:rPr>
-                  <a:t> and </a:t>
-                </a:r>
-                <a14:m>
-                  <m:oMath xmlns:m="http://schemas.openxmlformats.org/officeDocument/2006/math">
-                    <m:r>
-                      <a:rPr lang="en-US" sz="1100" b="1" i="0" baseline="0" dirty="0" smtClean="0">
-                        <a:latin typeface="Cambria Math" panose="02040503050406030204" pitchFamily="18" charset="0"/>
-                      </a:rPr>
-                      <m:t>𝜃</m:t>
-                    </m:r>
-                  </m:oMath>
-                </a14:m>
-                <a:r>
-                  <a:rPr sz="1100" b="1" i="0" baseline="0" dirty="0">
-                    <a:latin typeface="Calibri"/>
-                  </a:rPr>
-                  <a:t> from data, then </a:t>
-                </a:r>
-                <a14:m>
-                  <m:oMath xmlns:m="http://schemas.openxmlformats.org/officeDocument/2006/math">
-                    <m:r>
-                      <a:rPr lang="en-US" sz="1100" b="1" i="0" baseline="0" dirty="0" smtClean="0">
-                        <a:latin typeface="Cambria Math" panose="02040503050406030204" pitchFamily="18" charset="0"/>
-                      </a:rPr>
-                      <m:t>𝛾</m:t>
-                    </m:r>
-                  </m:oMath>
-                </a14:m>
-                <a:r>
-                  <a:rPr sz="1100" b="1" i="0" baseline="0" dirty="0">
-                    <a:latin typeface="Calibri"/>
-                  </a:rPr>
-                  <a:t> and </a:t>
-                </a:r>
-                <a14:m>
-                  <m:oMath xmlns:m="http://schemas.openxmlformats.org/officeDocument/2006/math">
-                    <m:r>
-                      <a:rPr lang="en-US" sz="1100" b="1" i="0" baseline="0" dirty="0" smtClean="0">
+                  <a:rPr lang="en-US" sz="1100" dirty="0"/>
+                  <a:t> on ASSIGN; with caps fixed, </a:t>
+                </a:r>
+                <a:r>
+                  <a:rPr lang="en-US" sz="1100" b="1" dirty="0"/>
+                  <a:t>Hero shape on LOO emerges in LG via </a:t>
+                </a:r>
+                <a14:m>
+                  <m:oMath xmlns:m="http://schemas.openxmlformats.org/officeDocument/2006/math">
+                    <m:r>
+                      <a:rPr lang="en-US" sz="1100" b="1" i="1" dirty="0" smtClean="0">
                         <a:latin typeface="Cambria Math" panose="02040503050406030204" pitchFamily="18" charset="0"/>
                       </a:rPr>
                       <m:t>𝜆</m:t>
@@ -6819,16 +6776,35 @@
                   </m:oMath>
                 </a14:m>
                 <a:r>
-                  <a:rPr sz="1100" b="1" i="0" baseline="0" dirty="0">
-                    <a:latin typeface="Calibri"/>
-                  </a:rPr>
-                  <a:t> without hero-curve matching.</a:t>
-                </a:r>
+                  <a:rPr lang="en-US" sz="1100" b="1" dirty="0"/>
+                  <a:t> in SCORE</a:t>
+                </a:r>
+                <a:r>
+                  <a:rPr lang="en-US" sz="1100" dirty="0"/>
+                  <a:t> (slides 20–21) — not via </a:t>
+                </a:r>
+                <a14:m>
+                  <m:oMath xmlns:m="http://schemas.openxmlformats.org/officeDocument/2006/math">
+                    <m:r>
+                      <a:rPr lang="en-US" sz="1100" i="1" dirty="0" smtClean="0">
+                        <a:latin typeface="Cambria Math" panose="02040503050406030204" pitchFamily="18" charset="0"/>
+                      </a:rPr>
+                      <m:t>𝜌</m:t>
+                    </m:r>
+                  </m:oMath>
+                </a14:m>
+                <a:r>
+                  <a:rPr lang="en-US" sz="1100" dirty="0"/>
+                  <a:t> or roster alignment alone.</a:t>
+                </a:r>
+                <a:endParaRPr sz="1100" b="1" i="0" baseline="0" dirty="0">
+                  <a:latin typeface="Calibri"/>
+                </a:endParaRPr>
               </a:p>
             </p:txBody>
           </p:sp>
         </mc:Choice>
-        <mc:Fallback xmlns="">
+        <mc:Fallback>
           <p:sp>
             <p:nvSpPr>
               <p:cNvPr id="11" name="TextBox 10">
